--- a/assets/decks/episodio-01-baseline-core-1-12.pptx
+++ b/assets/decks/episodio-01-baseline-core-1-12.pptx
@@ -2,31 +2,31 @@
 <file path=ppt/presentation.xml><?xml version="1.0" encoding="utf-8"?>
 <p:presentation xmlns:p="http://schemas.openxmlformats.org/presentationml/2006/main">
   <p:sldMasterIdLst>
-    <p:sldMasterId xmlns:r="http://schemas.openxmlformats.org/officeDocument/2006/relationships" id="2147483648" r:id="Rcbaae41724654244"/>
-    <p:sldMasterId xmlns:r="http://schemas.openxmlformats.org/officeDocument/2006/relationships" id="2147483650" r:id="Rad4d30de964c487c"/>
+    <p:sldMasterId xmlns:r="http://schemas.openxmlformats.org/officeDocument/2006/relationships" id="2147483648" r:id="Rba7f1f686d184949"/>
+    <p:sldMasterId xmlns:r="http://schemas.openxmlformats.org/officeDocument/2006/relationships" id="2147483650" r:id="R324b61d0b930412e"/>
   </p:sldMasterIdLst>
   <p:notesMasterIdLst>
-    <p:notesMasterId xmlns:r="http://schemas.openxmlformats.org/officeDocument/2006/relationships" r:id="R54657bfe582844c2"/>
+    <p:notesMasterId xmlns:r="http://schemas.openxmlformats.org/officeDocument/2006/relationships" r:id="R5d0043a484fb4b5e"/>
   </p:notesMasterIdLst>
   <p:sldIdLst>
-    <p:sldId xmlns:r="http://schemas.openxmlformats.org/officeDocument/2006/relationships" id="256" r:id="Raef8dd9e893949db"/>
-    <p:sldId xmlns:r="http://schemas.openxmlformats.org/officeDocument/2006/relationships" id="257" r:id="R30a48f79411a4d47"/>
-    <p:sldId xmlns:r="http://schemas.openxmlformats.org/officeDocument/2006/relationships" id="258" r:id="Rff33f2e7f87946b0"/>
-    <p:sldId xmlns:r="http://schemas.openxmlformats.org/officeDocument/2006/relationships" id="259" r:id="R6b9a6f0da097424f"/>
-    <p:sldId xmlns:r="http://schemas.openxmlformats.org/officeDocument/2006/relationships" id="260" r:id="R4d94ae5942a4455e"/>
-    <p:sldId xmlns:r="http://schemas.openxmlformats.org/officeDocument/2006/relationships" id="261" r:id="R97e007368d3940c8"/>
-    <p:sldId xmlns:r="http://schemas.openxmlformats.org/officeDocument/2006/relationships" id="262" r:id="R7b686031c6874ef3"/>
-    <p:sldId xmlns:r="http://schemas.openxmlformats.org/officeDocument/2006/relationships" id="263" r:id="Rae998dbac04544ea"/>
-    <p:sldId xmlns:r="http://schemas.openxmlformats.org/officeDocument/2006/relationships" id="264" r:id="R26d71eab0a274030"/>
-    <p:sldId xmlns:r="http://schemas.openxmlformats.org/officeDocument/2006/relationships" id="265" r:id="Redb6d4bb39c34d45"/>
-    <p:sldId xmlns:r="http://schemas.openxmlformats.org/officeDocument/2006/relationships" id="266" r:id="Rbdabcb17703641d9"/>
-    <p:sldId xmlns:r="http://schemas.openxmlformats.org/officeDocument/2006/relationships" id="267" r:id="R7722077d1e244c16"/>
-    <p:sldId xmlns:r="http://schemas.openxmlformats.org/officeDocument/2006/relationships" id="268" r:id="R7c2c28d2abf04efa"/>
-    <p:sldId xmlns:r="http://schemas.openxmlformats.org/officeDocument/2006/relationships" id="269" r:id="R1f4b42e9a1044242"/>
-    <p:sldId xmlns:r="http://schemas.openxmlformats.org/officeDocument/2006/relationships" id="270" r:id="R1293a56132734fa3"/>
-    <p:sldId xmlns:r="http://schemas.openxmlformats.org/officeDocument/2006/relationships" id="271" r:id="R9546df02b07c466d"/>
-    <p:sldId xmlns:r="http://schemas.openxmlformats.org/officeDocument/2006/relationships" id="272" r:id="Re2dfaf9e287d485f"/>
-    <p:sldId xmlns:r="http://schemas.openxmlformats.org/officeDocument/2006/relationships" id="273" r:id="R43db0fc5712e4560"/>
+    <p:sldId xmlns:r="http://schemas.openxmlformats.org/officeDocument/2006/relationships" id="256" r:id="R444b18f23dab40bf"/>
+    <p:sldId xmlns:r="http://schemas.openxmlformats.org/officeDocument/2006/relationships" id="257" r:id="R3a5f20b938244436"/>
+    <p:sldId xmlns:r="http://schemas.openxmlformats.org/officeDocument/2006/relationships" id="258" r:id="Rac3550273846435d"/>
+    <p:sldId xmlns:r="http://schemas.openxmlformats.org/officeDocument/2006/relationships" id="259" r:id="Re221509f92dc43fc"/>
+    <p:sldId xmlns:r="http://schemas.openxmlformats.org/officeDocument/2006/relationships" id="260" r:id="Rad6be9c286c642d4"/>
+    <p:sldId xmlns:r="http://schemas.openxmlformats.org/officeDocument/2006/relationships" id="261" r:id="R7d81cf59a04543de"/>
+    <p:sldId xmlns:r="http://schemas.openxmlformats.org/officeDocument/2006/relationships" id="262" r:id="Rf4cf19367683469f"/>
+    <p:sldId xmlns:r="http://schemas.openxmlformats.org/officeDocument/2006/relationships" id="263" r:id="Rf7745eb72ffc40a4"/>
+    <p:sldId xmlns:r="http://schemas.openxmlformats.org/officeDocument/2006/relationships" id="264" r:id="R6d172b3fb0ce425f"/>
+    <p:sldId xmlns:r="http://schemas.openxmlformats.org/officeDocument/2006/relationships" id="265" r:id="R1d7da2b79f884420"/>
+    <p:sldId xmlns:r="http://schemas.openxmlformats.org/officeDocument/2006/relationships" id="266" r:id="R304a32b092cf41aa"/>
+    <p:sldId xmlns:r="http://schemas.openxmlformats.org/officeDocument/2006/relationships" id="267" r:id="R6ac9e536e24340e8"/>
+    <p:sldId xmlns:r="http://schemas.openxmlformats.org/officeDocument/2006/relationships" id="268" r:id="R67ecbe595db14ee6"/>
+    <p:sldId xmlns:r="http://schemas.openxmlformats.org/officeDocument/2006/relationships" id="269" r:id="R89ccfc3032484c26"/>
+    <p:sldId xmlns:r="http://schemas.openxmlformats.org/officeDocument/2006/relationships" id="270" r:id="R5fc0494b408c4f1f"/>
+    <p:sldId xmlns:r="http://schemas.openxmlformats.org/officeDocument/2006/relationships" id="271" r:id="Re79ca69238474966"/>
+    <p:sldId xmlns:r="http://schemas.openxmlformats.org/officeDocument/2006/relationships" id="272" r:id="R13ce6687e33e4fcc"/>
+    <p:sldId xmlns:r="http://schemas.openxmlformats.org/officeDocument/2006/relationships" id="273" r:id="Rfe7af13b1cf34765"/>
   </p:sldIdLst>
   <p:sldSz cx="12192000" cy="6858000"/>
   <p:notesSz cx="6858000" cy="9144000"/>
@@ -460,7 +460,57 @@
           <a:lstStyle xmlns:a="http://schemas.openxmlformats.org/drawingml/2006/main"/>
           <a:p xmlns:a="http://schemas.openxmlformats.org/drawingml/2006/main">
             <a:r>
-              <a:t>Apresente o objetivo do EPISÓDIO 1 e conecte-o ao checkpoint executável. Título de vídeo não é evidência. Manifest, testes e resultados executáveis são.</a:t>
+              <a:t>[Roteiro recomendado]</a:t>
+            </a:r>
+          </a:p>
+          <a:p xmlns:a="http://schemas.openxmlformats.org/drawingml/2006/main">
+            <a:r>
+              <a:t>[Tempo sugerido: 00:45]</a:t>
+            </a:r>
+          </a:p>
+          <a:p xmlns:a="http://schemas.openxmlformats.org/drawingml/2006/main">
+            <a:r>
+              <a:t/>
+            </a:r>
+          </a:p>
+          <a:p xmlns:a="http://schemas.openxmlformats.org/drawingml/2006/main">
+            <a:r>
+              <a:t>Fala sugerida:</a:t>
+            </a:r>
+          </a:p>
+          <a:p xmlns:a="http://schemas.openxmlformats.org/drawingml/2006/main">
+            <a:r>
+              <a:t>Bem-vindo ao episódio 1 do dbt Moderno na Prática. Hoje vamos trabalhar o tema “O que a série ensinou — e o que falta provar”. Baseline aberto e suportado com dbt Core 1.12. O objetivo não é apenas conhecer o conceito: vamos conectá-lo ao laboratório e terminar com uma evidência que você consegue reproduzir no seu próprio ambiente. Ao longo da aula, separe sempre o que é recurso aberto e estável daquilo que aparecerá apenas no Radar.</a:t>
+            </a:r>
+          </a:p>
+          <a:p xmlns:a="http://schemas.openxmlformats.org/drawingml/2006/main">
+            <a:r>
+              <a:t/>
+            </a:r>
+          </a:p>
+          <a:p xmlns:a="http://schemas.openxmlformats.org/drawingml/2006/main">
+            <a:r>
+              <a:t>O que destacar:</a:t>
+            </a:r>
+          </a:p>
+          <a:p xmlns:a="http://schemas.openxmlformats.org/drawingml/2006/main">
+            <a:r>
+              <a:t>- Apresente o título, situe o checkpoint 01 e deixe claro que a aula faz parte da trilha open/stable.</a:t>
+            </a:r>
+          </a:p>
+          <a:p xmlns:a="http://schemas.openxmlformats.org/drawingml/2006/main">
+            <a:r>
+              <a:t/>
+            </a:r>
+          </a:p>
+          <a:p xmlns:a="http://schemas.openxmlformats.org/drawingml/2006/main">
+            <a:r>
+              <a:t>Transição:</a:t>
+            </a:r>
+          </a:p>
+          <a:p xmlns:a="http://schemas.openxmlformats.org/drawingml/2006/main">
+            <a:r>
+              <a:t>Com esse ponto estabelecido, avance para “Título de vídeo não é evidência. Manifest, testes e resultados executáveis são.”.</a:t>
             </a:r>
           </a:p>
           <a:p xmlns:a="http://schemas.openxmlformats.org/drawingml/2006/main">
@@ -575,7 +625,57 @@
           <a:lstStyle xmlns:a="http://schemas.openxmlformats.org/drawingml/2006/main"/>
           <a:p xmlns:a="http://schemas.openxmlformats.org/drawingml/2006/main">
             <a:r>
-              <a:t>Use a composição para explicar visualmente: Manifest descreve o projeto; run_results registra a execução. O que existe O que depende do quê O que passou ou falhou</a:t>
+              <a:t>[Roteiro recomendado]</a:t>
+            </a:r>
+          </a:p>
+          <a:p xmlns:a="http://schemas.openxmlformats.org/drawingml/2006/main">
+            <a:r>
+              <a:t>[Tempo sugerido: 00:55]</a:t>
+            </a:r>
+          </a:p>
+          <a:p xmlns:a="http://schemas.openxmlformats.org/drawingml/2006/main">
+            <a:r>
+              <a:t/>
+            </a:r>
+          </a:p>
+          <a:p xmlns:a="http://schemas.openxmlformats.org/drawingml/2006/main">
+            <a:r>
+              <a:t>Fala sugerida:</a:t>
+            </a:r>
+          </a:p>
+          <a:p xmlns:a="http://schemas.openxmlformats.org/drawingml/2006/main">
+            <a:r>
+              <a:t>Agora vamos ler a ideia visualmente. Manifest descreve o projeto; run_results registra a execução. Siga a composição na ordem mostrada e conecte build, Artifacts, O que existe, O que depende do quê e O que passou ou falhou. A imagem ou o fluxo não cria uma regra nova; ele torna visível a relação que acabamos de explicar. Use a disposição dos elementos para reforçar causa, dependência ou comparação.</a:t>
+            </a:r>
+          </a:p>
+          <a:p xmlns:a="http://schemas.openxmlformats.org/drawingml/2006/main">
+            <a:r>
+              <a:t/>
+            </a:r>
+          </a:p>
+          <a:p xmlns:a="http://schemas.openxmlformats.org/drawingml/2006/main">
+            <a:r>
+              <a:t>O que destacar:</a:t>
+            </a:r>
+          </a:p>
+          <a:p xmlns:a="http://schemas.openxmlformats.org/drawingml/2006/main">
+            <a:r>
+              <a:t>- Acompanhe o fluxo ou a comparação com o cursor e preserve a ordem de leitura do slide.</a:t>
+            </a:r>
+          </a:p>
+          <a:p xmlns:a="http://schemas.openxmlformats.org/drawingml/2006/main">
+            <a:r>
+              <a:t/>
+            </a:r>
+          </a:p>
+          <a:p xmlns:a="http://schemas.openxmlformats.org/drawingml/2006/main">
+            <a:r>
+              <a:t>Transição:</a:t>
+            </a:r>
+          </a:p>
+          <a:p xmlns:a="http://schemas.openxmlformats.org/drawingml/2006/main">
+            <a:r>
+              <a:t>Com esse ponto estabelecido, avance para “Demonstração — execute”.</a:t>
             </a:r>
           </a:p>
           <a:p xmlns:a="http://schemas.openxmlformats.org/drawingml/2006/main">
@@ -690,7 +790,57 @@
           <a:lstStyle xmlns:a="http://schemas.openxmlformats.org/drawingml/2006/main"/>
           <a:p xmlns:a="http://schemas.openxmlformats.org/drawingml/2006/main">
             <a:r>
-              <a:t>Execute python course.py checkpoint 01. Pause para o aluno acompanhar o terminal.</a:t>
+              <a:t>[Roteiro recomendado]</a:t>
+            </a:r>
+          </a:p>
+          <a:p xmlns:a="http://schemas.openxmlformats.org/drawingml/2006/main">
+            <a:r>
+              <a:t>[Tempo sugerido: 01:20]</a:t>
+            </a:r>
+          </a:p>
+          <a:p xmlns:a="http://schemas.openxmlformats.org/drawingml/2006/main">
+            <a:r>
+              <a:t/>
+            </a:r>
+          </a:p>
+          <a:p xmlns:a="http://schemas.openxmlformats.org/drawingml/2006/main">
+            <a:r>
+              <a:t>Fala sugerida:</a:t>
+            </a:r>
+          </a:p>
+          <a:p xmlns:a="http://schemas.openxmlformats.org/drawingml/2006/main">
+            <a:r>
+              <a:t>Agora vamos sair da explicação e comprovar o comportamento. Execute os comandos exatamente como aparecem: python course.py checkpoint 01. Não é necessário ativar o ambiente virtual manualmente; o launcher do curso seleciona o ambiente correto. Antes de avançar, confirme que o comando iniciou sem erro e dê tempo para o aluno acompanhar a mesma etapa.</a:t>
+            </a:r>
+          </a:p>
+          <a:p xmlns:a="http://schemas.openxmlformats.org/drawingml/2006/main">
+            <a:r>
+              <a:t/>
+            </a:r>
+          </a:p>
+          <a:p xmlns:a="http://schemas.openxmlformats.org/drawingml/2006/main">
+            <a:r>
+              <a:t>O que destacar:</a:t>
+            </a:r>
+          </a:p>
+          <a:p xmlns:a="http://schemas.openxmlformats.org/drawingml/2006/main">
+            <a:r>
+              <a:t>- Mostre o comando completo, execute uma linha por vez quando houver mais de uma e mantenha o terminal visível.</a:t>
+            </a:r>
+          </a:p>
+          <a:p xmlns:a="http://schemas.openxmlformats.org/drawingml/2006/main">
+            <a:r>
+              <a:t/>
+            </a:r>
+          </a:p>
+          <a:p xmlns:a="http://schemas.openxmlformats.org/drawingml/2006/main">
+            <a:r>
+              <a:t>Transição:</a:t>
+            </a:r>
+          </a:p>
+          <a:p xmlns:a="http://schemas.openxmlformats.org/drawingml/2006/main">
+            <a:r>
+              <a:t>Com esse ponto estabelecido, avance para “Demonstração — observe”.</a:t>
             </a:r>
           </a:p>
           <a:p xmlns:a="http://schemas.openxmlformats.org/drawingml/2006/main">
@@ -805,7 +955,57 @@
           <a:lstStyle xmlns:a="http://schemas.openxmlformats.org/drawingml/2006/main"/>
           <a:p xmlns:a="http://schemas.openxmlformats.org/drawingml/2006/main">
             <a:r>
-              <a:t>Durante a execução, destaque: 8 pedidos na amostra; Manifest e catálogo gerados; Semantic manifest e OSI válidos.</a:t>
+              <a:t>[Roteiro recomendado]</a:t>
+            </a:r>
+          </a:p>
+          <a:p xmlns:a="http://schemas.openxmlformats.org/drawingml/2006/main">
+            <a:r>
+              <a:t>[Tempo sugerido: 01:10]</a:t>
+            </a:r>
+          </a:p>
+          <a:p xmlns:a="http://schemas.openxmlformats.org/drawingml/2006/main">
+            <a:r>
+              <a:t/>
+            </a:r>
+          </a:p>
+          <a:p xmlns:a="http://schemas.openxmlformats.org/drawingml/2006/main">
+            <a:r>
+              <a:t>Fala sugerida:</a:t>
+            </a:r>
+          </a:p>
+          <a:p xmlns:a="http://schemas.openxmlformats.org/drawingml/2006/main">
+            <a:r>
+              <a:t>Enquanto a execução acontece, não olhe apenas para a mensagem final. Observe 8 pedidos na amostra, Manifest e catálogo gerados e Semantic manifest e OSI válidos. Cada sinal responde a uma pergunta diferente sobre o pipeline. Se um deles divergir, interrompa a demonstração e investigue; o objetivo do hands-on é produzir evidência, não apenas chegar rapidamente a uma tela verde.</a:t>
+            </a:r>
+          </a:p>
+          <a:p xmlns:a="http://schemas.openxmlformats.org/drawingml/2006/main">
+            <a:r>
+              <a:t/>
+            </a:r>
+          </a:p>
+          <a:p xmlns:a="http://schemas.openxmlformats.org/drawingml/2006/main">
+            <a:r>
+              <a:t>O que destacar:</a:t>
+            </a:r>
+          </a:p>
+          <a:p xmlns:a="http://schemas.openxmlformats.org/drawingml/2006/main">
+            <a:r>
+              <a:t>- Marque cada observação quando ela aparecer no terminal ou no artifact correspondente.</a:t>
+            </a:r>
+          </a:p>
+          <a:p xmlns:a="http://schemas.openxmlformats.org/drawingml/2006/main">
+            <a:r>
+              <a:t/>
+            </a:r>
+          </a:p>
+          <a:p xmlns:a="http://schemas.openxmlformats.org/drawingml/2006/main">
+            <a:r>
+              <a:t>Transição:</a:t>
+            </a:r>
+          </a:p>
+          <a:p xmlns:a="http://schemas.openxmlformats.org/drawingml/2006/main">
+            <a:r>
+              <a:t>Com esse ponto estabelecido, avance para “RESULTADO ESPERADO”.</a:t>
             </a:r>
           </a:p>
           <a:p xmlns:a="http://schemas.openxmlformats.org/drawingml/2006/main">
@@ -920,7 +1120,57 @@
           <a:lstStyle xmlns:a="http://schemas.openxmlformats.org/drawingml/2006/main"/>
           <a:p xmlns:a="http://schemas.openxmlformats.org/drawingml/2006/main">
             <a:r>
-              <a:t>Confirme o resultado esperado: Baseline reproduzido. Se o valor divergir, não avance sem investigar.</a:t>
+              <a:t>[Roteiro recomendado]</a:t>
+            </a:r>
+          </a:p>
+          <a:p xmlns:a="http://schemas.openxmlformats.org/drawingml/2006/main">
+            <a:r>
+              <a:t>[Tempo sugerido: 00:45]</a:t>
+            </a:r>
+          </a:p>
+          <a:p xmlns:a="http://schemas.openxmlformats.org/drawingml/2006/main">
+            <a:r>
+              <a:t/>
+            </a:r>
+          </a:p>
+          <a:p xmlns:a="http://schemas.openxmlformats.org/drawingml/2006/main">
+            <a:r>
+              <a:t>Fala sugerida:</a:t>
+            </a:r>
+          </a:p>
+          <a:p xmlns:a="http://schemas.openxmlformats.org/drawingml/2006/main">
+            <a:r>
+              <a:t>Este é o ponto de parada da demonstração: Baseline reproduzido. Esse resultado confirma que a etapa executada produziu a evidência esperada para o checkpoint 01. Se o valor, o status ou o artifact estiver diferente, não trate a divergência como detalhe de ambiente. Use o diagnóstico do curso e só avance quando a causa estiver compreendida.</a:t>
+            </a:r>
+          </a:p>
+          <a:p xmlns:a="http://schemas.openxmlformats.org/drawingml/2006/main">
+            <a:r>
+              <a:t/>
+            </a:r>
+          </a:p>
+          <a:p xmlns:a="http://schemas.openxmlformats.org/drawingml/2006/main">
+            <a:r>
+              <a:t>O que destacar:</a:t>
+            </a:r>
+          </a:p>
+          <a:p xmlns:a="http://schemas.openxmlformats.org/drawingml/2006/main">
+            <a:r>
+              <a:t>- Compare o resultado do terminal com a frase central do slide e registre a evidência antes de continuar.</a:t>
+            </a:r>
+          </a:p>
+          <a:p xmlns:a="http://schemas.openxmlformats.org/drawingml/2006/main">
+            <a:r>
+              <a:t/>
+            </a:r>
+          </a:p>
+          <a:p xmlns:a="http://schemas.openxmlformats.org/drawingml/2006/main">
+            <a:r>
+              <a:t>Transição:</a:t>
+            </a:r>
+          </a:p>
+          <a:p xmlns:a="http://schemas.openxmlformats.org/drawingml/2006/main">
+            <a:r>
+              <a:t>Com esse ponto estabelecido, avance para “O mesmo recurso afeta três decisões”.</a:t>
             </a:r>
           </a:p>
           <a:p xmlns:a="http://schemas.openxmlformats.org/drawingml/2006/main">
@@ -1035,7 +1285,57 @@
           <a:lstStyle xmlns:a="http://schemas.openxmlformats.org/drawingml/2006/main"/>
           <a:p xmlns:a="http://schemas.openxmlformats.org/drawingml/2006/main">
             <a:r>
-              <a:t>Conecte a técnica aos efeitos: Governança: artifact auditável; FinOps: versões reproduzíveis; IA: contexto antes de SQL. Não prometa economia sem medição.</a:t>
+              <a:t>[Roteiro recomendado]</a:t>
+            </a:r>
+          </a:p>
+          <a:p xmlns:a="http://schemas.openxmlformats.org/drawingml/2006/main">
+            <a:r>
+              <a:t>[Tempo sugerido: 01:00]</a:t>
+            </a:r>
+          </a:p>
+          <a:p xmlns:a="http://schemas.openxmlformats.org/drawingml/2006/main">
+            <a:r>
+              <a:t/>
+            </a:r>
+          </a:p>
+          <a:p xmlns:a="http://schemas.openxmlformats.org/drawingml/2006/main">
+            <a:r>
+              <a:t>Fala sugerida:</a:t>
+            </a:r>
+          </a:p>
+          <a:p xmlns:a="http://schemas.openxmlformats.org/drawingml/2006/main">
+            <a:r>
+              <a:t>Antes de seguir, conecte a técnica às decisões que ela afeta: Governança: artifact auditável, FinOps: versões reproduzíveis e IA: contexto antes de SQL. Governança define responsabilidade e consistência; FinOps pergunta quanto trabalho estamos repetindo; e IA depende do contexto que decidimos expor. A mesma implementação pode melhorar os três eixos, mas os ganhos devem ser medidos separadamente.</a:t>
+            </a:r>
+          </a:p>
+          <a:p xmlns:a="http://schemas.openxmlformats.org/drawingml/2006/main">
+            <a:r>
+              <a:t/>
+            </a:r>
+          </a:p>
+          <a:p xmlns:a="http://schemas.openxmlformats.org/drawingml/2006/main">
+            <a:r>
+              <a:t>O que destacar:</a:t>
+            </a:r>
+          </a:p>
+          <a:p xmlns:a="http://schemas.openxmlformats.org/drawingml/2006/main">
+            <a:r>
+              <a:t>- Percorra os três eixos e evite apresentar economia ou acurácia como consequência automática.</a:t>
+            </a:r>
+          </a:p>
+          <a:p xmlns:a="http://schemas.openxmlformats.org/drawingml/2006/main">
+            <a:r>
+              <a:t/>
+            </a:r>
+          </a:p>
+          <a:p xmlns:a="http://schemas.openxmlformats.org/drawingml/2006/main">
+            <a:r>
+              <a:t>Transição:</a:t>
+            </a:r>
+          </a:p>
+          <a:p xmlns:a="http://schemas.openxmlformats.org/drawingml/2006/main">
+            <a:r>
+              <a:t>Com esse ponto estabelecido, avance para “8 / 740 / 630”.</a:t>
             </a:r>
           </a:p>
           <a:p xmlns:a="http://schemas.openxmlformats.org/drawingml/2006/main">
@@ -1150,7 +1450,57 @@
           <a:lstStyle xmlns:a="http://schemas.openxmlformats.org/drawingml/2006/main"/>
           <a:p xmlns:a="http://schemas.openxmlformats.org/drawingml/2006/main">
             <a:r>
-              <a:t>8 / 740 / 630: pedidos / receita bruta / entregue. Ground truth da amostra Olist do curso.</a:t>
+              <a:t>[Roteiro recomendado]</a:t>
+            </a:r>
+          </a:p>
+          <a:p xmlns:a="http://schemas.openxmlformats.org/drawingml/2006/main">
+            <a:r>
+              <a:t>[Tempo sugerido: 00:55]</a:t>
+            </a:r>
+          </a:p>
+          <a:p xmlns:a="http://schemas.openxmlformats.org/drawingml/2006/main">
+            <a:r>
+              <a:t/>
+            </a:r>
+          </a:p>
+          <a:p xmlns:a="http://schemas.openxmlformats.org/drawingml/2006/main">
+            <a:r>
+              <a:t>Fala sugerida:</a:t>
+            </a:r>
+          </a:p>
+          <a:p xmlns:a="http://schemas.openxmlformats.org/drawingml/2006/main">
+            <a:r>
+              <a:t>Aqui temos 8 / 740 / 630: pedidos / receita bruta / entregue. O número ajuda a dimensionar o exemplo, mas precisa ser lido com a ressalva correta. Ground truth da amostra Olist do curso. Use o case como evidência contextual e não como promessa de que outro projeto repetirá o mesmo resultado sem as mesmas condições.</a:t>
+            </a:r>
+          </a:p>
+          <a:p xmlns:a="http://schemas.openxmlformats.org/drawingml/2006/main">
+            <a:r>
+              <a:t/>
+            </a:r>
+          </a:p>
+          <a:p xmlns:a="http://schemas.openxmlformats.org/drawingml/2006/main">
+            <a:r>
+              <a:t>O que destacar:</a:t>
+            </a:r>
+          </a:p>
+          <a:p xmlns:a="http://schemas.openxmlformats.org/drawingml/2006/main">
+            <a:r>
+              <a:t>- Apresente primeiro o número, depois a definição e termine obrigatoriamente com a ressalva.</a:t>
+            </a:r>
+          </a:p>
+          <a:p xmlns:a="http://schemas.openxmlformats.org/drawingml/2006/main">
+            <a:r>
+              <a:t/>
+            </a:r>
+          </a:p>
+          <a:p xmlns:a="http://schemas.openxmlformats.org/drawingml/2006/main">
+            <a:r>
+              <a:t>Transição:</a:t>
+            </a:r>
+          </a:p>
+          <a:p xmlns:a="http://schemas.openxmlformats.org/drawingml/2006/main">
+            <a:r>
+              <a:t>Com esse ponto estabelecido, avance para “Limitações que precisam permanecer visíveis”.</a:t>
             </a:r>
           </a:p>
           <a:p xmlns:a="http://schemas.openxmlformats.org/drawingml/2006/main">
@@ -1265,7 +1615,57 @@
           <a:lstStyle xmlns:a="http://schemas.openxmlformats.org/drawingml/2006/main"/>
           <a:p xmlns:a="http://schemas.openxmlformats.org/drawingml/2006/main">
             <a:r>
-              <a:t>Apresente os limites sem minimizá-los: Incremental, testes e deploy não estavam implementados na série original; Artifacts não substituem monitoramento; Core 2.0 não entra na aceitação.</a:t>
+              <a:t>[Roteiro recomendado]</a:t>
+            </a:r>
+          </a:p>
+          <a:p xmlns:a="http://schemas.openxmlformats.org/drawingml/2006/main">
+            <a:r>
+              <a:t>[Tempo sugerido: 01:00]</a:t>
+            </a:r>
+          </a:p>
+          <a:p xmlns:a="http://schemas.openxmlformats.org/drawingml/2006/main">
+            <a:r>
+              <a:t/>
+            </a:r>
+          </a:p>
+          <a:p xmlns:a="http://schemas.openxmlformats.org/drawingml/2006/main">
+            <a:r>
+              <a:t>Fala sugerida:</a:t>
+            </a:r>
+          </a:p>
+          <a:p xmlns:a="http://schemas.openxmlformats.org/drawingml/2006/main">
+            <a:r>
+              <a:t>Também precisamos declarar os limites da recomendação. Neste cenário, considere incremental, testes e deploy não estavam implementados na série original, Artifacts não substituem monitoramento e Core 2.0 não entra na aceitação. Esses pontos não anulam a técnica; eles delimitam onde a demonstração é válida e quais condições precisam ser verificadas antes de levar o padrão para produção. Tratar limites como parte do design evita transformar uma boa prática em regra universal.</a:t>
+            </a:r>
+          </a:p>
+          <a:p xmlns:a="http://schemas.openxmlformats.org/drawingml/2006/main">
+            <a:r>
+              <a:t/>
+            </a:r>
+          </a:p>
+          <a:p xmlns:a="http://schemas.openxmlformats.org/drawingml/2006/main">
+            <a:r>
+              <a:t>O que destacar:</a:t>
+            </a:r>
+          </a:p>
+          <a:p xmlns:a="http://schemas.openxmlformats.org/drawingml/2006/main">
+            <a:r>
+              <a:t>- Leia os limites com o mesmo peso dado aos benefícios e diferencie restrição do laboratório de restrição do produto.</a:t>
+            </a:r>
+          </a:p>
+          <a:p xmlns:a="http://schemas.openxmlformats.org/drawingml/2006/main">
+            <a:r>
+              <a:t/>
+            </a:r>
+          </a:p>
+          <a:p xmlns:a="http://schemas.openxmlformats.org/drawingml/2006/main">
+            <a:r>
+              <a:t>Transição:</a:t>
+            </a:r>
+          </a:p>
+          <a:p xmlns:a="http://schemas.openxmlformats.org/drawingml/2006/main">
+            <a:r>
+              <a:t>Com esse ponto estabelecido, avance para “RADAR”.</a:t>
             </a:r>
           </a:p>
           <a:p xmlns:a="http://schemas.openxmlformats.org/drawingml/2006/main">
@@ -1380,7 +1780,57 @@
           <a:lstStyle xmlns:a="http://schemas.openxmlformats.org/drawingml/2006/main"/>
           <a:p xmlns:a="http://schemas.openxmlformats.org/drawingml/2006/main">
             <a:r>
-              <a:t>Novidade não substitui maturidade: Core 2.0 e Fusion aparecem sem recomendação de produção. Reforce que beta e preview não fazem parte da aceitação.</a:t>
+              <a:t>[Roteiro recomendado]</a:t>
+            </a:r>
+          </a:p>
+          <a:p xmlns:a="http://schemas.openxmlformats.org/drawingml/2006/main">
+            <a:r>
+              <a:t>[Tempo sugerido: 00:55]</a:t>
+            </a:r>
+          </a:p>
+          <a:p xmlns:a="http://schemas.openxmlformats.org/drawingml/2006/main">
+            <a:r>
+              <a:t/>
+            </a:r>
+          </a:p>
+          <a:p xmlns:a="http://schemas.openxmlformats.org/drawingml/2006/main">
+            <a:r>
+              <a:t>Fala sugerida:</a:t>
+            </a:r>
+          </a:p>
+          <a:p xmlns:a="http://schemas.openxmlformats.org/drawingml/2006/main">
+            <a:r>
+              <a:t>Este é o nosso Radar: Novidade não substitui maturidade: Core 2.0 e Fusion aparecem sem recomendação de produção. A intenção é mostrar a direção da ferramenta sem misturar preview com o caminho suportado da aula. Novidade observada não é recomendação de produção. Para adotar qualquer recurso futuro, confirme maturidade, adaptador, documentação e impacto sobre o projeto antes de alterar o baseline estável.</a:t>
+            </a:r>
+          </a:p>
+          <a:p xmlns:a="http://schemas.openxmlformats.org/drawingml/2006/main">
+            <a:r>
+              <a:t/>
+            </a:r>
+          </a:p>
+          <a:p xmlns:a="http://schemas.openxmlformats.org/drawingml/2006/main">
+            <a:r>
+              <a:t>O que destacar:</a:t>
+            </a:r>
+          </a:p>
+          <a:p xmlns:a="http://schemas.openxmlformats.org/drawingml/2006/main">
+            <a:r>
+              <a:t>- Reforce visualmente a regra do rodapé e não execute comandos beta ou preview como parte obrigatória da aula.</a:t>
+            </a:r>
+          </a:p>
+          <a:p xmlns:a="http://schemas.openxmlformats.org/drawingml/2006/main">
+            <a:r>
+              <a:t/>
+            </a:r>
+          </a:p>
+          <a:p xmlns:a="http://schemas.openxmlformats.org/drawingml/2006/main">
+            <a:r>
+              <a:t>Transição:</a:t>
+            </a:r>
+          </a:p>
+          <a:p xmlns:a="http://schemas.openxmlformats.org/drawingml/2006/main">
+            <a:r>
+              <a:t>Com esse ponto estabelecido, avance para “PRÓXIMO PASSO”.</a:t>
             </a:r>
           </a:p>
           <a:p xmlns:a="http://schemas.openxmlformats.org/drawingml/2006/main">
@@ -1495,7 +1945,57 @@
           <a:lstStyle xmlns:a="http://schemas.openxmlformats.org/drawingml/2006/main"/>
           <a:p xmlns:a="http://schemas.openxmlformats.org/drawingml/2006/main">
             <a:r>
-              <a:t>Reproduza o checkpoint e abra manifest.json antes do episódio 2. Encerre conectando a aula ao próximo checkpoint.</a:t>
+              <a:t>[Roteiro recomendado]</a:t>
+            </a:r>
+          </a:p>
+          <a:p xmlns:a="http://schemas.openxmlformats.org/drawingml/2006/main">
+            <a:r>
+              <a:t>[Tempo sugerido: 00:40]</a:t>
+            </a:r>
+          </a:p>
+          <a:p xmlns:a="http://schemas.openxmlformats.org/drawingml/2006/main">
+            <a:r>
+              <a:t/>
+            </a:r>
+          </a:p>
+          <a:p xmlns:a="http://schemas.openxmlformats.org/drawingml/2006/main">
+            <a:r>
+              <a:t>Fala sugerida:</a:t>
+            </a:r>
+          </a:p>
+          <a:p xmlns:a="http://schemas.openxmlformats.org/drawingml/2006/main">
+            <a:r>
+              <a:t>Reproduza o checkpoint e abra manifest.json antes do episódio 2. Faça essa etapa antes de seguir para o próximo episódio, porque o curso é cumulativo e o checkpoint atual se torna a base da aula seguinte. Se houver divergência, use o relatório de suporte e registre o que foi observado. O objetivo é avançar com um estado conhecido e reproduzível, não apenas assistir ao conteúdo.</a:t>
+            </a:r>
+          </a:p>
+          <a:p xmlns:a="http://schemas.openxmlformats.org/drawingml/2006/main">
+            <a:r>
+              <a:t/>
+            </a:r>
+          </a:p>
+          <a:p xmlns:a="http://schemas.openxmlformats.org/drawingml/2006/main">
+            <a:r>
+              <a:t>O que destacar:</a:t>
+            </a:r>
+          </a:p>
+          <a:p xmlns:a="http://schemas.openxmlformats.org/drawingml/2006/main">
+            <a:r>
+              <a:t>- Mostre o checkpoint e indique no repositório onde ficam o roteiro, os comandos e as referências da aula.</a:t>
+            </a:r>
+          </a:p>
+          <a:p xmlns:a="http://schemas.openxmlformats.org/drawingml/2006/main">
+            <a:r>
+              <a:t/>
+            </a:r>
+          </a:p>
+          <a:p xmlns:a="http://schemas.openxmlformats.org/drawingml/2006/main">
+            <a:r>
+              <a:t>Transição:</a:t>
+            </a:r>
+          </a:p>
+          <a:p xmlns:a="http://schemas.openxmlformats.org/drawingml/2006/main">
+            <a:r>
+              <a:t>Encerre retomando a pergunta inicial e confirme que o aluno sabe qual ação executar depois do episódio 1.</a:t>
             </a:r>
           </a:p>
           <a:p xmlns:a="http://schemas.openxmlformats.org/drawingml/2006/main">
@@ -1610,7 +2110,57 @@
           <a:lstStyle xmlns:a="http://schemas.openxmlformats.org/drawingml/2006/main"/>
           <a:p xmlns:a="http://schemas.openxmlformats.org/drawingml/2006/main">
             <a:r>
-              <a:t>Título de vídeo não é evidência. Manifest, testes e resultados executáveis são. Use o diagrama para antecipar o problema que será comprovado no laboratório.</a:t>
+              <a:t>[Roteiro recomendado]</a:t>
+            </a:r>
+          </a:p>
+          <a:p xmlns:a="http://schemas.openxmlformats.org/drawingml/2006/main">
+            <a:r>
+              <a:t>[Tempo sugerido: 01:00]</a:t>
+            </a:r>
+          </a:p>
+          <a:p xmlns:a="http://schemas.openxmlformats.org/drawingml/2006/main">
+            <a:r>
+              <a:t/>
+            </a:r>
+          </a:p>
+          <a:p xmlns:a="http://schemas.openxmlformats.org/drawingml/2006/main">
+            <a:r>
+              <a:t>Fala sugerida:</a:t>
+            </a:r>
+          </a:p>
+          <a:p xmlns:a="http://schemas.openxmlformats.org/drawingml/2006/main">
+            <a:r>
+              <a:t>Quero começar com uma provocação: Título de vídeo não é evidência. Manifest, testes e resultados executáveis são. Essa pergunta orienta toda a aula. Em vez de aceitar uma afirmação porque ela parece correta, vamos procurar uma definição verificável e uma demonstração executável. Guarde essa tensão, porque voltaremos a ela quando compararmos o conceito com o resultado do laboratório.</a:t>
+            </a:r>
+          </a:p>
+          <a:p xmlns:a="http://schemas.openxmlformats.org/drawingml/2006/main">
+            <a:r>
+              <a:t/>
+            </a:r>
+          </a:p>
+          <a:p xmlns:a="http://schemas.openxmlformats.org/drawingml/2006/main">
+            <a:r>
+              <a:t>O que destacar:</a:t>
+            </a:r>
+          </a:p>
+          <a:p xmlns:a="http://schemas.openxmlformats.org/drawingml/2006/main">
+            <a:r>
+              <a:t>- Dê uma pausa depois da provocação e use o diagrama como mapa do problema, sem explicar todas as etapas ainda.</a:t>
+            </a:r>
+          </a:p>
+          <a:p xmlns:a="http://schemas.openxmlformats.org/drawingml/2006/main">
+            <a:r>
+              <a:t/>
+            </a:r>
+          </a:p>
+          <a:p xmlns:a="http://schemas.openxmlformats.org/drawingml/2006/main">
+            <a:r>
+              <a:t>Transição:</a:t>
+            </a:r>
+          </a:p>
+          <a:p xmlns:a="http://schemas.openxmlformats.org/drawingml/2006/main">
+            <a:r>
+              <a:t>Com esse ponto estabelecido, avance para “Ao final, você consegue...”.</a:t>
             </a:r>
           </a:p>
           <a:p xmlns:a="http://schemas.openxmlformats.org/drawingml/2006/main">
@@ -1725,7 +2275,57 @@
           <a:lstStyle xmlns:a="http://schemas.openxmlformats.org/drawingml/2006/main"/>
           <a:p xmlns:a="http://schemas.openxmlformats.org/drawingml/2006/main">
             <a:r>
-              <a:t>Explique os três resultados observáveis da aula: Auditar a série original; Separar implementado de conceitual; Reconstruir o baseline suportado.</a:t>
+              <a:t>[Roteiro recomendado]</a:t>
+            </a:r>
+          </a:p>
+          <a:p xmlns:a="http://schemas.openxmlformats.org/drawingml/2006/main">
+            <a:r>
+              <a:t>[Tempo sugerido: 01:00]</a:t>
+            </a:r>
+          </a:p>
+          <a:p xmlns:a="http://schemas.openxmlformats.org/drawingml/2006/main">
+            <a:r>
+              <a:t/>
+            </a:r>
+          </a:p>
+          <a:p xmlns:a="http://schemas.openxmlformats.org/drawingml/2006/main">
+            <a:r>
+              <a:t>Fala sugerida:</a:t>
+            </a:r>
+          </a:p>
+          <a:p xmlns:a="http://schemas.openxmlformats.org/drawingml/2006/main">
+            <a:r>
+              <a:t>Ao final desta aula, você deverá conseguir auditar a série original, Separar implementado de conceitual e Reconstruir o baseline suportado. Esses resultados formam uma sequência: primeiro entendemos a regra, depois observamos sua representação no projeto e, por fim, comprovamos o comportamento no checkpoint. Se alguma dessas três partes não estiver clara, volte ao slide correspondente antes de executar a demonstração.</a:t>
+            </a:r>
+          </a:p>
+          <a:p xmlns:a="http://schemas.openxmlformats.org/drawingml/2006/main">
+            <a:r>
+              <a:t/>
+            </a:r>
+          </a:p>
+          <a:p xmlns:a="http://schemas.openxmlformats.org/drawingml/2006/main">
+            <a:r>
+              <a:t>O que destacar:</a:t>
+            </a:r>
+          </a:p>
+          <a:p xmlns:a="http://schemas.openxmlformats.org/drawingml/2006/main">
+            <a:r>
+              <a:t>- Percorra os objetivos da esquerda para a direita e apresente-os como resultados observáveis, não como uma agenda abstrata.</a:t>
+            </a:r>
+          </a:p>
+          <a:p xmlns:a="http://schemas.openxmlformats.org/drawingml/2006/main">
+            <a:r>
+              <a:t/>
+            </a:r>
+          </a:p>
+          <a:p xmlns:a="http://schemas.openxmlformats.org/drawingml/2006/main">
+            <a:r>
+              <a:t>Transição:</a:t>
+            </a:r>
+          </a:p>
+          <a:p xmlns:a="http://schemas.openxmlformats.org/drawingml/2006/main">
+            <a:r>
+              <a:t>Com esse ponto estabelecido, avance para “A base original continua valiosa”.</a:t>
             </a:r>
           </a:p>
           <a:p xmlns:a="http://schemas.openxmlformats.org/drawingml/2006/main">
@@ -1840,7 +2440,57 @@
           <a:lstStyle xmlns:a="http://schemas.openxmlformats.org/drawingml/2006/main"/>
           <a:p xmlns:a="http://schemas.openxmlformats.org/drawingml/2006/main">
             <a:r>
-              <a:t>Ambiente, seeds, ref, table, view e primeira Gold foram demonstrados. Desenvolva os pontos: Fundamentos bem posicionados; Materializações básicas; Primeiro fluxo Silver → Gold.</a:t>
+              <a:t>[Roteiro recomendado]</a:t>
+            </a:r>
+          </a:p>
+          <a:p xmlns:a="http://schemas.openxmlformats.org/drawingml/2006/main">
+            <a:r>
+              <a:t>[Tempo sugerido: 01:10]</a:t>
+            </a:r>
+          </a:p>
+          <a:p xmlns:a="http://schemas.openxmlformats.org/drawingml/2006/main">
+            <a:r>
+              <a:t/>
+            </a:r>
+          </a:p>
+          <a:p xmlns:a="http://schemas.openxmlformats.org/drawingml/2006/main">
+            <a:r>
+              <a:t>Fala sugerida:</a:t>
+            </a:r>
+          </a:p>
+          <a:p xmlns:a="http://schemas.openxmlformats.org/drawingml/2006/main">
+            <a:r>
+              <a:t>A mensagem principal deste slide é: Ambiente, seeds, ref, table, view e primeira Gold foram demonstrados. Para tornar isso concreto, observe fundamentos bem posicionados, Materializações básicas e Primeiro fluxo Silver → Gold. Esses pontos devem ser entendidos em conjunto; não são funcionalidades isoladas. No projeto, essa combinação transforma uma convenção informal em algo que pode ser revisado, testado ou consumido de maneira consistente.</a:t>
+            </a:r>
+          </a:p>
+          <a:p xmlns:a="http://schemas.openxmlformats.org/drawingml/2006/main">
+            <a:r>
+              <a:t/>
+            </a:r>
+          </a:p>
+          <a:p xmlns:a="http://schemas.openxmlformats.org/drawingml/2006/main">
+            <a:r>
+              <a:t>O que destacar:</a:t>
+            </a:r>
+          </a:p>
+          <a:p xmlns:a="http://schemas.openxmlformats.org/drawingml/2006/main">
+            <a:r>
+              <a:t>- Comece pelo título, leia a afirmação abaixo dele e depois desenvolva os itens sem repetir o texto palavra por palavra.</a:t>
+            </a:r>
+          </a:p>
+          <a:p xmlns:a="http://schemas.openxmlformats.org/drawingml/2006/main">
+            <a:r>
+              <a:t/>
+            </a:r>
+          </a:p>
+          <a:p xmlns:a="http://schemas.openxmlformats.org/drawingml/2006/main">
+            <a:r>
+              <a:t>Transição:</a:t>
+            </a:r>
+          </a:p>
+          <a:p xmlns:a="http://schemas.openxmlformats.org/drawingml/2006/main">
+            <a:r>
+              <a:t>Com esse ponto estabelecido, avance para “Produção começa no suportado”.</a:t>
             </a:r>
           </a:p>
           <a:p xmlns:a="http://schemas.openxmlformats.org/drawingml/2006/main">
@@ -1955,7 +2605,57 @@
           <a:lstStyle xmlns:a="http://schemas.openxmlformats.org/drawingml/2006/main"/>
           <a:p xmlns:a="http://schemas.openxmlformats.org/drawingml/2006/main">
             <a:r>
-              <a:t>Core 1.12 e DuckDB estável formam a trilha executável. Desenvolva os pontos: Dependências fixadas; CI determinística; Preview sem comando obrigatório.</a:t>
+              <a:t>[Roteiro recomendado]</a:t>
+            </a:r>
+          </a:p>
+          <a:p xmlns:a="http://schemas.openxmlformats.org/drawingml/2006/main">
+            <a:r>
+              <a:t>[Tempo sugerido: 01:10]</a:t>
+            </a:r>
+          </a:p>
+          <a:p xmlns:a="http://schemas.openxmlformats.org/drawingml/2006/main">
+            <a:r>
+              <a:t/>
+            </a:r>
+          </a:p>
+          <a:p xmlns:a="http://schemas.openxmlformats.org/drawingml/2006/main">
+            <a:r>
+              <a:t>Fala sugerida:</a:t>
+            </a:r>
+          </a:p>
+          <a:p xmlns:a="http://schemas.openxmlformats.org/drawingml/2006/main">
+            <a:r>
+              <a:t>A mensagem principal deste slide é: Core 1.12 e DuckDB estável formam a trilha executável. Para tornar isso concreto, observe dependências fixadas, CI determinística e Preview sem comando obrigatório. Esses pontos devem ser entendidos em conjunto; não são funcionalidades isoladas. No projeto, essa combinação transforma uma convenção informal em algo que pode ser revisado, testado ou consumido de maneira consistente.</a:t>
+            </a:r>
+          </a:p>
+          <a:p xmlns:a="http://schemas.openxmlformats.org/drawingml/2006/main">
+            <a:r>
+              <a:t/>
+            </a:r>
+          </a:p>
+          <a:p xmlns:a="http://schemas.openxmlformats.org/drawingml/2006/main">
+            <a:r>
+              <a:t>O que destacar:</a:t>
+            </a:r>
+          </a:p>
+          <a:p xmlns:a="http://schemas.openxmlformats.org/drawingml/2006/main">
+            <a:r>
+              <a:t>- Comece pelo título, leia a afirmação abaixo dele e depois desenvolva os itens sem repetir o texto palavra por palavra.</a:t>
+            </a:r>
+          </a:p>
+          <a:p xmlns:a="http://schemas.openxmlformats.org/drawingml/2006/main">
+            <a:r>
+              <a:t/>
+            </a:r>
+          </a:p>
+          <a:p xmlns:a="http://schemas.openxmlformats.org/drawingml/2006/main">
+            <a:r>
+              <a:t>Transição:</a:t>
+            </a:r>
+          </a:p>
+          <a:p xmlns:a="http://schemas.openxmlformats.org/drawingml/2006/main">
+            <a:r>
+              <a:t>Com esse ponto estabelecido, avance para “Produção começa no suportado”.</a:t>
             </a:r>
           </a:p>
           <a:p xmlns:a="http://schemas.openxmlformats.org/drawingml/2006/main">
@@ -2070,7 +2770,57 @@
           <a:lstStyle xmlns:a="http://schemas.openxmlformats.org/drawingml/2006/main"/>
           <a:p xmlns:a="http://schemas.openxmlformats.org/drawingml/2006/main">
             <a:r>
-              <a:t>Use a composição para explicar visualmente: Core 1.12 e DuckDB estável formam a trilha executável. Dependências fixadas CI determinística Preview sem comando obrigatório</a:t>
+              <a:t>[Roteiro recomendado]</a:t>
+            </a:r>
+          </a:p>
+          <a:p xmlns:a="http://schemas.openxmlformats.org/drawingml/2006/main">
+            <a:r>
+              <a:t>[Tempo sugerido: 00:55]</a:t>
+            </a:r>
+          </a:p>
+          <a:p xmlns:a="http://schemas.openxmlformats.org/drawingml/2006/main">
+            <a:r>
+              <a:t/>
+            </a:r>
+          </a:p>
+          <a:p xmlns:a="http://schemas.openxmlformats.org/drawingml/2006/main">
+            <a:r>
+              <a:t>Fala sugerida:</a:t>
+            </a:r>
+          </a:p>
+          <a:p xmlns:a="http://schemas.openxmlformats.org/drawingml/2006/main">
+            <a:r>
+              <a:t>Agora vamos ler a ideia visualmente. Core 1.12 e DuckDB estável formam a trilha executável. Siga a composição na ordem mostrada e conecte OPEN, STABLE e LOCAL. A imagem ou o fluxo não cria uma regra nova; ele torna visível a relação que acabamos de explicar. Use a disposição dos elementos para reforçar causa, dependência ou comparação.</a:t>
+            </a:r>
+          </a:p>
+          <a:p xmlns:a="http://schemas.openxmlformats.org/drawingml/2006/main">
+            <a:r>
+              <a:t/>
+            </a:r>
+          </a:p>
+          <a:p xmlns:a="http://schemas.openxmlformats.org/drawingml/2006/main">
+            <a:r>
+              <a:t>O que destacar:</a:t>
+            </a:r>
+          </a:p>
+          <a:p xmlns:a="http://schemas.openxmlformats.org/drawingml/2006/main">
+            <a:r>
+              <a:t>- Acompanhe o fluxo ou a comparação com o cursor e preserve a ordem de leitura do slide.</a:t>
+            </a:r>
+          </a:p>
+          <a:p xmlns:a="http://schemas.openxmlformats.org/drawingml/2006/main">
+            <a:r>
+              <a:t/>
+            </a:r>
+          </a:p>
+          <a:p xmlns:a="http://schemas.openxmlformats.org/drawingml/2006/main">
+            <a:r>
+              <a:t>Transição:</a:t>
+            </a:r>
+          </a:p>
+          <a:p xmlns:a="http://schemas.openxmlformats.org/drawingml/2006/main">
+            <a:r>
+              <a:t>Com esse ponto estabelecido, avance para “ref transforma SQL em um grafo”.</a:t>
             </a:r>
           </a:p>
           <a:p xmlns:a="http://schemas.openxmlformats.org/drawingml/2006/main">
@@ -2185,7 +2935,57 @@
           <a:lstStyle xmlns:a="http://schemas.openxmlformats.org/drawingml/2006/main"/>
           <a:p xmlns:a="http://schemas.openxmlformats.org/drawingml/2006/main">
             <a:r>
-              <a:t>Dependências explícitas habilitam ordem, seleção e linhagem. Desenvolva os pontos: source → staging; staging → Gold; Gold → consumidor.</a:t>
+              <a:t>[Roteiro recomendado]</a:t>
+            </a:r>
+          </a:p>
+          <a:p xmlns:a="http://schemas.openxmlformats.org/drawingml/2006/main">
+            <a:r>
+              <a:t>[Tempo sugerido: 01:10]</a:t>
+            </a:r>
+          </a:p>
+          <a:p xmlns:a="http://schemas.openxmlformats.org/drawingml/2006/main">
+            <a:r>
+              <a:t/>
+            </a:r>
+          </a:p>
+          <a:p xmlns:a="http://schemas.openxmlformats.org/drawingml/2006/main">
+            <a:r>
+              <a:t>Fala sugerida:</a:t>
+            </a:r>
+          </a:p>
+          <a:p xmlns:a="http://schemas.openxmlformats.org/drawingml/2006/main">
+            <a:r>
+              <a:t>A mensagem principal deste slide é: Dependências explícitas habilitam ordem, seleção e linhagem. Para tornar isso concreto, observe source → staging, staging → Gold e Gold → consumidor. Esses pontos devem ser entendidos em conjunto; não são funcionalidades isoladas. No projeto, essa combinação transforma uma convenção informal em algo que pode ser revisado, testado ou consumido de maneira consistente.</a:t>
+            </a:r>
+          </a:p>
+          <a:p xmlns:a="http://schemas.openxmlformats.org/drawingml/2006/main">
+            <a:r>
+              <a:t/>
+            </a:r>
+          </a:p>
+          <a:p xmlns:a="http://schemas.openxmlformats.org/drawingml/2006/main">
+            <a:r>
+              <a:t>O que destacar:</a:t>
+            </a:r>
+          </a:p>
+          <a:p xmlns:a="http://schemas.openxmlformats.org/drawingml/2006/main">
+            <a:r>
+              <a:t>- Comece pelo título, leia a afirmação abaixo dele e depois desenvolva os itens sem repetir o texto palavra por palavra.</a:t>
+            </a:r>
+          </a:p>
+          <a:p xmlns:a="http://schemas.openxmlformats.org/drawingml/2006/main">
+            <a:r>
+              <a:t/>
+            </a:r>
+          </a:p>
+          <a:p xmlns:a="http://schemas.openxmlformats.org/drawingml/2006/main">
+            <a:r>
+              <a:t>Transição:</a:t>
+            </a:r>
+          </a:p>
+          <a:p xmlns:a="http://schemas.openxmlformats.org/drawingml/2006/main">
+            <a:r>
+              <a:t>Com esse ponto estabelecido, avance para “ref transforma SQL em um grafo”.</a:t>
             </a:r>
           </a:p>
           <a:p xmlns:a="http://schemas.openxmlformats.org/drawingml/2006/main">
@@ -2300,7 +3100,57 @@
           <a:lstStyle xmlns:a="http://schemas.openxmlformats.org/drawingml/2006/main"/>
           <a:p xmlns:a="http://schemas.openxmlformats.org/drawingml/2006/main">
             <a:r>
-              <a:t>Use a composição para explicar visualmente: Dependências explícitas habilitam ordem, seleção e linhagem. source → staging staging → Gold Gold → consumidor</a:t>
+              <a:t>[Roteiro recomendado]</a:t>
+            </a:r>
+          </a:p>
+          <a:p xmlns:a="http://schemas.openxmlformats.org/drawingml/2006/main">
+            <a:r>
+              <a:t>[Tempo sugerido: 00:55]</a:t>
+            </a:r>
+          </a:p>
+          <a:p xmlns:a="http://schemas.openxmlformats.org/drawingml/2006/main">
+            <a:r>
+              <a:t/>
+            </a:r>
+          </a:p>
+          <a:p xmlns:a="http://schemas.openxmlformats.org/drawingml/2006/main">
+            <a:r>
+              <a:t>Fala sugerida:</a:t>
+            </a:r>
+          </a:p>
+          <a:p xmlns:a="http://schemas.openxmlformats.org/drawingml/2006/main">
+            <a:r>
+              <a:t>Agora vamos ler a ideia visualmente. Dependências explícitas habilitam ordem, seleção e linhagem. Siga a composição na ordem mostrada e conecte source, staging, Gold e consumer. A imagem ou o fluxo não cria uma regra nova; ele torna visível a relação que acabamos de explicar. Use a disposição dos elementos para reforçar causa, dependência ou comparação.</a:t>
+            </a:r>
+          </a:p>
+          <a:p xmlns:a="http://schemas.openxmlformats.org/drawingml/2006/main">
+            <a:r>
+              <a:t/>
+            </a:r>
+          </a:p>
+          <a:p xmlns:a="http://schemas.openxmlformats.org/drawingml/2006/main">
+            <a:r>
+              <a:t>O que destacar:</a:t>
+            </a:r>
+          </a:p>
+          <a:p xmlns:a="http://schemas.openxmlformats.org/drawingml/2006/main">
+            <a:r>
+              <a:t>- Acompanhe o fluxo ou a comparação com o cursor e preserve a ordem de leitura do slide.</a:t>
+            </a:r>
+          </a:p>
+          <a:p xmlns:a="http://schemas.openxmlformats.org/drawingml/2006/main">
+            <a:r>
+              <a:t/>
+            </a:r>
+          </a:p>
+          <a:p xmlns:a="http://schemas.openxmlformats.org/drawingml/2006/main">
+            <a:r>
+              <a:t>Transição:</a:t>
+            </a:r>
+          </a:p>
+          <a:p xmlns:a="http://schemas.openxmlformats.org/drawingml/2006/main">
+            <a:r>
+              <a:t>Com esse ponto estabelecido, avance para “Artifacts respondem perguntas diferentes”.</a:t>
             </a:r>
           </a:p>
           <a:p xmlns:a="http://schemas.openxmlformats.org/drawingml/2006/main">
@@ -2415,7 +3265,57 @@
           <a:lstStyle xmlns:a="http://schemas.openxmlformats.org/drawingml/2006/main"/>
           <a:p xmlns:a="http://schemas.openxmlformats.org/drawingml/2006/main">
             <a:r>
-              <a:t>Manifest descreve o projeto; run_results registra a execução. Desenvolva os pontos: O que existe; O que depende do quê; O que passou ou falhou.</a:t>
+              <a:t>[Roteiro recomendado]</a:t>
+            </a:r>
+          </a:p>
+          <a:p xmlns:a="http://schemas.openxmlformats.org/drawingml/2006/main">
+            <a:r>
+              <a:t>[Tempo sugerido: 01:10]</a:t>
+            </a:r>
+          </a:p>
+          <a:p xmlns:a="http://schemas.openxmlformats.org/drawingml/2006/main">
+            <a:r>
+              <a:t/>
+            </a:r>
+          </a:p>
+          <a:p xmlns:a="http://schemas.openxmlformats.org/drawingml/2006/main">
+            <a:r>
+              <a:t>Fala sugerida:</a:t>
+            </a:r>
+          </a:p>
+          <a:p xmlns:a="http://schemas.openxmlformats.org/drawingml/2006/main">
+            <a:r>
+              <a:t>A mensagem principal deste slide é: Manifest descreve o projeto; run_results registra a execução. Para tornar isso concreto, observe o que existe, O que depende do quê e O que passou ou falhou. Esses pontos devem ser entendidos em conjunto; não são funcionalidades isoladas. No projeto, essa combinação transforma uma convenção informal em algo que pode ser revisado, testado ou consumido de maneira consistente.</a:t>
+            </a:r>
+          </a:p>
+          <a:p xmlns:a="http://schemas.openxmlformats.org/drawingml/2006/main">
+            <a:r>
+              <a:t/>
+            </a:r>
+          </a:p>
+          <a:p xmlns:a="http://schemas.openxmlformats.org/drawingml/2006/main">
+            <a:r>
+              <a:t>O que destacar:</a:t>
+            </a:r>
+          </a:p>
+          <a:p xmlns:a="http://schemas.openxmlformats.org/drawingml/2006/main">
+            <a:r>
+              <a:t>- Comece pelo título, leia a afirmação abaixo dele e depois desenvolva os itens sem repetir o texto palavra por palavra.</a:t>
+            </a:r>
+          </a:p>
+          <a:p xmlns:a="http://schemas.openxmlformats.org/drawingml/2006/main">
+            <a:r>
+              <a:t/>
+            </a:r>
+          </a:p>
+          <a:p xmlns:a="http://schemas.openxmlformats.org/drawingml/2006/main">
+            <a:r>
+              <a:t>Transição:</a:t>
+            </a:r>
+          </a:p>
+          <a:p xmlns:a="http://schemas.openxmlformats.org/drawingml/2006/main">
+            <a:r>
+              <a:t>Com esse ponto estabelecido, avance para “Artifacts respondem perguntas diferentes”.</a:t>
             </a:r>
           </a:p>
           <a:p xmlns:a="http://schemas.openxmlformats.org/drawingml/2006/main">
@@ -2562,7 +3462,7 @@
   </p:cSld>
   <p:clrMap bg1="lt1" tx1="dk1" bg2="lt2" tx2="dk2" accent1="accent1" accent2="accent2" accent3="accent3" accent4="accent4" accent5="accent5" accent6="accent6" hlink="hlink" folHlink="folHlink"/>
   <p:sldLayoutIdLst>
-    <p:sldLayoutId xmlns:r="http://schemas.openxmlformats.org/officeDocument/2006/relationships" id="2147483649" r:id="R984b2327f2314d2b"/>
+    <p:sldLayoutId xmlns:r="http://schemas.openxmlformats.org/officeDocument/2006/relationships" id="2147483649" r:id="Rbfde7a11eb574f64"/>
   </p:sldLayoutIdLst>
   <p:txStyles>
     <p:titleStyle>
@@ -2860,8 +3760,8 @@
   </p:cSld>
   <p:clrMap bg1="lt1" tx1="dk1" bg2="lt2" tx2="dk2" accent1="accent1" accent2="accent2" accent3="accent3" accent4="accent4" accent5="accent5" accent6="accent6" hlink="hlink" folHlink="folHlink"/>
   <p:sldLayoutIdLst>
-    <p:sldLayoutId xmlns:r="http://schemas.openxmlformats.org/officeDocument/2006/relationships" id="2147483651" r:id="R9dd8447cd1684fe3"/>
-    <p:sldLayoutId xmlns:r="http://schemas.openxmlformats.org/officeDocument/2006/relationships" id="2147483652" r:id="R04a56abd1fce4f1e"/>
+    <p:sldLayoutId xmlns:r="http://schemas.openxmlformats.org/officeDocument/2006/relationships" id="2147483651" r:id="R6a8ea53d954a4495"/>
+    <p:sldLayoutId xmlns:r="http://schemas.openxmlformats.org/officeDocument/2006/relationships" id="2147483652" r:id="R4415f1df95154802"/>
   </p:sldLayoutIdLst>
 </p:sldMaster>
 </file>
@@ -3385,14 +4285,14 @@
       </p:grpSpPr>
       <p:pic>
         <p:nvPicPr>
-          <p:cNvPr id="9" name="" descr="Ilustração conceitual autoral da capa: EPISÓDIO 1 — O que a série ensinou — e o que falta provar."/>
+          <p:cNvPr id="10" name="" descr="Ilustração conceitual autoral da capa: EPISÓDIO 1 — O que a série ensinou — e o que falta provar."/>
           <p:cNvPicPr>
             <a:picLocks xmlns:a="http://schemas.openxmlformats.org/drawingml/2006/main" noChangeAspect="1"/>
           </p:cNvPicPr>
           <p:nvPr/>
         </p:nvPicPr>
         <p:blipFill>
-          <a:blip xmlns:r="http://schemas.openxmlformats.org/officeDocument/2006/relationships" xmlns:a="http://schemas.openxmlformats.org/drawingml/2006/main" r:embed="R8f970bc5f90f49ec"/>
+          <a:blip xmlns:r="http://schemas.openxmlformats.org/officeDocument/2006/relationships" xmlns:a="http://schemas.openxmlformats.org/drawingml/2006/main" r:embed="Ra9938da19ced4ee7"/>
           <a:srcRect xmlns:a="http://schemas.openxmlformats.org/drawingml/2006/main" l="19785" t="0" r="19785" b="0"/>
           <a:stretch xmlns:a="http://schemas.openxmlformats.org/drawingml/2006/main">
             <a:fillRect l="0" t="0" r="0" b="0"/>
@@ -3505,6 +4405,7 @@
           <a:lstStyle xmlns:a="http://schemas.openxmlformats.org/drawingml/2006/main"/>
           <a:p xmlns:a="http://schemas.openxmlformats.org/drawingml/2006/main">
             <a:pPr>
+              <a:buNone/>
               <a:defRPr sz="1350" b="1">
                 <a:solidFill>
                   <a:srgbClr val="1EC5FF"/>
@@ -3555,6 +4456,7 @@
           <a:lstStyle xmlns:a="http://schemas.openxmlformats.org/drawingml/2006/main"/>
           <a:p xmlns:a="http://schemas.openxmlformats.org/drawingml/2006/main">
             <a:pPr>
+              <a:buNone/>
               <a:defRPr sz="3225" b="1">
                 <a:solidFill>
                   <a:srgbClr val="FFFFFF"/>
@@ -3605,6 +4507,7 @@
           <a:lstStyle xmlns:a="http://schemas.openxmlformats.org/drawingml/2006/main"/>
           <a:p xmlns:a="http://schemas.openxmlformats.org/drawingml/2006/main">
             <a:pPr>
+              <a:buNone/>
               <a:defRPr sz="1800">
                 <a:solidFill>
                   <a:srgbClr val="E2F2FF"/>
@@ -3686,6 +4589,7 @@
           <a:lstStyle xmlns:a="http://schemas.openxmlformats.org/drawingml/2006/main"/>
           <a:p xmlns:a="http://schemas.openxmlformats.org/drawingml/2006/main">
             <a:pPr>
+              <a:buNone/>
               <a:defRPr sz="1200" b="1">
                 <a:solidFill>
                   <a:srgbClr val="FFFFFF">
@@ -3777,6 +4681,7 @@
           <a:lstStyle xmlns:a="http://schemas.openxmlformats.org/drawingml/2006/main"/>
           <a:p xmlns:a="http://schemas.openxmlformats.org/drawingml/2006/main">
             <a:pPr>
+              <a:buNone/>
               <a:defRPr sz="2925" b="1">
                 <a:solidFill>
                   <a:srgbClr val="FFFFFF"/>
@@ -3827,6 +4732,7 @@
           <a:lstStyle xmlns:a="http://schemas.openxmlformats.org/drawingml/2006/main"/>
           <a:p xmlns:a="http://schemas.openxmlformats.org/drawingml/2006/main">
             <a:pPr>
+              <a:buNone/>
               <a:defRPr sz="2100" b="1">
                 <a:solidFill>
                   <a:srgbClr val="1EC5FF"/>
@@ -3877,6 +4783,7 @@
           <a:lstStyle xmlns:a="http://schemas.openxmlformats.org/drawingml/2006/main"/>
           <a:p xmlns:a="http://schemas.openxmlformats.org/drawingml/2006/main">
             <a:pPr>
+              <a:buNone/>
               <a:defRPr sz="2100" b="1">
                 <a:solidFill>
                   <a:srgbClr val="2DBE8C"/>
@@ -3960,6 +4867,7 @@
           <a:lstStyle xmlns:a="http://schemas.openxmlformats.org/drawingml/2006/main"/>
           <a:p xmlns:a="http://schemas.openxmlformats.org/drawingml/2006/main">
             <a:pPr>
+              <a:buNone/>
               <a:defRPr sz="1650">
                 <a:solidFill>
                   <a:srgbClr val="FFFFFF"/>
@@ -3977,6 +4885,7 @@
           </a:p>
           <a:p xmlns:a="http://schemas.openxmlformats.org/drawingml/2006/main">
             <a:pPr>
+              <a:buNone/>
               <a:defRPr sz="1650">
                 <a:solidFill>
                   <a:srgbClr val="FFFFFF"/>
@@ -4027,6 +4936,7 @@
           <a:lstStyle xmlns:a="http://schemas.openxmlformats.org/drawingml/2006/main"/>
           <a:p xmlns:a="http://schemas.openxmlformats.org/drawingml/2006/main">
             <a:pPr>
+              <a:buNone/>
               <a:defRPr sz="1650">
                 <a:solidFill>
                   <a:srgbClr val="FFFFFF"/>
@@ -4077,6 +4987,7 @@
           <a:lstStyle xmlns:a="http://schemas.openxmlformats.org/drawingml/2006/main"/>
           <a:p xmlns:a="http://schemas.openxmlformats.org/drawingml/2006/main">
             <a:pPr>
+              <a:buNone/>
               <a:defRPr sz="1050" b="1">
                 <a:solidFill>
                   <a:srgbClr val="1EC5FF"/>
@@ -4160,6 +5071,7 @@
           <a:lstStyle xmlns:a="http://schemas.openxmlformats.org/drawingml/2006/main"/>
           <a:p xmlns:a="http://schemas.openxmlformats.org/drawingml/2006/main">
             <a:pPr>
+              <a:buNone/>
               <a:defRPr sz="825">
                 <a:solidFill>
                   <a:srgbClr val="FFFFFF">
@@ -4214,6 +5126,7 @@
           <a:lstStyle xmlns:a="http://schemas.openxmlformats.org/drawingml/2006/main"/>
           <a:p xmlns:a="http://schemas.openxmlformats.org/drawingml/2006/main">
             <a:pPr algn="r">
+              <a:buNone/>
               <a:defRPr sz="825" b="1">
                 <a:solidFill>
                   <a:srgbClr val="FFFFFF">
@@ -4305,6 +5218,7 @@
           <a:lstStyle xmlns:a="http://schemas.openxmlformats.org/drawingml/2006/main"/>
           <a:p xmlns:a="http://schemas.openxmlformats.org/drawingml/2006/main">
             <a:pPr>
+              <a:buNone/>
               <a:defRPr sz="2925" b="1">
                 <a:solidFill>
                   <a:srgbClr val="FFFFFF"/>
@@ -4390,6 +5304,7 @@
           <a:lstStyle xmlns:a="http://schemas.openxmlformats.org/drawingml/2006/main"/>
           <a:p xmlns:a="http://schemas.openxmlformats.org/drawingml/2006/main">
             <a:pPr>
+              <a:buNone/>
               <a:defRPr sz="1875" b="1">
                 <a:solidFill>
                   <a:srgbClr val="1EC5FF"/>
@@ -4440,6 +5355,7 @@
           <a:lstStyle xmlns:a="http://schemas.openxmlformats.org/drawingml/2006/main"/>
           <a:p xmlns:a="http://schemas.openxmlformats.org/drawingml/2006/main">
             <a:pPr>
+              <a:buNone/>
               <a:defRPr sz="1425">
                 <a:solidFill>
                   <a:srgbClr val="E2F2FF"/>
@@ -4490,6 +5406,7 @@
           <a:lstStyle xmlns:a="http://schemas.openxmlformats.org/drawingml/2006/main"/>
           <a:p xmlns:a="http://schemas.openxmlformats.org/drawingml/2006/main">
             <a:pPr>
+              <a:buNone/>
               <a:defRPr sz="1050" b="1">
                 <a:solidFill>
                   <a:srgbClr val="1EC5FF"/>
@@ -4573,6 +5490,7 @@
           <a:lstStyle xmlns:a="http://schemas.openxmlformats.org/drawingml/2006/main"/>
           <a:p xmlns:a="http://schemas.openxmlformats.org/drawingml/2006/main">
             <a:pPr>
+              <a:buNone/>
               <a:defRPr sz="825">
                 <a:solidFill>
                   <a:srgbClr val="FFFFFF">
@@ -4627,6 +5545,7 @@
           <a:lstStyle xmlns:a="http://schemas.openxmlformats.org/drawingml/2006/main"/>
           <a:p xmlns:a="http://schemas.openxmlformats.org/drawingml/2006/main">
             <a:pPr algn="r">
+              <a:buNone/>
               <a:defRPr sz="825" b="1">
                 <a:solidFill>
                   <a:srgbClr val="FFFFFF">
@@ -4710,6 +5629,7 @@
           <a:lstStyle xmlns:a="http://schemas.openxmlformats.org/drawingml/2006/main"/>
           <a:p xmlns:a="http://schemas.openxmlformats.org/drawingml/2006/main">
             <a:pPr>
+              <a:buNone/>
               <a:defRPr sz="2925" b="1">
                 <a:solidFill>
                   <a:srgbClr val="0B1F3A"/>
@@ -4760,6 +5680,7 @@
           <a:lstStyle xmlns:a="http://schemas.openxmlformats.org/drawingml/2006/main"/>
           <a:p xmlns:a="http://schemas.openxmlformats.org/drawingml/2006/main">
             <a:pPr>
+              <a:buNone/>
               <a:defRPr sz="3450" b="1">
                 <a:solidFill>
                   <a:srgbClr val="1565C0"/>
@@ -4810,6 +5731,7 @@
           <a:lstStyle xmlns:a="http://schemas.openxmlformats.org/drawingml/2006/main"/>
           <a:p xmlns:a="http://schemas.openxmlformats.org/drawingml/2006/main">
             <a:pPr>
+              <a:buNone/>
               <a:defRPr sz="1575" b="1">
                 <a:solidFill>
                   <a:srgbClr val="0B1F3A"/>
@@ -4891,6 +5813,7 @@
           <a:lstStyle xmlns:a="http://schemas.openxmlformats.org/drawingml/2006/main"/>
           <a:p xmlns:a="http://schemas.openxmlformats.org/drawingml/2006/main">
             <a:pPr>
+              <a:buNone/>
               <a:defRPr sz="3450" b="1">
                 <a:solidFill>
                   <a:srgbClr val="1565C0"/>
@@ -4941,6 +5864,7 @@
           <a:lstStyle xmlns:a="http://schemas.openxmlformats.org/drawingml/2006/main"/>
           <a:p xmlns:a="http://schemas.openxmlformats.org/drawingml/2006/main">
             <a:pPr>
+              <a:buNone/>
               <a:defRPr sz="1575" b="1">
                 <a:solidFill>
                   <a:srgbClr val="0B1F3A"/>
@@ -5022,6 +5946,7 @@
           <a:lstStyle xmlns:a="http://schemas.openxmlformats.org/drawingml/2006/main"/>
           <a:p xmlns:a="http://schemas.openxmlformats.org/drawingml/2006/main">
             <a:pPr>
+              <a:buNone/>
               <a:defRPr sz="3450" b="1">
                 <a:solidFill>
                   <a:srgbClr val="1565C0"/>
@@ -5072,6 +5997,7 @@
           <a:lstStyle xmlns:a="http://schemas.openxmlformats.org/drawingml/2006/main"/>
           <a:p xmlns:a="http://schemas.openxmlformats.org/drawingml/2006/main">
             <a:pPr>
+              <a:buNone/>
               <a:defRPr sz="1575" b="1">
                 <a:solidFill>
                   <a:srgbClr val="0B1F3A"/>
@@ -5122,6 +6048,7 @@
           <a:lstStyle xmlns:a="http://schemas.openxmlformats.org/drawingml/2006/main"/>
           <a:p xmlns:a="http://schemas.openxmlformats.org/drawingml/2006/main">
             <a:pPr>
+              <a:buNone/>
               <a:defRPr sz="1050" b="1">
                 <a:solidFill>
                   <a:srgbClr val="1565C0"/>
@@ -5205,6 +6132,7 @@
           <a:lstStyle xmlns:a="http://schemas.openxmlformats.org/drawingml/2006/main"/>
           <a:p xmlns:a="http://schemas.openxmlformats.org/drawingml/2006/main">
             <a:pPr>
+              <a:buNone/>
               <a:defRPr sz="825">
                 <a:solidFill>
                   <a:srgbClr val="0B1F3A">
@@ -5259,6 +6187,7 @@
           <a:lstStyle xmlns:a="http://schemas.openxmlformats.org/drawingml/2006/main"/>
           <a:p xmlns:a="http://schemas.openxmlformats.org/drawingml/2006/main">
             <a:pPr algn="r">
+              <a:buNone/>
               <a:defRPr sz="825" b="1">
                 <a:solidFill>
                   <a:srgbClr val="0B1F3A">
@@ -5350,6 +6279,7 @@
           <a:lstStyle xmlns:a="http://schemas.openxmlformats.org/drawingml/2006/main"/>
           <a:p xmlns:a="http://schemas.openxmlformats.org/drawingml/2006/main">
             <a:pPr>
+              <a:buNone/>
               <a:defRPr sz="1350" b="1">
                 <a:solidFill>
                   <a:srgbClr val="1EC5FF"/>
@@ -5400,6 +6330,7 @@
           <a:lstStyle xmlns:a="http://schemas.openxmlformats.org/drawingml/2006/main"/>
           <a:p xmlns:a="http://schemas.openxmlformats.org/drawingml/2006/main">
             <a:pPr>
+              <a:buNone/>
               <a:defRPr sz="3450" b="1">
                 <a:solidFill>
                   <a:srgbClr val="FFFFFF"/>
@@ -5450,6 +6381,7 @@
           <a:lstStyle xmlns:a="http://schemas.openxmlformats.org/drawingml/2006/main"/>
           <a:p xmlns:a="http://schemas.openxmlformats.org/drawingml/2006/main">
             <a:pPr>
+              <a:buNone/>
               <a:defRPr sz="1650">
                 <a:solidFill>
                   <a:srgbClr val="E2F2FF"/>
@@ -5574,6 +6506,7 @@
           <a:lstStyle xmlns:a="http://schemas.openxmlformats.org/drawingml/2006/main"/>
           <a:p xmlns:a="http://schemas.openxmlformats.org/drawingml/2006/main">
             <a:pPr>
+              <a:buNone/>
               <a:defRPr sz="1050" b="1">
                 <a:solidFill>
                   <a:srgbClr val="1EC5FF"/>
@@ -5657,6 +6590,7 @@
           <a:lstStyle xmlns:a="http://schemas.openxmlformats.org/drawingml/2006/main"/>
           <a:p xmlns:a="http://schemas.openxmlformats.org/drawingml/2006/main">
             <a:pPr>
+              <a:buNone/>
               <a:defRPr sz="825">
                 <a:solidFill>
                   <a:srgbClr val="FFFFFF">
@@ -5711,6 +6645,7 @@
           <a:lstStyle xmlns:a="http://schemas.openxmlformats.org/drawingml/2006/main"/>
           <a:p xmlns:a="http://schemas.openxmlformats.org/drawingml/2006/main">
             <a:pPr algn="r">
+              <a:buNone/>
               <a:defRPr sz="825" b="1">
                 <a:solidFill>
                   <a:srgbClr val="FFFFFF">
@@ -5794,6 +6729,7 @@
           <a:lstStyle xmlns:a="http://schemas.openxmlformats.org/drawingml/2006/main"/>
           <a:p xmlns:a="http://schemas.openxmlformats.org/drawingml/2006/main">
             <a:pPr>
+              <a:buNone/>
               <a:defRPr sz="2925" b="1">
                 <a:solidFill>
                   <a:srgbClr val="0B1F3A"/>
@@ -5844,6 +6780,7 @@
           <a:lstStyle xmlns:a="http://schemas.openxmlformats.org/drawingml/2006/main"/>
           <a:p xmlns:a="http://schemas.openxmlformats.org/drawingml/2006/main">
             <a:pPr>
+              <a:buNone/>
               <a:defRPr sz="3450" b="1">
                 <a:solidFill>
                   <a:srgbClr val="1565C0"/>
@@ -5894,6 +6831,7 @@
           <a:lstStyle xmlns:a="http://schemas.openxmlformats.org/drawingml/2006/main"/>
           <a:p xmlns:a="http://schemas.openxmlformats.org/drawingml/2006/main">
             <a:pPr>
+              <a:buNone/>
               <a:defRPr sz="1575" b="1">
                 <a:solidFill>
                   <a:srgbClr val="0B1F3A"/>
@@ -5975,6 +6913,7 @@
           <a:lstStyle xmlns:a="http://schemas.openxmlformats.org/drawingml/2006/main"/>
           <a:p xmlns:a="http://schemas.openxmlformats.org/drawingml/2006/main">
             <a:pPr>
+              <a:buNone/>
               <a:defRPr sz="3450" b="1">
                 <a:solidFill>
                   <a:srgbClr val="1565C0"/>
@@ -6025,6 +6964,7 @@
           <a:lstStyle xmlns:a="http://schemas.openxmlformats.org/drawingml/2006/main"/>
           <a:p xmlns:a="http://schemas.openxmlformats.org/drawingml/2006/main">
             <a:pPr>
+              <a:buNone/>
               <a:defRPr sz="1575" b="1">
                 <a:solidFill>
                   <a:srgbClr val="0B1F3A"/>
@@ -6106,6 +7046,7 @@
           <a:lstStyle xmlns:a="http://schemas.openxmlformats.org/drawingml/2006/main"/>
           <a:p xmlns:a="http://schemas.openxmlformats.org/drawingml/2006/main">
             <a:pPr>
+              <a:buNone/>
               <a:defRPr sz="3450" b="1">
                 <a:solidFill>
                   <a:srgbClr val="1565C0"/>
@@ -6156,6 +7097,7 @@
           <a:lstStyle xmlns:a="http://schemas.openxmlformats.org/drawingml/2006/main"/>
           <a:p xmlns:a="http://schemas.openxmlformats.org/drawingml/2006/main">
             <a:pPr>
+              <a:buNone/>
               <a:defRPr sz="1575" b="1">
                 <a:solidFill>
                   <a:srgbClr val="0B1F3A"/>
@@ -6206,6 +7148,7 @@
           <a:lstStyle xmlns:a="http://schemas.openxmlformats.org/drawingml/2006/main"/>
           <a:p xmlns:a="http://schemas.openxmlformats.org/drawingml/2006/main">
             <a:pPr>
+              <a:buNone/>
               <a:defRPr sz="1050" b="1">
                 <a:solidFill>
                   <a:srgbClr val="1565C0"/>
@@ -6289,6 +7232,7 @@
           <a:lstStyle xmlns:a="http://schemas.openxmlformats.org/drawingml/2006/main"/>
           <a:p xmlns:a="http://schemas.openxmlformats.org/drawingml/2006/main">
             <a:pPr>
+              <a:buNone/>
               <a:defRPr sz="825">
                 <a:solidFill>
                   <a:srgbClr val="0B1F3A">
@@ -6343,6 +7287,7 @@
           <a:lstStyle xmlns:a="http://schemas.openxmlformats.org/drawingml/2006/main"/>
           <a:p xmlns:a="http://schemas.openxmlformats.org/drawingml/2006/main">
             <a:pPr algn="r">
+              <a:buNone/>
               <a:defRPr sz="825" b="1">
                 <a:solidFill>
                   <a:srgbClr val="0B1F3A">
@@ -6434,6 +7379,7 @@
           <a:lstStyle xmlns:a="http://schemas.openxmlformats.org/drawingml/2006/main"/>
           <a:p xmlns:a="http://schemas.openxmlformats.org/drawingml/2006/main">
             <a:pPr>
+              <a:buNone/>
               <a:defRPr sz="5550" b="1">
                 <a:solidFill>
                   <a:srgbClr val="1EC5FF"/>
@@ -6484,6 +7430,7 @@
           <a:lstStyle xmlns:a="http://schemas.openxmlformats.org/drawingml/2006/main"/>
           <a:p xmlns:a="http://schemas.openxmlformats.org/drawingml/2006/main">
             <a:pPr>
+              <a:buNone/>
               <a:defRPr sz="2250" b="1">
                 <a:solidFill>
                   <a:srgbClr val="FFFFFF"/>
@@ -6567,6 +7514,7 @@
           <a:lstStyle xmlns:a="http://schemas.openxmlformats.org/drawingml/2006/main"/>
           <a:p xmlns:a="http://schemas.openxmlformats.org/drawingml/2006/main">
             <a:pPr>
+              <a:buNone/>
               <a:defRPr sz="1800">
                 <a:solidFill>
                   <a:srgbClr val="E2F2FF"/>
@@ -6617,6 +7565,7 @@
           <a:lstStyle xmlns:a="http://schemas.openxmlformats.org/drawingml/2006/main"/>
           <a:p xmlns:a="http://schemas.openxmlformats.org/drawingml/2006/main">
             <a:pPr>
+              <a:buNone/>
               <a:defRPr sz="1050" b="1">
                 <a:solidFill>
                   <a:srgbClr val="1EC5FF"/>
@@ -6700,6 +7649,7 @@
           <a:lstStyle xmlns:a="http://schemas.openxmlformats.org/drawingml/2006/main"/>
           <a:p xmlns:a="http://schemas.openxmlformats.org/drawingml/2006/main">
             <a:pPr>
+              <a:buNone/>
               <a:defRPr sz="825">
                 <a:solidFill>
                   <a:srgbClr val="FFFFFF">
@@ -6754,6 +7704,7 @@
           <a:lstStyle xmlns:a="http://schemas.openxmlformats.org/drawingml/2006/main"/>
           <a:p xmlns:a="http://schemas.openxmlformats.org/drawingml/2006/main">
             <a:pPr algn="r">
+              <a:buNone/>
               <a:defRPr sz="825" b="1">
                 <a:solidFill>
                   <a:srgbClr val="FFFFFF">
@@ -6837,6 +7788,7 @@
           <a:lstStyle xmlns:a="http://schemas.openxmlformats.org/drawingml/2006/main"/>
           <a:p xmlns:a="http://schemas.openxmlformats.org/drawingml/2006/main">
             <a:pPr>
+              <a:buNone/>
               <a:defRPr sz="2925" b="1">
                 <a:solidFill>
                   <a:srgbClr val="0B1F3A"/>
@@ -6887,6 +7839,7 @@
           <a:lstStyle xmlns:a="http://schemas.openxmlformats.org/drawingml/2006/main"/>
           <a:p xmlns:a="http://schemas.openxmlformats.org/drawingml/2006/main">
             <a:pPr>
+              <a:buNone/>
               <a:defRPr sz="1950">
                 <a:solidFill>
                   <a:srgbClr val="0B1F3A"/>
@@ -6904,6 +7857,7 @@
           </a:p>
           <a:p xmlns:a="http://schemas.openxmlformats.org/drawingml/2006/main">
             <a:pPr>
+              <a:buNone/>
               <a:defRPr sz="1950">
                 <a:solidFill>
                   <a:srgbClr val="0B1F3A"/>
@@ -6921,6 +7875,7 @@
           </a:p>
           <a:p xmlns:a="http://schemas.openxmlformats.org/drawingml/2006/main">
             <a:pPr>
+              <a:buNone/>
               <a:defRPr sz="1950">
                 <a:solidFill>
                   <a:srgbClr val="0B1F3A"/>
@@ -6971,6 +7926,7 @@
           <a:lstStyle xmlns:a="http://schemas.openxmlformats.org/drawingml/2006/main"/>
           <a:p xmlns:a="http://schemas.openxmlformats.org/drawingml/2006/main">
             <a:pPr>
+              <a:buNone/>
               <a:defRPr sz="1050" b="1">
                 <a:solidFill>
                   <a:srgbClr val="1565C0"/>
@@ -7054,6 +8010,7 @@
           <a:lstStyle xmlns:a="http://schemas.openxmlformats.org/drawingml/2006/main"/>
           <a:p xmlns:a="http://schemas.openxmlformats.org/drawingml/2006/main">
             <a:pPr>
+              <a:buNone/>
               <a:defRPr sz="825">
                 <a:solidFill>
                   <a:srgbClr val="0B1F3A">
@@ -7108,6 +8065,7 @@
           <a:lstStyle xmlns:a="http://schemas.openxmlformats.org/drawingml/2006/main"/>
           <a:p xmlns:a="http://schemas.openxmlformats.org/drawingml/2006/main">
             <a:pPr algn="r">
+              <a:buNone/>
               <a:defRPr sz="825" b="1">
                 <a:solidFill>
                   <a:srgbClr val="0B1F3A">
@@ -7199,6 +8157,7 @@
           <a:lstStyle xmlns:a="http://schemas.openxmlformats.org/drawingml/2006/main"/>
           <a:p xmlns:a="http://schemas.openxmlformats.org/drawingml/2006/main">
             <a:pPr>
+              <a:buNone/>
               <a:defRPr sz="1500" b="1">
                 <a:solidFill>
                   <a:srgbClr val="1EC5FF"/>
@@ -7249,6 +8208,7 @@
           <a:lstStyle xmlns:a="http://schemas.openxmlformats.org/drawingml/2006/main"/>
           <a:p xmlns:a="http://schemas.openxmlformats.org/drawingml/2006/main">
             <a:pPr>
+              <a:buNone/>
               <a:defRPr sz="2850" b="1">
                 <a:solidFill>
                   <a:srgbClr val="FFFFFF"/>
@@ -7299,6 +8259,7 @@
           <a:lstStyle xmlns:a="http://schemas.openxmlformats.org/drawingml/2006/main"/>
           <a:p xmlns:a="http://schemas.openxmlformats.org/drawingml/2006/main">
             <a:pPr>
+              <a:buNone/>
               <a:defRPr sz="1500">
                 <a:solidFill>
                   <a:srgbClr val="E2F2FF"/>
@@ -7423,6 +8384,7 @@
           <a:lstStyle xmlns:a="http://schemas.openxmlformats.org/drawingml/2006/main"/>
           <a:p xmlns:a="http://schemas.openxmlformats.org/drawingml/2006/main">
             <a:pPr>
+              <a:buNone/>
               <a:defRPr sz="1050" b="1">
                 <a:solidFill>
                   <a:srgbClr val="1EC5FF"/>
@@ -7506,6 +8468,7 @@
           <a:lstStyle xmlns:a="http://schemas.openxmlformats.org/drawingml/2006/main"/>
           <a:p xmlns:a="http://schemas.openxmlformats.org/drawingml/2006/main">
             <a:pPr>
+              <a:buNone/>
               <a:defRPr sz="825">
                 <a:solidFill>
                   <a:srgbClr val="FFFFFF">
@@ -7560,6 +8523,7 @@
           <a:lstStyle xmlns:a="http://schemas.openxmlformats.org/drawingml/2006/main"/>
           <a:p xmlns:a="http://schemas.openxmlformats.org/drawingml/2006/main">
             <a:pPr algn="r">
+              <a:buNone/>
               <a:defRPr sz="825" b="1">
                 <a:solidFill>
                   <a:srgbClr val="FFFFFF">
@@ -7643,6 +8607,7 @@
           <a:lstStyle xmlns:a="http://schemas.openxmlformats.org/drawingml/2006/main"/>
           <a:p xmlns:a="http://schemas.openxmlformats.org/drawingml/2006/main">
             <a:pPr>
+              <a:buNone/>
               <a:defRPr sz="1350" b="1">
                 <a:solidFill>
                   <a:srgbClr val="1565C0"/>
@@ -7693,6 +8658,7 @@
           <a:lstStyle xmlns:a="http://schemas.openxmlformats.org/drawingml/2006/main"/>
           <a:p xmlns:a="http://schemas.openxmlformats.org/drawingml/2006/main">
             <a:pPr>
+              <a:buNone/>
               <a:defRPr sz="3300" b="1">
                 <a:solidFill>
                   <a:srgbClr val="0B1F3A"/>
@@ -7743,6 +8709,7 @@
           <a:lstStyle xmlns:a="http://schemas.openxmlformats.org/drawingml/2006/main"/>
           <a:p xmlns:a="http://schemas.openxmlformats.org/drawingml/2006/main">
             <a:pPr>
+              <a:buNone/>
               <a:defRPr sz="1500">
                 <a:solidFill>
                   <a:srgbClr val="5C6F86"/>
@@ -7793,6 +8760,7 @@
           <a:lstStyle xmlns:a="http://schemas.openxmlformats.org/drawingml/2006/main"/>
           <a:p xmlns:a="http://schemas.openxmlformats.org/drawingml/2006/main">
             <a:pPr>
+              <a:buNone/>
               <a:defRPr sz="1050" b="1">
                 <a:solidFill>
                   <a:srgbClr val="1565C0"/>
@@ -7876,6 +8844,7 @@
           <a:lstStyle xmlns:a="http://schemas.openxmlformats.org/drawingml/2006/main"/>
           <a:p xmlns:a="http://schemas.openxmlformats.org/drawingml/2006/main">
             <a:pPr>
+              <a:buNone/>
               <a:defRPr sz="825">
                 <a:solidFill>
                   <a:srgbClr val="0B1F3A">
@@ -7930,6 +8899,7 @@
           <a:lstStyle xmlns:a="http://schemas.openxmlformats.org/drawingml/2006/main"/>
           <a:p xmlns:a="http://schemas.openxmlformats.org/drawingml/2006/main">
             <a:pPr algn="r">
+              <a:buNone/>
               <a:defRPr sz="825" b="1">
                 <a:solidFill>
                   <a:srgbClr val="0B1F3A">
@@ -8013,6 +8983,7 @@
           <a:lstStyle xmlns:a="http://schemas.openxmlformats.org/drawingml/2006/main"/>
           <a:p xmlns:a="http://schemas.openxmlformats.org/drawingml/2006/main">
             <a:pPr>
+              <a:buNone/>
               <a:defRPr sz="2850" b="1">
                 <a:solidFill>
                   <a:srgbClr val="0B1F3A"/>
@@ -8094,6 +9065,7 @@
           <a:lstStyle xmlns:a="http://schemas.openxmlformats.org/drawingml/2006/main"/>
           <a:p xmlns:a="http://schemas.openxmlformats.org/drawingml/2006/main">
             <a:pPr>
+              <a:buNone/>
               <a:defRPr sz="1425" b="1">
                 <a:solidFill>
                   <a:srgbClr val="1565C0"/>
@@ -8148,14 +9120,14 @@
       </p:sp>
       <p:pic>
         <p:nvPicPr>
-          <p:cNvPr id="14" name="" descr="Diagrama didático autoral que apresenta: Título de vídeo não é evidência. Manifest, testes e resultados executáveis são. — A pergunta que guia a aula."/>
+          <p:cNvPr id="16" name="" descr="Diagrama didático autoral que apresenta: Título de vídeo não é evidência. Manifest, testes e resultados executáveis são. — A pergunta que guia a aula."/>
           <p:cNvPicPr>
             <a:picLocks xmlns:a="http://schemas.openxmlformats.org/drawingml/2006/main" noChangeAspect="1"/>
           </p:cNvPicPr>
           <p:nvPr/>
         </p:nvPicPr>
         <p:blipFill>
-          <a:blip xmlns:r="http://schemas.openxmlformats.org/officeDocument/2006/relationships" xmlns:a="http://schemas.openxmlformats.org/drawingml/2006/main" r:embed="Rba0c44de397f401f"/>
+          <a:blip xmlns:r="http://schemas.openxmlformats.org/officeDocument/2006/relationships" xmlns:a="http://schemas.openxmlformats.org/drawingml/2006/main" r:embed="R86a6ea56926c401d"/>
           <a:stretch xmlns:a="http://schemas.openxmlformats.org/drawingml/2006/main"/>
         </p:blipFill>
         <p:spPr>
@@ -8201,6 +9173,7 @@
           <a:lstStyle xmlns:a="http://schemas.openxmlformats.org/drawingml/2006/main"/>
           <a:p xmlns:a="http://schemas.openxmlformats.org/drawingml/2006/main">
             <a:pPr>
+              <a:buNone/>
               <a:defRPr sz="1050" b="1">
                 <a:solidFill>
                   <a:srgbClr val="1565C0"/>
@@ -8284,6 +9257,7 @@
           <a:lstStyle xmlns:a="http://schemas.openxmlformats.org/drawingml/2006/main"/>
           <a:p xmlns:a="http://schemas.openxmlformats.org/drawingml/2006/main">
             <a:pPr>
+              <a:buNone/>
               <a:defRPr sz="825">
                 <a:solidFill>
                   <a:srgbClr val="0B1F3A">
@@ -8338,6 +9312,7 @@
           <a:lstStyle xmlns:a="http://schemas.openxmlformats.org/drawingml/2006/main"/>
           <a:p xmlns:a="http://schemas.openxmlformats.org/drawingml/2006/main">
             <a:pPr algn="r">
+              <a:buNone/>
               <a:defRPr sz="825" b="1">
                 <a:solidFill>
                   <a:srgbClr val="0B1F3A">
@@ -8429,6 +9404,7 @@
           <a:lstStyle xmlns:a="http://schemas.openxmlformats.org/drawingml/2006/main"/>
           <a:p xmlns:a="http://schemas.openxmlformats.org/drawingml/2006/main">
             <a:pPr>
+              <a:buNone/>
               <a:defRPr sz="2925" b="1">
                 <a:solidFill>
                   <a:srgbClr val="FFFFFF"/>
@@ -8479,6 +9455,7 @@
           <a:lstStyle xmlns:a="http://schemas.openxmlformats.org/drawingml/2006/main"/>
           <a:p xmlns:a="http://schemas.openxmlformats.org/drawingml/2006/main">
             <a:pPr>
+              <a:buNone/>
               <a:defRPr sz="3450" b="1">
                 <a:solidFill>
                   <a:srgbClr val="1EC5FF"/>
@@ -8529,6 +9506,7 @@
           <a:lstStyle xmlns:a="http://schemas.openxmlformats.org/drawingml/2006/main"/>
           <a:p xmlns:a="http://schemas.openxmlformats.org/drawingml/2006/main">
             <a:pPr>
+              <a:buNone/>
               <a:defRPr sz="1575" b="1">
                 <a:solidFill>
                   <a:srgbClr val="FFFFFF"/>
@@ -8610,6 +9588,7 @@
           <a:lstStyle xmlns:a="http://schemas.openxmlformats.org/drawingml/2006/main"/>
           <a:p xmlns:a="http://schemas.openxmlformats.org/drawingml/2006/main">
             <a:pPr>
+              <a:buNone/>
               <a:defRPr sz="3450" b="1">
                 <a:solidFill>
                   <a:srgbClr val="1EC5FF"/>
@@ -8660,6 +9639,7 @@
           <a:lstStyle xmlns:a="http://schemas.openxmlformats.org/drawingml/2006/main"/>
           <a:p xmlns:a="http://schemas.openxmlformats.org/drawingml/2006/main">
             <a:pPr>
+              <a:buNone/>
               <a:defRPr sz="1575" b="1">
                 <a:solidFill>
                   <a:srgbClr val="FFFFFF"/>
@@ -8741,6 +9721,7 @@
           <a:lstStyle xmlns:a="http://schemas.openxmlformats.org/drawingml/2006/main"/>
           <a:p xmlns:a="http://schemas.openxmlformats.org/drawingml/2006/main">
             <a:pPr>
+              <a:buNone/>
               <a:defRPr sz="3450" b="1">
                 <a:solidFill>
                   <a:srgbClr val="1EC5FF"/>
@@ -8791,6 +9772,7 @@
           <a:lstStyle xmlns:a="http://schemas.openxmlformats.org/drawingml/2006/main"/>
           <a:p xmlns:a="http://schemas.openxmlformats.org/drawingml/2006/main">
             <a:pPr>
+              <a:buNone/>
               <a:defRPr sz="1575" b="1">
                 <a:solidFill>
                   <a:srgbClr val="FFFFFF"/>
@@ -8841,6 +9823,7 @@
           <a:lstStyle xmlns:a="http://schemas.openxmlformats.org/drawingml/2006/main"/>
           <a:p xmlns:a="http://schemas.openxmlformats.org/drawingml/2006/main">
             <a:pPr>
+              <a:buNone/>
               <a:defRPr sz="1050" b="1">
                 <a:solidFill>
                   <a:srgbClr val="1EC5FF"/>
@@ -8924,6 +9907,7 @@
           <a:lstStyle xmlns:a="http://schemas.openxmlformats.org/drawingml/2006/main"/>
           <a:p xmlns:a="http://schemas.openxmlformats.org/drawingml/2006/main">
             <a:pPr>
+              <a:buNone/>
               <a:defRPr sz="825">
                 <a:solidFill>
                   <a:srgbClr val="FFFFFF">
@@ -8978,6 +9962,7 @@
           <a:lstStyle xmlns:a="http://schemas.openxmlformats.org/drawingml/2006/main"/>
           <a:p xmlns:a="http://schemas.openxmlformats.org/drawingml/2006/main">
             <a:pPr algn="r">
+              <a:buNone/>
               <a:defRPr sz="825" b="1">
                 <a:solidFill>
                   <a:srgbClr val="FFFFFF">
@@ -9069,6 +10054,7 @@
           <a:lstStyle xmlns:a="http://schemas.openxmlformats.org/drawingml/2006/main"/>
           <a:p xmlns:a="http://schemas.openxmlformats.org/drawingml/2006/main">
             <a:pPr>
+              <a:buNone/>
               <a:defRPr sz="2925" b="1">
                 <a:solidFill>
                   <a:srgbClr val="FFFFFF"/>
@@ -9119,6 +10105,7 @@
           <a:lstStyle xmlns:a="http://schemas.openxmlformats.org/drawingml/2006/main"/>
           <a:p xmlns:a="http://schemas.openxmlformats.org/drawingml/2006/main">
             <a:pPr>
+              <a:buNone/>
               <a:defRPr sz="1650">
                 <a:solidFill>
                   <a:srgbClr val="E2F2FF"/>
@@ -9169,6 +10156,7 @@
           <a:lstStyle xmlns:a="http://schemas.openxmlformats.org/drawingml/2006/main"/>
           <a:p xmlns:a="http://schemas.openxmlformats.org/drawingml/2006/main">
             <a:pPr>
+              <a:buNone/>
               <a:defRPr sz="1800">
                 <a:solidFill>
                   <a:srgbClr val="FFFFFF"/>
@@ -9186,6 +10174,7 @@
           </a:p>
           <a:p xmlns:a="http://schemas.openxmlformats.org/drawingml/2006/main">
             <a:pPr>
+              <a:buNone/>
               <a:defRPr sz="1800">
                 <a:solidFill>
                   <a:srgbClr val="FFFFFF"/>
@@ -9203,6 +10192,7 @@
           </a:p>
           <a:p xmlns:a="http://schemas.openxmlformats.org/drawingml/2006/main">
             <a:pPr>
+              <a:buNone/>
               <a:defRPr sz="1800">
                 <a:solidFill>
                   <a:srgbClr val="FFFFFF"/>
@@ -9327,6 +10317,7 @@
           <a:lstStyle xmlns:a="http://schemas.openxmlformats.org/drawingml/2006/main"/>
           <a:p xmlns:a="http://schemas.openxmlformats.org/drawingml/2006/main">
             <a:pPr algn="ctr">
+              <a:buNone/>
               <a:defRPr sz="4650" b="1">
                 <a:solidFill>
                   <a:srgbClr val="1EC5FF"/>
@@ -9377,6 +10368,7 @@
           <a:lstStyle xmlns:a="http://schemas.openxmlformats.org/drawingml/2006/main"/>
           <a:p xmlns:a="http://schemas.openxmlformats.org/drawingml/2006/main">
             <a:pPr>
+              <a:buNone/>
               <a:defRPr sz="1050" b="1">
                 <a:solidFill>
                   <a:srgbClr val="1EC5FF"/>
@@ -9460,6 +10452,7 @@
           <a:lstStyle xmlns:a="http://schemas.openxmlformats.org/drawingml/2006/main"/>
           <a:p xmlns:a="http://schemas.openxmlformats.org/drawingml/2006/main">
             <a:pPr>
+              <a:buNone/>
               <a:defRPr sz="825">
                 <a:solidFill>
                   <a:srgbClr val="FFFFFF">
@@ -9514,6 +10507,7 @@
           <a:lstStyle xmlns:a="http://schemas.openxmlformats.org/drawingml/2006/main"/>
           <a:p xmlns:a="http://schemas.openxmlformats.org/drawingml/2006/main">
             <a:pPr algn="r">
+              <a:buNone/>
               <a:defRPr sz="825" b="1">
                 <a:solidFill>
                   <a:srgbClr val="FFFFFF">
@@ -9597,6 +10591,7 @@
           <a:lstStyle xmlns:a="http://schemas.openxmlformats.org/drawingml/2006/main"/>
           <a:p xmlns:a="http://schemas.openxmlformats.org/drawingml/2006/main">
             <a:pPr>
+              <a:buNone/>
               <a:defRPr sz="2925" b="1">
                 <a:solidFill>
                   <a:srgbClr val="0B1F3A"/>
@@ -9647,6 +10642,7 @@
           <a:lstStyle xmlns:a="http://schemas.openxmlformats.org/drawingml/2006/main"/>
           <a:p xmlns:a="http://schemas.openxmlformats.org/drawingml/2006/main">
             <a:pPr>
+              <a:buNone/>
               <a:defRPr sz="1650">
                 <a:solidFill>
                   <a:srgbClr val="5C6F86"/>
@@ -9697,6 +10693,7 @@
           <a:lstStyle xmlns:a="http://schemas.openxmlformats.org/drawingml/2006/main"/>
           <a:p xmlns:a="http://schemas.openxmlformats.org/drawingml/2006/main">
             <a:pPr>
+              <a:buNone/>
               <a:defRPr sz="1800">
                 <a:solidFill>
                   <a:srgbClr val="0B1F3A"/>
@@ -9714,6 +10711,7 @@
           </a:p>
           <a:p xmlns:a="http://schemas.openxmlformats.org/drawingml/2006/main">
             <a:pPr>
+              <a:buNone/>
               <a:defRPr sz="1800">
                 <a:solidFill>
                   <a:srgbClr val="0B1F3A"/>
@@ -9731,6 +10729,7 @@
           </a:p>
           <a:p xmlns:a="http://schemas.openxmlformats.org/drawingml/2006/main">
             <a:pPr>
+              <a:buNone/>
               <a:defRPr sz="1800">
                 <a:solidFill>
                   <a:srgbClr val="0B1F3A"/>
@@ -9855,6 +10854,7 @@
           <a:lstStyle xmlns:a="http://schemas.openxmlformats.org/drawingml/2006/main"/>
           <a:p xmlns:a="http://schemas.openxmlformats.org/drawingml/2006/main">
             <a:pPr algn="ctr">
+              <a:buNone/>
               <a:defRPr sz="4650" b="1">
                 <a:solidFill>
                   <a:srgbClr val="1565C0"/>
@@ -9905,6 +10905,7 @@
           <a:lstStyle xmlns:a="http://schemas.openxmlformats.org/drawingml/2006/main"/>
           <a:p xmlns:a="http://schemas.openxmlformats.org/drawingml/2006/main">
             <a:pPr>
+              <a:buNone/>
               <a:defRPr sz="1050" b="1">
                 <a:solidFill>
                   <a:srgbClr val="1565C0"/>
@@ -9988,6 +10989,7 @@
           <a:lstStyle xmlns:a="http://schemas.openxmlformats.org/drawingml/2006/main"/>
           <a:p xmlns:a="http://schemas.openxmlformats.org/drawingml/2006/main">
             <a:pPr>
+              <a:buNone/>
               <a:defRPr sz="825">
                 <a:solidFill>
                   <a:srgbClr val="0B1F3A">
@@ -10042,6 +11044,7 @@
           <a:lstStyle xmlns:a="http://schemas.openxmlformats.org/drawingml/2006/main"/>
           <a:p xmlns:a="http://schemas.openxmlformats.org/drawingml/2006/main">
             <a:pPr algn="r">
+              <a:buNone/>
               <a:defRPr sz="825" b="1">
                 <a:solidFill>
                   <a:srgbClr val="0B1F3A">
@@ -10133,6 +11136,7 @@
           <a:lstStyle xmlns:a="http://schemas.openxmlformats.org/drawingml/2006/main"/>
           <a:p xmlns:a="http://schemas.openxmlformats.org/drawingml/2006/main">
             <a:pPr>
+              <a:buNone/>
               <a:defRPr sz="2925" b="1">
                 <a:solidFill>
                   <a:srgbClr val="FFFFFF"/>
@@ -10216,6 +11220,7 @@
           <a:lstStyle xmlns:a="http://schemas.openxmlformats.org/drawingml/2006/main"/>
           <a:p xmlns:a="http://schemas.openxmlformats.org/drawingml/2006/main">
             <a:pPr algn="ctr">
+              <a:buNone/>
               <a:defRPr sz="1575" b="1">
                 <a:solidFill>
                   <a:srgbClr val="FFFFFF"/>
@@ -10299,6 +11304,7 @@
           <a:lstStyle xmlns:a="http://schemas.openxmlformats.org/drawingml/2006/main"/>
           <a:p xmlns:a="http://schemas.openxmlformats.org/drawingml/2006/main">
             <a:pPr algn="ctr">
+              <a:buNone/>
               <a:defRPr sz="1575" b="1">
                 <a:solidFill>
                   <a:srgbClr val="FFFFFF"/>
@@ -10382,6 +11388,7 @@
           <a:lstStyle xmlns:a="http://schemas.openxmlformats.org/drawingml/2006/main"/>
           <a:p xmlns:a="http://schemas.openxmlformats.org/drawingml/2006/main">
             <a:pPr algn="ctr">
+              <a:buNone/>
               <a:defRPr sz="1575" b="1">
                 <a:solidFill>
                   <a:srgbClr val="FFFFFF"/>
@@ -10432,6 +11439,7 @@
           <a:lstStyle xmlns:a="http://schemas.openxmlformats.org/drawingml/2006/main"/>
           <a:p xmlns:a="http://schemas.openxmlformats.org/drawingml/2006/main">
             <a:pPr>
+              <a:buNone/>
               <a:defRPr sz="1050" b="1">
                 <a:solidFill>
                   <a:srgbClr val="1EC5FF"/>
@@ -10515,6 +11523,7 @@
           <a:lstStyle xmlns:a="http://schemas.openxmlformats.org/drawingml/2006/main"/>
           <a:p xmlns:a="http://schemas.openxmlformats.org/drawingml/2006/main">
             <a:pPr>
+              <a:buNone/>
               <a:defRPr sz="825">
                 <a:solidFill>
                   <a:srgbClr val="FFFFFF">
@@ -10569,6 +11578,7 @@
           <a:lstStyle xmlns:a="http://schemas.openxmlformats.org/drawingml/2006/main"/>
           <a:p xmlns:a="http://schemas.openxmlformats.org/drawingml/2006/main">
             <a:pPr algn="r">
+              <a:buNone/>
               <a:defRPr sz="825" b="1">
                 <a:solidFill>
                   <a:srgbClr val="FFFFFF">
@@ -10660,6 +11670,7 @@
           <a:lstStyle xmlns:a="http://schemas.openxmlformats.org/drawingml/2006/main"/>
           <a:p xmlns:a="http://schemas.openxmlformats.org/drawingml/2006/main">
             <a:pPr>
+              <a:buNone/>
               <a:defRPr sz="2925" b="1">
                 <a:solidFill>
                   <a:srgbClr val="FFFFFF"/>
@@ -10710,6 +11721,7 @@
           <a:lstStyle xmlns:a="http://schemas.openxmlformats.org/drawingml/2006/main"/>
           <a:p xmlns:a="http://schemas.openxmlformats.org/drawingml/2006/main">
             <a:pPr>
+              <a:buNone/>
               <a:defRPr sz="1650">
                 <a:solidFill>
                   <a:srgbClr val="E2F2FF"/>
@@ -10760,6 +11772,7 @@
           <a:lstStyle xmlns:a="http://schemas.openxmlformats.org/drawingml/2006/main"/>
           <a:p xmlns:a="http://schemas.openxmlformats.org/drawingml/2006/main">
             <a:pPr>
+              <a:buNone/>
               <a:defRPr sz="1800">
                 <a:solidFill>
                   <a:srgbClr val="FFFFFF"/>
@@ -10777,6 +11790,7 @@
           </a:p>
           <a:p xmlns:a="http://schemas.openxmlformats.org/drawingml/2006/main">
             <a:pPr>
+              <a:buNone/>
               <a:defRPr sz="1800">
                 <a:solidFill>
                   <a:srgbClr val="FFFFFF"/>
@@ -10794,6 +11808,7 @@
           </a:p>
           <a:p xmlns:a="http://schemas.openxmlformats.org/drawingml/2006/main">
             <a:pPr>
+              <a:buNone/>
               <a:defRPr sz="1800">
                 <a:solidFill>
                   <a:srgbClr val="FFFFFF"/>
@@ -10918,6 +11933,7 @@
           <a:lstStyle xmlns:a="http://schemas.openxmlformats.org/drawingml/2006/main"/>
           <a:p xmlns:a="http://schemas.openxmlformats.org/drawingml/2006/main">
             <a:pPr algn="ctr">
+              <a:buNone/>
               <a:defRPr sz="4650" b="1">
                 <a:solidFill>
                   <a:srgbClr val="1EC5FF"/>
@@ -10968,6 +11984,7 @@
           <a:lstStyle xmlns:a="http://schemas.openxmlformats.org/drawingml/2006/main"/>
           <a:p xmlns:a="http://schemas.openxmlformats.org/drawingml/2006/main">
             <a:pPr>
+              <a:buNone/>
               <a:defRPr sz="1050" b="1">
                 <a:solidFill>
                   <a:srgbClr val="1EC5FF"/>
@@ -11051,6 +12068,7 @@
           <a:lstStyle xmlns:a="http://schemas.openxmlformats.org/drawingml/2006/main"/>
           <a:p xmlns:a="http://schemas.openxmlformats.org/drawingml/2006/main">
             <a:pPr>
+              <a:buNone/>
               <a:defRPr sz="825">
                 <a:solidFill>
                   <a:srgbClr val="FFFFFF">
@@ -11105,6 +12123,7 @@
           <a:lstStyle xmlns:a="http://schemas.openxmlformats.org/drawingml/2006/main"/>
           <a:p xmlns:a="http://schemas.openxmlformats.org/drawingml/2006/main">
             <a:pPr algn="r">
+              <a:buNone/>
               <a:defRPr sz="825" b="1">
                 <a:solidFill>
                   <a:srgbClr val="FFFFFF">
@@ -11188,6 +12207,7 @@
           <a:lstStyle xmlns:a="http://schemas.openxmlformats.org/drawingml/2006/main"/>
           <a:p xmlns:a="http://schemas.openxmlformats.org/drawingml/2006/main">
             <a:pPr>
+              <a:buNone/>
               <a:defRPr sz="2925" b="1">
                 <a:solidFill>
                   <a:srgbClr val="0B1F3A"/>
@@ -11244,6 +12264,7 @@
           <a:lstStyle xmlns:a="http://schemas.openxmlformats.org/drawingml/2006/main"/>
           <a:p xmlns:a="http://schemas.openxmlformats.org/drawingml/2006/main">
             <a:pPr algn="ctr">
+              <a:buNone/>
               <a:defRPr sz="1575" b="1">
                 <a:solidFill>
                   <a:srgbClr val="0B1F3A"/>
@@ -11300,6 +12321,7 @@
           <a:lstStyle xmlns:a="http://schemas.openxmlformats.org/drawingml/2006/main"/>
           <a:p xmlns:a="http://schemas.openxmlformats.org/drawingml/2006/main">
             <a:pPr algn="ctr">
+              <a:buNone/>
               <a:defRPr sz="1575" b="1">
                 <a:solidFill>
                   <a:srgbClr val="0B1F3A"/>
@@ -11356,6 +12378,7 @@
           <a:lstStyle xmlns:a="http://schemas.openxmlformats.org/drawingml/2006/main"/>
           <a:p xmlns:a="http://schemas.openxmlformats.org/drawingml/2006/main">
             <a:pPr algn="ctr">
+              <a:buNone/>
               <a:defRPr sz="1575" b="1">
                 <a:solidFill>
                   <a:srgbClr val="0B1F3A"/>
@@ -11412,6 +12435,7 @@
           <a:lstStyle xmlns:a="http://schemas.openxmlformats.org/drawingml/2006/main"/>
           <a:p xmlns:a="http://schemas.openxmlformats.org/drawingml/2006/main">
             <a:pPr algn="ctr">
+              <a:buNone/>
               <a:defRPr sz="1575" b="1">
                 <a:solidFill>
                   <a:srgbClr val="0B1F3A"/>
@@ -11431,7 +12455,7 @@
       </p:sp>
       <p:cxnSp>
         <p:nvCxnSpPr>
-          <p:cNvPr id="18" name=""/>
+          <p:cNvPr id="26" name=""/>
           <p:cNvCxnSpPr>
             <a:stCxn xmlns:a="http://schemas.openxmlformats.org/drawingml/2006/main" id="2" idx="3"/>
             <a:endCxn xmlns:a="http://schemas.openxmlformats.org/drawingml/2006/main" id="3" idx="1"/>
@@ -11457,7 +12481,7 @@
       </p:cxnSp>
       <p:cxnSp>
         <p:nvCxnSpPr>
-          <p:cNvPr id="19" name=""/>
+          <p:cNvPr id="27" name=""/>
           <p:cNvCxnSpPr>
             <a:stCxn xmlns:a="http://schemas.openxmlformats.org/drawingml/2006/main" id="3" idx="3"/>
             <a:endCxn xmlns:a="http://schemas.openxmlformats.org/drawingml/2006/main" id="4" idx="1"/>
@@ -11483,7 +12507,7 @@
       </p:cxnSp>
       <p:cxnSp>
         <p:nvCxnSpPr>
-          <p:cNvPr id="20" name=""/>
+          <p:cNvPr id="28" name=""/>
           <p:cNvCxnSpPr>
             <a:stCxn xmlns:a="http://schemas.openxmlformats.org/drawingml/2006/main" id="4" idx="3"/>
             <a:endCxn xmlns:a="http://schemas.openxmlformats.org/drawingml/2006/main" id="5" idx="1"/>
@@ -11540,6 +12564,7 @@
           <a:lstStyle xmlns:a="http://schemas.openxmlformats.org/drawingml/2006/main"/>
           <a:p xmlns:a="http://schemas.openxmlformats.org/drawingml/2006/main">
             <a:pPr>
+              <a:buNone/>
               <a:defRPr sz="1050" b="1">
                 <a:solidFill>
                   <a:srgbClr val="1565C0"/>
@@ -11623,6 +12648,7 @@
           <a:lstStyle xmlns:a="http://schemas.openxmlformats.org/drawingml/2006/main"/>
           <a:p xmlns:a="http://schemas.openxmlformats.org/drawingml/2006/main">
             <a:pPr>
+              <a:buNone/>
               <a:defRPr sz="825">
                 <a:solidFill>
                   <a:srgbClr val="0B1F3A">
@@ -11677,6 +12703,7 @@
           <a:lstStyle xmlns:a="http://schemas.openxmlformats.org/drawingml/2006/main"/>
           <a:p xmlns:a="http://schemas.openxmlformats.org/drawingml/2006/main">
             <a:pPr algn="r">
+              <a:buNone/>
               <a:defRPr sz="825" b="1">
                 <a:solidFill>
                   <a:srgbClr val="0B1F3A">
@@ -11760,6 +12787,7 @@
           <a:lstStyle xmlns:a="http://schemas.openxmlformats.org/drawingml/2006/main"/>
           <a:p xmlns:a="http://schemas.openxmlformats.org/drawingml/2006/main">
             <a:pPr>
+              <a:buNone/>
               <a:defRPr sz="2925" b="1">
                 <a:solidFill>
                   <a:srgbClr val="0B1F3A"/>
@@ -11810,6 +12838,7 @@
           <a:lstStyle xmlns:a="http://schemas.openxmlformats.org/drawingml/2006/main"/>
           <a:p xmlns:a="http://schemas.openxmlformats.org/drawingml/2006/main">
             <a:pPr>
+              <a:buNone/>
               <a:defRPr sz="1650">
                 <a:solidFill>
                   <a:srgbClr val="5C6F86"/>
@@ -11860,6 +12889,7 @@
           <a:lstStyle xmlns:a="http://schemas.openxmlformats.org/drawingml/2006/main"/>
           <a:p xmlns:a="http://schemas.openxmlformats.org/drawingml/2006/main">
             <a:pPr>
+              <a:buNone/>
               <a:defRPr sz="1800">
                 <a:solidFill>
                   <a:srgbClr val="0B1F3A"/>
@@ -11877,6 +12907,7 @@
           </a:p>
           <a:p xmlns:a="http://schemas.openxmlformats.org/drawingml/2006/main">
             <a:pPr>
+              <a:buNone/>
               <a:defRPr sz="1800">
                 <a:solidFill>
                   <a:srgbClr val="0B1F3A"/>
@@ -11894,6 +12925,7 @@
           </a:p>
           <a:p xmlns:a="http://schemas.openxmlformats.org/drawingml/2006/main">
             <a:pPr>
+              <a:buNone/>
               <a:defRPr sz="1800">
                 <a:solidFill>
                   <a:srgbClr val="0B1F3A"/>
@@ -12018,6 +13050,7 @@
           <a:lstStyle xmlns:a="http://schemas.openxmlformats.org/drawingml/2006/main"/>
           <a:p xmlns:a="http://schemas.openxmlformats.org/drawingml/2006/main">
             <a:pPr algn="ctr">
+              <a:buNone/>
               <a:defRPr sz="4650" b="1">
                 <a:solidFill>
                   <a:srgbClr val="1565C0"/>
@@ -12068,6 +13101,7 @@
           <a:lstStyle xmlns:a="http://schemas.openxmlformats.org/drawingml/2006/main"/>
           <a:p xmlns:a="http://schemas.openxmlformats.org/drawingml/2006/main">
             <a:pPr>
+              <a:buNone/>
               <a:defRPr sz="1050" b="1">
                 <a:solidFill>
                   <a:srgbClr val="1565C0"/>
@@ -12151,6 +13185,7 @@
           <a:lstStyle xmlns:a="http://schemas.openxmlformats.org/drawingml/2006/main"/>
           <a:p xmlns:a="http://schemas.openxmlformats.org/drawingml/2006/main">
             <a:pPr>
+              <a:buNone/>
               <a:defRPr sz="825">
                 <a:solidFill>
                   <a:srgbClr val="0B1F3A">
@@ -12205,6 +13240,7 @@
           <a:lstStyle xmlns:a="http://schemas.openxmlformats.org/drawingml/2006/main"/>
           <a:p xmlns:a="http://schemas.openxmlformats.org/drawingml/2006/main">
             <a:pPr algn="r">
+              <a:buNone/>
               <a:defRPr sz="825" b="1">
                 <a:solidFill>
                   <a:srgbClr val="0B1F3A">

--- a/assets/decks/episodio-01-baseline-core-1-12.pptx
+++ b/assets/decks/episodio-01-baseline-core-1-12.pptx
@@ -2,31 +2,31 @@
 <file path=ppt/presentation.xml><?xml version="1.0" encoding="utf-8"?>
 <p:presentation xmlns:p="http://schemas.openxmlformats.org/presentationml/2006/main">
   <p:sldMasterIdLst>
-    <p:sldMasterId xmlns:r="http://schemas.openxmlformats.org/officeDocument/2006/relationships" id="2147483648" r:id="Rba7f1f686d184949"/>
-    <p:sldMasterId xmlns:r="http://schemas.openxmlformats.org/officeDocument/2006/relationships" id="2147483650" r:id="R324b61d0b930412e"/>
+    <p:sldMasterId xmlns:r="http://schemas.openxmlformats.org/officeDocument/2006/relationships" id="2147483648" r:id="R061a28c4eeba47f7"/>
+    <p:sldMasterId xmlns:r="http://schemas.openxmlformats.org/officeDocument/2006/relationships" id="2147483650" r:id="Rce538c2ba5714997"/>
   </p:sldMasterIdLst>
   <p:notesMasterIdLst>
-    <p:notesMasterId xmlns:r="http://schemas.openxmlformats.org/officeDocument/2006/relationships" r:id="R5d0043a484fb4b5e"/>
+    <p:notesMasterId xmlns:r="http://schemas.openxmlformats.org/officeDocument/2006/relationships" r:id="Rece42d9b60b442dd"/>
   </p:notesMasterIdLst>
   <p:sldIdLst>
-    <p:sldId xmlns:r="http://schemas.openxmlformats.org/officeDocument/2006/relationships" id="256" r:id="R444b18f23dab40bf"/>
-    <p:sldId xmlns:r="http://schemas.openxmlformats.org/officeDocument/2006/relationships" id="257" r:id="R3a5f20b938244436"/>
-    <p:sldId xmlns:r="http://schemas.openxmlformats.org/officeDocument/2006/relationships" id="258" r:id="Rac3550273846435d"/>
-    <p:sldId xmlns:r="http://schemas.openxmlformats.org/officeDocument/2006/relationships" id="259" r:id="Re221509f92dc43fc"/>
-    <p:sldId xmlns:r="http://schemas.openxmlformats.org/officeDocument/2006/relationships" id="260" r:id="Rad6be9c286c642d4"/>
-    <p:sldId xmlns:r="http://schemas.openxmlformats.org/officeDocument/2006/relationships" id="261" r:id="R7d81cf59a04543de"/>
-    <p:sldId xmlns:r="http://schemas.openxmlformats.org/officeDocument/2006/relationships" id="262" r:id="Rf4cf19367683469f"/>
-    <p:sldId xmlns:r="http://schemas.openxmlformats.org/officeDocument/2006/relationships" id="263" r:id="Rf7745eb72ffc40a4"/>
-    <p:sldId xmlns:r="http://schemas.openxmlformats.org/officeDocument/2006/relationships" id="264" r:id="R6d172b3fb0ce425f"/>
-    <p:sldId xmlns:r="http://schemas.openxmlformats.org/officeDocument/2006/relationships" id="265" r:id="R1d7da2b79f884420"/>
-    <p:sldId xmlns:r="http://schemas.openxmlformats.org/officeDocument/2006/relationships" id="266" r:id="R304a32b092cf41aa"/>
-    <p:sldId xmlns:r="http://schemas.openxmlformats.org/officeDocument/2006/relationships" id="267" r:id="R6ac9e536e24340e8"/>
-    <p:sldId xmlns:r="http://schemas.openxmlformats.org/officeDocument/2006/relationships" id="268" r:id="R67ecbe595db14ee6"/>
-    <p:sldId xmlns:r="http://schemas.openxmlformats.org/officeDocument/2006/relationships" id="269" r:id="R89ccfc3032484c26"/>
-    <p:sldId xmlns:r="http://schemas.openxmlformats.org/officeDocument/2006/relationships" id="270" r:id="R5fc0494b408c4f1f"/>
-    <p:sldId xmlns:r="http://schemas.openxmlformats.org/officeDocument/2006/relationships" id="271" r:id="Re79ca69238474966"/>
-    <p:sldId xmlns:r="http://schemas.openxmlformats.org/officeDocument/2006/relationships" id="272" r:id="R13ce6687e33e4fcc"/>
-    <p:sldId xmlns:r="http://schemas.openxmlformats.org/officeDocument/2006/relationships" id="273" r:id="Rfe7af13b1cf34765"/>
+    <p:sldId xmlns:r="http://schemas.openxmlformats.org/officeDocument/2006/relationships" id="256" r:id="R406f60c0663e4504"/>
+    <p:sldId xmlns:r="http://schemas.openxmlformats.org/officeDocument/2006/relationships" id="257" r:id="R77d28671b6824ad2"/>
+    <p:sldId xmlns:r="http://schemas.openxmlformats.org/officeDocument/2006/relationships" id="258" r:id="Reaa177c03c144339"/>
+    <p:sldId xmlns:r="http://schemas.openxmlformats.org/officeDocument/2006/relationships" id="259" r:id="R4fd7d4579e734378"/>
+    <p:sldId xmlns:r="http://schemas.openxmlformats.org/officeDocument/2006/relationships" id="260" r:id="R46ddf310e1054978"/>
+    <p:sldId xmlns:r="http://schemas.openxmlformats.org/officeDocument/2006/relationships" id="261" r:id="R87bd72e76b4d4bcf"/>
+    <p:sldId xmlns:r="http://schemas.openxmlformats.org/officeDocument/2006/relationships" id="262" r:id="Rd4999eec09eb4d14"/>
+    <p:sldId xmlns:r="http://schemas.openxmlformats.org/officeDocument/2006/relationships" id="263" r:id="R0bc2d10004884b7f"/>
+    <p:sldId xmlns:r="http://schemas.openxmlformats.org/officeDocument/2006/relationships" id="264" r:id="Rb212e6073cce4ce0"/>
+    <p:sldId xmlns:r="http://schemas.openxmlformats.org/officeDocument/2006/relationships" id="265" r:id="R392b6073e0314a6b"/>
+    <p:sldId xmlns:r="http://schemas.openxmlformats.org/officeDocument/2006/relationships" id="266" r:id="Rf13635d10c9d4649"/>
+    <p:sldId xmlns:r="http://schemas.openxmlformats.org/officeDocument/2006/relationships" id="267" r:id="R789099c0e929465f"/>
+    <p:sldId xmlns:r="http://schemas.openxmlformats.org/officeDocument/2006/relationships" id="268" r:id="R8c00341e414f44eb"/>
+    <p:sldId xmlns:r="http://schemas.openxmlformats.org/officeDocument/2006/relationships" id="269" r:id="R7adf468101b140bb"/>
+    <p:sldId xmlns:r="http://schemas.openxmlformats.org/officeDocument/2006/relationships" id="270" r:id="R405117ffc34148e7"/>
+    <p:sldId xmlns:r="http://schemas.openxmlformats.org/officeDocument/2006/relationships" id="271" r:id="R1f1c9851d6cf4be1"/>
+    <p:sldId xmlns:r="http://schemas.openxmlformats.org/officeDocument/2006/relationships" id="272" r:id="R32ddaa29c8b74120"/>
+    <p:sldId xmlns:r="http://schemas.openxmlformats.org/officeDocument/2006/relationships" id="273" r:id="Rdc0874ce0cfd46d2"/>
   </p:sldIdLst>
   <p:sldSz cx="12192000" cy="6858000"/>
   <p:notesSz cx="6858000" cy="9144000"/>
@@ -540,6 +540,11 @@
           </a:p>
           <a:p xmlns:a="http://schemas.openxmlformats.org/drawingml/2006/main">
             <a:r>
+              <a:t>- https://rescuepoint.com.br/assets/img/logo.png</a:t>
+            </a:r>
+          </a:p>
+          <a:p xmlns:a="http://schemas.openxmlformats.org/drawingml/2006/main">
+            <a:r>
               <a:t>- https://github.com/AnselmoBorges/dbt-moderno-na-pratica/blob/main/roteiros/01-playlist-core-1-12.md</a:t>
             </a:r>
           </a:p>
@@ -705,6 +710,11 @@
           </a:p>
           <a:p xmlns:a="http://schemas.openxmlformats.org/drawingml/2006/main">
             <a:r>
+              <a:t>- https://rescuepoint.com.br/assets/img/logo.png</a:t>
+            </a:r>
+          </a:p>
+          <a:p xmlns:a="http://schemas.openxmlformats.org/drawingml/2006/main">
+            <a:r>
               <a:t>- https://github.com/AnselmoBorges/dbt-moderno-na-pratica/blob/main/roteiros/01-playlist-core-1-12.md</a:t>
             </a:r>
           </a:p>
@@ -870,6 +880,11 @@
           </a:p>
           <a:p xmlns:a="http://schemas.openxmlformats.org/drawingml/2006/main">
             <a:r>
+              <a:t>- https://rescuepoint.com.br/assets/img/logo.png</a:t>
+            </a:r>
+          </a:p>
+          <a:p xmlns:a="http://schemas.openxmlformats.org/drawingml/2006/main">
+            <a:r>
               <a:t>- https://github.com/AnselmoBorges/dbt-moderno-na-pratica/blob/main/roteiros/01-playlist-core-1-12.md</a:t>
             </a:r>
           </a:p>
@@ -1035,6 +1050,11 @@
           </a:p>
           <a:p xmlns:a="http://schemas.openxmlformats.org/drawingml/2006/main">
             <a:r>
+              <a:t>- https://rescuepoint.com.br/assets/img/logo.png</a:t>
+            </a:r>
+          </a:p>
+          <a:p xmlns:a="http://schemas.openxmlformats.org/drawingml/2006/main">
+            <a:r>
               <a:t>- https://github.com/AnselmoBorges/dbt-moderno-na-pratica/blob/main/roteiros/01-playlist-core-1-12.md</a:t>
             </a:r>
           </a:p>
@@ -1200,6 +1220,11 @@
           </a:p>
           <a:p xmlns:a="http://schemas.openxmlformats.org/drawingml/2006/main">
             <a:r>
+              <a:t>- https://rescuepoint.com.br/assets/img/logo.png</a:t>
+            </a:r>
+          </a:p>
+          <a:p xmlns:a="http://schemas.openxmlformats.org/drawingml/2006/main">
+            <a:r>
               <a:t>- https://github.com/AnselmoBorges/dbt-moderno-na-pratica/blob/main/roteiros/01-playlist-core-1-12.md</a:t>
             </a:r>
           </a:p>
@@ -1365,6 +1390,11 @@
           </a:p>
           <a:p xmlns:a="http://schemas.openxmlformats.org/drawingml/2006/main">
             <a:r>
+              <a:t>- https://rescuepoint.com.br/assets/img/logo.png</a:t>
+            </a:r>
+          </a:p>
+          <a:p xmlns:a="http://schemas.openxmlformats.org/drawingml/2006/main">
+            <a:r>
               <a:t>- https://github.com/AnselmoBorges/dbt-moderno-na-pratica/blob/main/roteiros/01-playlist-core-1-12.md</a:t>
             </a:r>
           </a:p>
@@ -1530,6 +1560,11 @@
           </a:p>
           <a:p xmlns:a="http://schemas.openxmlformats.org/drawingml/2006/main">
             <a:r>
+              <a:t>- https://rescuepoint.com.br/assets/img/logo.png</a:t>
+            </a:r>
+          </a:p>
+          <a:p xmlns:a="http://schemas.openxmlformats.org/drawingml/2006/main">
+            <a:r>
               <a:t>- https://github.com/AnselmoBorges/dbt-moderno-na-pratica/blob/main/roteiros/01-playlist-core-1-12.md</a:t>
             </a:r>
           </a:p>
@@ -1695,6 +1730,11 @@
           </a:p>
           <a:p xmlns:a="http://schemas.openxmlformats.org/drawingml/2006/main">
             <a:r>
+              <a:t>- https://rescuepoint.com.br/assets/img/logo.png</a:t>
+            </a:r>
+          </a:p>
+          <a:p xmlns:a="http://schemas.openxmlformats.org/drawingml/2006/main">
+            <a:r>
               <a:t>- https://github.com/AnselmoBorges/dbt-moderno-na-pratica/blob/main/roteiros/01-playlist-core-1-12.md</a:t>
             </a:r>
           </a:p>
@@ -1860,6 +1900,11 @@
           </a:p>
           <a:p xmlns:a="http://schemas.openxmlformats.org/drawingml/2006/main">
             <a:r>
+              <a:t>- https://rescuepoint.com.br/assets/img/logo.png</a:t>
+            </a:r>
+          </a:p>
+          <a:p xmlns:a="http://schemas.openxmlformats.org/drawingml/2006/main">
+            <a:r>
               <a:t>- https://github.com/AnselmoBorges/dbt-moderno-na-pratica/blob/main/roteiros/01-playlist-core-1-12.md</a:t>
             </a:r>
           </a:p>
@@ -2025,6 +2070,11 @@
           </a:p>
           <a:p xmlns:a="http://schemas.openxmlformats.org/drawingml/2006/main">
             <a:r>
+              <a:t>- https://rescuepoint.com.br/assets/img/logo.png</a:t>
+            </a:r>
+          </a:p>
+          <a:p xmlns:a="http://schemas.openxmlformats.org/drawingml/2006/main">
+            <a:r>
               <a:t>- https://github.com/AnselmoBorges/dbt-moderno-na-pratica/blob/main/roteiros/01-playlist-core-1-12.md</a:t>
             </a:r>
           </a:p>
@@ -2190,6 +2240,11 @@
           </a:p>
           <a:p xmlns:a="http://schemas.openxmlformats.org/drawingml/2006/main">
             <a:r>
+              <a:t>- https://rescuepoint.com.br/assets/img/logo.png</a:t>
+            </a:r>
+          </a:p>
+          <a:p xmlns:a="http://schemas.openxmlformats.org/drawingml/2006/main">
+            <a:r>
               <a:t>- https://github.com/AnselmoBorges/dbt-moderno-na-pratica/blob/main/roteiros/01-playlist-core-1-12.md</a:t>
             </a:r>
           </a:p>
@@ -2355,6 +2410,11 @@
           </a:p>
           <a:p xmlns:a="http://schemas.openxmlformats.org/drawingml/2006/main">
             <a:r>
+              <a:t>- https://rescuepoint.com.br/assets/img/logo.png</a:t>
+            </a:r>
+          </a:p>
+          <a:p xmlns:a="http://schemas.openxmlformats.org/drawingml/2006/main">
+            <a:r>
               <a:t>- https://github.com/AnselmoBorges/dbt-moderno-na-pratica/blob/main/roteiros/01-playlist-core-1-12.md</a:t>
             </a:r>
           </a:p>
@@ -2520,6 +2580,11 @@
           </a:p>
           <a:p xmlns:a="http://schemas.openxmlformats.org/drawingml/2006/main">
             <a:r>
+              <a:t>- https://rescuepoint.com.br/assets/img/logo.png</a:t>
+            </a:r>
+          </a:p>
+          <a:p xmlns:a="http://schemas.openxmlformats.org/drawingml/2006/main">
+            <a:r>
               <a:t>- https://github.com/AnselmoBorges/dbt-moderno-na-pratica/blob/main/roteiros/01-playlist-core-1-12.md</a:t>
             </a:r>
           </a:p>
@@ -2685,6 +2750,11 @@
           </a:p>
           <a:p xmlns:a="http://schemas.openxmlformats.org/drawingml/2006/main">
             <a:r>
+              <a:t>- https://rescuepoint.com.br/assets/img/logo.png</a:t>
+            </a:r>
+          </a:p>
+          <a:p xmlns:a="http://schemas.openxmlformats.org/drawingml/2006/main">
+            <a:r>
               <a:t>- https://github.com/AnselmoBorges/dbt-moderno-na-pratica/blob/main/roteiros/01-playlist-core-1-12.md</a:t>
             </a:r>
           </a:p>
@@ -2850,6 +2920,11 @@
           </a:p>
           <a:p xmlns:a="http://schemas.openxmlformats.org/drawingml/2006/main">
             <a:r>
+              <a:t>- https://rescuepoint.com.br/assets/img/logo.png</a:t>
+            </a:r>
+          </a:p>
+          <a:p xmlns:a="http://schemas.openxmlformats.org/drawingml/2006/main">
+            <a:r>
               <a:t>- https://github.com/AnselmoBorges/dbt-moderno-na-pratica/blob/main/roteiros/01-playlist-core-1-12.md</a:t>
             </a:r>
           </a:p>
@@ -3015,6 +3090,11 @@
           </a:p>
           <a:p xmlns:a="http://schemas.openxmlformats.org/drawingml/2006/main">
             <a:r>
+              <a:t>- https://rescuepoint.com.br/assets/img/logo.png</a:t>
+            </a:r>
+          </a:p>
+          <a:p xmlns:a="http://schemas.openxmlformats.org/drawingml/2006/main">
+            <a:r>
               <a:t>- https://github.com/AnselmoBorges/dbt-moderno-na-pratica/blob/main/roteiros/01-playlist-core-1-12.md</a:t>
             </a:r>
           </a:p>
@@ -3180,6 +3260,11 @@
           </a:p>
           <a:p xmlns:a="http://schemas.openxmlformats.org/drawingml/2006/main">
             <a:r>
+              <a:t>- https://rescuepoint.com.br/assets/img/logo.png</a:t>
+            </a:r>
+          </a:p>
+          <a:p xmlns:a="http://schemas.openxmlformats.org/drawingml/2006/main">
+            <a:r>
               <a:t>- https://github.com/AnselmoBorges/dbt-moderno-na-pratica/blob/main/roteiros/01-playlist-core-1-12.md</a:t>
             </a:r>
           </a:p>
@@ -3341,6 +3426,11 @@
           <a:p xmlns:a="http://schemas.openxmlformats.org/drawingml/2006/main">
             <a:r>
               <a:t>- https://github.com/dbt-labs/jaffle-shop</a:t>
+            </a:r>
+          </a:p>
+          <a:p xmlns:a="http://schemas.openxmlformats.org/drawingml/2006/main">
+            <a:r>
+              <a:t>- https://rescuepoint.com.br/assets/img/logo.png</a:t>
             </a:r>
           </a:p>
           <a:p xmlns:a="http://schemas.openxmlformats.org/drawingml/2006/main">
@@ -3462,7 +3552,7 @@
   </p:cSld>
   <p:clrMap bg1="lt1" tx1="dk1" bg2="lt2" tx2="dk2" accent1="accent1" accent2="accent2" accent3="accent3" accent4="accent4" accent5="accent5" accent6="accent6" hlink="hlink" folHlink="folHlink"/>
   <p:sldLayoutIdLst>
-    <p:sldLayoutId xmlns:r="http://schemas.openxmlformats.org/officeDocument/2006/relationships" id="2147483649" r:id="Rbfde7a11eb574f64"/>
+    <p:sldLayoutId xmlns:r="http://schemas.openxmlformats.org/officeDocument/2006/relationships" id="2147483649" r:id="Rdf5f3b1727a14172"/>
   </p:sldLayoutIdLst>
   <p:txStyles>
     <p:titleStyle>
@@ -3760,8 +3850,8 @@
   </p:cSld>
   <p:clrMap bg1="lt1" tx1="dk1" bg2="lt2" tx2="dk2" accent1="accent1" accent2="accent2" accent3="accent3" accent4="accent4" accent5="accent5" accent6="accent6" hlink="hlink" folHlink="folHlink"/>
   <p:sldLayoutIdLst>
-    <p:sldLayoutId xmlns:r="http://schemas.openxmlformats.org/officeDocument/2006/relationships" id="2147483651" r:id="R6a8ea53d954a4495"/>
-    <p:sldLayoutId xmlns:r="http://schemas.openxmlformats.org/officeDocument/2006/relationships" id="2147483652" r:id="R4415f1df95154802"/>
+    <p:sldLayoutId xmlns:r="http://schemas.openxmlformats.org/officeDocument/2006/relationships" id="2147483651" r:id="R9decf20baec541cb"/>
+    <p:sldLayoutId xmlns:r="http://schemas.openxmlformats.org/officeDocument/2006/relationships" id="2147483652" r:id="R742376db21904e2b"/>
   </p:sldLayoutIdLst>
 </p:sldMaster>
 </file>
@@ -4285,14 +4375,14 @@
       </p:grpSpPr>
       <p:pic>
         <p:nvPicPr>
-          <p:cNvPr id="10" name="" descr="Ilustração conceitual autoral da capa: EPISÓDIO 1 — O que a série ensinou — e o que falta provar."/>
+          <p:cNvPr id="13" name="" descr="Ilustração conceitual autoral da capa: EPISÓDIO 1 — O que a série ensinou — e o que falta provar."/>
           <p:cNvPicPr>
             <a:picLocks xmlns:a="http://schemas.openxmlformats.org/drawingml/2006/main" noChangeAspect="1"/>
           </p:cNvPicPr>
           <p:nvPr/>
         </p:nvPicPr>
         <p:blipFill>
-          <a:blip xmlns:r="http://schemas.openxmlformats.org/officeDocument/2006/relationships" xmlns:a="http://schemas.openxmlformats.org/drawingml/2006/main" r:embed="Ra9938da19ced4ee7"/>
+          <a:blip xmlns:r="http://schemas.openxmlformats.org/officeDocument/2006/relationships" xmlns:a="http://schemas.openxmlformats.org/drawingml/2006/main" r:embed="R82e4eba921ff4481"/>
           <a:srcRect xmlns:a="http://schemas.openxmlformats.org/drawingml/2006/main" l="19785" t="0" r="19785" b="0"/>
           <a:stretch xmlns:a="http://schemas.openxmlformats.org/drawingml/2006/main">
             <a:fillRect l="0" t="0" r="0" b="0"/>
@@ -4313,7 +4403,7 @@
           <p:cNvPr id="2" name="cover-text-surface">
             <a:extLst xmlns:a="http://schemas.openxmlformats.org/drawingml/2006/main">
               <a:ext uri="{FF2B5EF4-FFF2-40B4-BE49-F238E27FC236}">
-                <a16:creationId xmlns:a16="http://schemas.microsoft.com/office/drawing/2014/main" id="{08652581-E0EE-4627-829F-2F5285587CDD}"/>
+                <a16:creationId xmlns:a16="http://schemas.microsoft.com/office/drawing/2014/main" id="{B8057810-D13A-4A05-A053-AFB43BFF0BC6}"/>
               </a:ext>
             </a:extLst>
           </p:cNvPr>
@@ -4346,7 +4436,7 @@
           <p:cNvPr id="3" name="cover-divider">
             <a:extLst xmlns:a="http://schemas.openxmlformats.org/drawingml/2006/main">
               <a:ext uri="{FF2B5EF4-FFF2-40B4-BE49-F238E27FC236}">
-                <a16:creationId xmlns:a16="http://schemas.microsoft.com/office/drawing/2014/main" id="{3D3BFC69-D0DB-47B6-B83F-C1E004A6A8A3}"/>
+                <a16:creationId xmlns:a16="http://schemas.microsoft.com/office/drawing/2014/main" id="{C3882C53-A823-4373-895A-D139353A1F93}"/>
               </a:ext>
             </a:extLst>
           </p:cNvPr>
@@ -4377,7 +4467,7 @@
           <p:cNvPr id="4" name="cover-episode">
             <a:extLst xmlns:a="http://schemas.openxmlformats.org/drawingml/2006/main">
               <a:ext uri="{FF2B5EF4-FFF2-40B4-BE49-F238E27FC236}">
-                <a16:creationId xmlns:a16="http://schemas.microsoft.com/office/drawing/2014/main" id="{22D39ED4-7D1A-44DA-BE32-1CB043F33BC9}"/>
+                <a16:creationId xmlns:a16="http://schemas.microsoft.com/office/drawing/2014/main" id="{FECCD1FE-8E7D-48E1-8D89-310BC9A2AB73}"/>
               </a:ext>
             </a:extLst>
           </p:cNvPr>
@@ -4425,10 +4515,69 @@
       </p:sp>
       <p:sp>
         <p:nvSpPr>
-          <p:cNvPr id="5" name="cover-title">
-            <a:extLst xmlns:a="http://schemas.openxmlformats.org/drawingml/2006/main">
-              <a:ext uri="{FF2B5EF4-FFF2-40B4-BE49-F238E27FC236}">
-                <a16:creationId xmlns:a16="http://schemas.microsoft.com/office/drawing/2014/main" id="{B5265BD6-204C-4D4E-B8CF-AB5CDAE62057}"/>
+          <p:cNvPr id="5" name="rescue-point-logo-background">
+            <a:extLst xmlns:a="http://schemas.openxmlformats.org/drawingml/2006/main">
+              <a:ext uri="{FF2B5EF4-FFF2-40B4-BE49-F238E27FC236}">
+                <a16:creationId xmlns:a16="http://schemas.microsoft.com/office/drawing/2014/main" id="{5619C17E-0E02-4806-9C65-D7002B09615C}"/>
+              </a:ext>
+            </a:extLst>
+          </p:cNvPr>
+          <p:cNvSpPr>
+            <a:spLocks xmlns:a="http://schemas.openxmlformats.org/drawingml/2006/main" noGrp="1"/>
+          </p:cNvSpPr>
+          <p:nvPr/>
+        </p:nvSpPr>
+        <p:spPr>
+          <a:xfrm xmlns:a="http://schemas.openxmlformats.org/drawingml/2006/main">
+            <a:off x="9772650" y="133350"/>
+            <a:ext cx="1733550" cy="457200"/>
+          </a:xfrm>
+          <a:prstGeom xmlns:a="http://schemas.openxmlformats.org/drawingml/2006/main" prst="roundRect">
+            <a:avLst>
+              <a:gd name="adj" fmla="val 16667"/>
+            </a:avLst>
+          </a:prstGeom>
+          <a:solidFill xmlns:a="http://schemas.openxmlformats.org/drawingml/2006/main">
+            <a:srgbClr val="06142E"/>
+          </a:solidFill>
+          <a:ln xmlns:a="http://schemas.openxmlformats.org/drawingml/2006/main" w="9525">
+            <a:solidFill>
+              <a:srgbClr val="1EC5FF">
+                <a:alpha val="33333"/>
+              </a:srgbClr>
+            </a:solidFill>
+            <a:prstDash val="solid"/>
+          </a:ln>
+        </p:spPr>
+      </p:sp>
+      <p:pic>
+        <p:nvPicPr>
+          <p:cNvPr id="18" name="" descr="Ilustração conceitual autoral da capa: EPISÓDIO 1 — O que a série ensinou — e o que falta provar."/>
+          <p:cNvPicPr>
+            <a:picLocks xmlns:a="http://schemas.openxmlformats.org/drawingml/2006/main" noChangeAspect="1"/>
+          </p:cNvPicPr>
+          <p:nvPr/>
+        </p:nvPicPr>
+        <p:blipFill>
+          <a:blip xmlns:r="http://schemas.openxmlformats.org/officeDocument/2006/relationships" xmlns:a="http://schemas.openxmlformats.org/drawingml/2006/main" r:embed="R9a5f371d510b4676"/>
+          <a:stretch xmlns:a="http://schemas.openxmlformats.org/drawingml/2006/main"/>
+        </p:blipFill>
+        <p:spPr>
+          <a:xfrm xmlns:a="http://schemas.openxmlformats.org/drawingml/2006/main">
+            <a:off x="9893718" y="209550"/>
+            <a:ext cx="1491414" cy="323850"/>
+          </a:xfrm>
+          <a:prstGeom xmlns:a="http://schemas.openxmlformats.org/drawingml/2006/main" prst="rect">
+            <a:avLst/>
+          </a:prstGeom>
+        </p:spPr>
+      </p:pic>
+      <p:sp>
+        <p:nvSpPr>
+          <p:cNvPr id="7" name="cover-title">
+            <a:extLst xmlns:a="http://schemas.openxmlformats.org/drawingml/2006/main">
+              <a:ext uri="{FF2B5EF4-FFF2-40B4-BE49-F238E27FC236}">
+                <a16:creationId xmlns:a16="http://schemas.microsoft.com/office/drawing/2014/main" id="{F284D0E2-2610-4BE4-98D8-0FE54BA13CB5}"/>
               </a:ext>
             </a:extLst>
           </p:cNvPr>
@@ -4476,10 +4625,10 @@
       </p:sp>
       <p:sp>
         <p:nvSpPr>
-          <p:cNvPr id="6" name="cover-subtitle">
-            <a:extLst xmlns:a="http://schemas.openxmlformats.org/drawingml/2006/main">
-              <a:ext uri="{FF2B5EF4-FFF2-40B4-BE49-F238E27FC236}">
-                <a16:creationId xmlns:a16="http://schemas.microsoft.com/office/drawing/2014/main" id="{D0828FC4-8856-4475-A8CF-3B3F91AA7DF5}"/>
+          <p:cNvPr id="8" name="cover-subtitle">
+            <a:extLst xmlns:a="http://schemas.openxmlformats.org/drawingml/2006/main">
+              <a:ext uri="{FF2B5EF4-FFF2-40B4-BE49-F238E27FC236}">
+                <a16:creationId xmlns:a16="http://schemas.microsoft.com/office/drawing/2014/main" id="{BE572F2C-D506-4416-945F-7F864F108D11}"/>
               </a:ext>
             </a:extLst>
           </p:cNvPr>
@@ -4527,10 +4676,10 @@
       </p:sp>
       <p:sp>
         <p:nvSpPr>
-          <p:cNvPr id="7" name="cover-accent">
-            <a:extLst xmlns:a="http://schemas.openxmlformats.org/drawingml/2006/main">
-              <a:ext uri="{FF2B5EF4-FFF2-40B4-BE49-F238E27FC236}">
-                <a16:creationId xmlns:a16="http://schemas.microsoft.com/office/drawing/2014/main" id="{89EDE453-4402-476A-A555-2ADEE0A3718B}"/>
+          <p:cNvPr id="9" name="cover-accent">
+            <a:extLst xmlns:a="http://schemas.openxmlformats.org/drawingml/2006/main">
+              <a:ext uri="{FF2B5EF4-FFF2-40B4-BE49-F238E27FC236}">
+                <a16:creationId xmlns:a16="http://schemas.microsoft.com/office/drawing/2014/main" id="{39EDADF8-2AEB-428A-85E0-27557B012788}"/>
               </a:ext>
             </a:extLst>
           </p:cNvPr>
@@ -4558,10 +4707,10 @@
       </p:sp>
       <p:sp>
         <p:nvSpPr>
-          <p:cNvPr id="8" name="cover-meta">
-            <a:extLst xmlns:a="http://schemas.openxmlformats.org/drawingml/2006/main">
-              <a:ext uri="{FF2B5EF4-FFF2-40B4-BE49-F238E27FC236}">
-                <a16:creationId xmlns:a16="http://schemas.microsoft.com/office/drawing/2014/main" id="{2DCD63F6-FE86-4EED-BAC2-F4B1EE0E679B}"/>
+          <p:cNvPr id="10" name="cover-meta">
+            <a:extLst xmlns:a="http://schemas.openxmlformats.org/drawingml/2006/main">
+              <a:ext uri="{FF2B5EF4-FFF2-40B4-BE49-F238E27FC236}">
+                <a16:creationId xmlns:a16="http://schemas.microsoft.com/office/drawing/2014/main" id="{408C5BF9-FF87-4B2D-A1F9-ACA829D746B9}"/>
               </a:ext>
             </a:extLst>
           </p:cNvPr>
@@ -4614,7 +4763,7 @@
     </p:spTree>
     <p:extLst>
       <p:ext uri="{BB962C8B-B14F-4D97-AF65-F5344CB8AC3E}">
-        <p14:creationId xmlns:p14="http://schemas.microsoft.com/office/powerpoint/2010/main" val="954494723"/>
+        <p14:creationId xmlns:p14="http://schemas.microsoft.com/office/powerpoint/2010/main" val="985194392"/>
       </p:ext>
     </p:extLst>
   </p:cSld>
@@ -4650,10 +4799,10 @@
       </p:grpSpPr>
       <p:sp>
         <p:nvSpPr>
-          <p:cNvPr id="11" name="slide-title">
-            <a:extLst xmlns:a="http://schemas.openxmlformats.org/drawingml/2006/main">
-              <a:ext uri="{FF2B5EF4-FFF2-40B4-BE49-F238E27FC236}">
-                <a16:creationId xmlns:a16="http://schemas.microsoft.com/office/drawing/2014/main" id="{02ED2318-E7FD-483C-992B-576DB461C444}"/>
+          <p:cNvPr id="13" name="slide-title">
+            <a:extLst xmlns:a="http://schemas.openxmlformats.org/drawingml/2006/main">
+              <a:ext uri="{FF2B5EF4-FFF2-40B4-BE49-F238E27FC236}">
+                <a16:creationId xmlns:a16="http://schemas.microsoft.com/office/drawing/2014/main" id="{4637B135-DB07-478C-A569-DB1224C7B025}"/>
               </a:ext>
             </a:extLst>
           </p:cNvPr>
@@ -4704,7 +4853,7 @@
           <p:cNvPr id="2" name="compare-left-title">
             <a:extLst xmlns:a="http://schemas.openxmlformats.org/drawingml/2006/main">
               <a:ext uri="{FF2B5EF4-FFF2-40B4-BE49-F238E27FC236}">
-                <a16:creationId xmlns:a16="http://schemas.microsoft.com/office/drawing/2014/main" id="{7E307FEE-22BE-4BAE-AAF0-E90E617AE534}"/>
+                <a16:creationId xmlns:a16="http://schemas.microsoft.com/office/drawing/2014/main" id="{5DEA19F0-5324-4591-8D11-DA61E7F5B2ED}"/>
               </a:ext>
             </a:extLst>
           </p:cNvPr>
@@ -4755,7 +4904,7 @@
           <p:cNvPr id="3" name="compare-right-title">
             <a:extLst xmlns:a="http://schemas.openxmlformats.org/drawingml/2006/main">
               <a:ext uri="{FF2B5EF4-FFF2-40B4-BE49-F238E27FC236}">
-                <a16:creationId xmlns:a16="http://schemas.microsoft.com/office/drawing/2014/main" id="{4AF8ED4F-1657-4060-A388-7AAFED16EE99}"/>
+                <a16:creationId xmlns:a16="http://schemas.microsoft.com/office/drawing/2014/main" id="{54921ED8-7806-4C85-970E-E4D9A2C725A4}"/>
               </a:ext>
             </a:extLst>
           </p:cNvPr>
@@ -4806,7 +4955,7 @@
           <p:cNvPr id="4" name="compare-divider">
             <a:extLst xmlns:a="http://schemas.openxmlformats.org/drawingml/2006/main">
               <a:ext uri="{FF2B5EF4-FFF2-40B4-BE49-F238E27FC236}">
-                <a16:creationId xmlns:a16="http://schemas.microsoft.com/office/drawing/2014/main" id="{083D674A-1E75-459D-99CA-92D083DAC592}"/>
+                <a16:creationId xmlns:a16="http://schemas.microsoft.com/office/drawing/2014/main" id="{3525253B-C36E-4C8B-9084-60CB7696F951}"/>
               </a:ext>
             </a:extLst>
           </p:cNvPr>
@@ -4839,7 +4988,7 @@
           <p:cNvPr id="5" name="bullets">
             <a:extLst xmlns:a="http://schemas.openxmlformats.org/drawingml/2006/main">
               <a:ext uri="{FF2B5EF4-FFF2-40B4-BE49-F238E27FC236}">
-                <a16:creationId xmlns:a16="http://schemas.microsoft.com/office/drawing/2014/main" id="{97971419-5693-4B38-AA71-7D63A65DB80A}"/>
+                <a16:creationId xmlns:a16="http://schemas.microsoft.com/office/drawing/2014/main" id="{DB1D3C19-DBEF-4350-B03C-DD7A033744D0}"/>
               </a:ext>
             </a:extLst>
           </p:cNvPr>
@@ -4908,7 +5057,7 @@
           <p:cNvPr id="6" name="bullets">
             <a:extLst xmlns:a="http://schemas.openxmlformats.org/drawingml/2006/main">
               <a:ext uri="{FF2B5EF4-FFF2-40B4-BE49-F238E27FC236}">
-                <a16:creationId xmlns:a16="http://schemas.microsoft.com/office/drawing/2014/main" id="{85A2F60F-3E08-4264-897D-C3FF971B660B}"/>
+                <a16:creationId xmlns:a16="http://schemas.microsoft.com/office/drawing/2014/main" id="{5F84ED39-AAB3-4110-9249-81CE1D42BD89}"/>
               </a:ext>
             </a:extLst>
           </p:cNvPr>
@@ -4959,7 +5108,7 @@
           <p:cNvPr id="7" name="eyebrow">
             <a:extLst xmlns:a="http://schemas.openxmlformats.org/drawingml/2006/main">
               <a:ext uri="{FF2B5EF4-FFF2-40B4-BE49-F238E27FC236}">
-                <a16:creationId xmlns:a16="http://schemas.microsoft.com/office/drawing/2014/main" id="{66DA61D3-D102-4E6F-8EC8-CB3EAA7AA75B}"/>
+                <a16:creationId xmlns:a16="http://schemas.microsoft.com/office/drawing/2014/main" id="{81642568-E238-4D8D-8360-8D7609937874}"/>
               </a:ext>
             </a:extLst>
           </p:cNvPr>
@@ -5007,10 +5156,69 @@
       </p:sp>
       <p:sp>
         <p:nvSpPr>
-          <p:cNvPr id="8" name="footer-rule">
-            <a:extLst xmlns:a="http://schemas.openxmlformats.org/drawingml/2006/main">
-              <a:ext uri="{FF2B5EF4-FFF2-40B4-BE49-F238E27FC236}">
-                <a16:creationId xmlns:a16="http://schemas.microsoft.com/office/drawing/2014/main" id="{1A4B5BBC-88F9-47AF-88E8-288E21763539}"/>
+          <p:cNvPr id="8" name="rescue-point-logo-background">
+            <a:extLst xmlns:a="http://schemas.openxmlformats.org/drawingml/2006/main">
+              <a:ext uri="{FF2B5EF4-FFF2-40B4-BE49-F238E27FC236}">
+                <a16:creationId xmlns:a16="http://schemas.microsoft.com/office/drawing/2014/main" id="{E27C254B-44B5-420D-BE08-54848304886E}"/>
+              </a:ext>
+            </a:extLst>
+          </p:cNvPr>
+          <p:cNvSpPr>
+            <a:spLocks xmlns:a="http://schemas.openxmlformats.org/drawingml/2006/main" noGrp="1"/>
+          </p:cNvSpPr>
+          <p:nvPr/>
+        </p:nvSpPr>
+        <p:spPr>
+          <a:xfrm xmlns:a="http://schemas.openxmlformats.org/drawingml/2006/main">
+            <a:off x="9772650" y="133350"/>
+            <a:ext cx="1733550" cy="457200"/>
+          </a:xfrm>
+          <a:prstGeom xmlns:a="http://schemas.openxmlformats.org/drawingml/2006/main" prst="roundRect">
+            <a:avLst>
+              <a:gd name="adj" fmla="val 16667"/>
+            </a:avLst>
+          </a:prstGeom>
+          <a:solidFill xmlns:a="http://schemas.openxmlformats.org/drawingml/2006/main">
+            <a:srgbClr val="06142E"/>
+          </a:solidFill>
+          <a:ln xmlns:a="http://schemas.openxmlformats.org/drawingml/2006/main" w="9525">
+            <a:solidFill>
+              <a:srgbClr val="1EC5FF">
+                <a:alpha val="33333"/>
+              </a:srgbClr>
+            </a:solidFill>
+            <a:prstDash val="solid"/>
+          </a:ln>
+        </p:spPr>
+      </p:sp>
+      <p:pic>
+        <p:nvPicPr>
+          <p:cNvPr id="23" name="" descr="Figura oficial da documentação dbt usada para explicar: Artifacts respondem perguntas diferentes — Build."/>
+          <p:cNvPicPr>
+            <a:picLocks xmlns:a="http://schemas.openxmlformats.org/drawingml/2006/main" noChangeAspect="1"/>
+          </p:cNvPicPr>
+          <p:nvPr/>
+        </p:nvPicPr>
+        <p:blipFill>
+          <a:blip xmlns:r="http://schemas.openxmlformats.org/officeDocument/2006/relationships" xmlns:a="http://schemas.openxmlformats.org/drawingml/2006/main" r:embed="Re1187c9f182e45e9"/>
+          <a:stretch xmlns:a="http://schemas.openxmlformats.org/drawingml/2006/main"/>
+        </p:blipFill>
+        <p:spPr>
+          <a:xfrm xmlns:a="http://schemas.openxmlformats.org/drawingml/2006/main">
+            <a:off x="9893718" y="209550"/>
+            <a:ext cx="1491414" cy="323850"/>
+          </a:xfrm>
+          <a:prstGeom xmlns:a="http://schemas.openxmlformats.org/drawingml/2006/main" prst="rect">
+            <a:avLst/>
+          </a:prstGeom>
+        </p:spPr>
+      </p:pic>
+      <p:sp>
+        <p:nvSpPr>
+          <p:cNvPr id="10" name="footer-rule">
+            <a:extLst xmlns:a="http://schemas.openxmlformats.org/drawingml/2006/main">
+              <a:ext uri="{FF2B5EF4-FFF2-40B4-BE49-F238E27FC236}">
+                <a16:creationId xmlns:a16="http://schemas.microsoft.com/office/drawing/2014/main" id="{6B3582A3-2F8A-4FBF-9BD1-29B6ADD4F1D0}"/>
               </a:ext>
             </a:extLst>
           </p:cNvPr>
@@ -5040,10 +5248,10 @@
       </p:sp>
       <p:sp>
         <p:nvSpPr>
-          <p:cNvPr id="9" name="footer">
-            <a:extLst xmlns:a="http://schemas.openxmlformats.org/drawingml/2006/main">
-              <a:ext uri="{FF2B5EF4-FFF2-40B4-BE49-F238E27FC236}">
-                <a16:creationId xmlns:a16="http://schemas.microsoft.com/office/drawing/2014/main" id="{76423EBC-BE68-4A2D-9783-5E8A1EE144F8}"/>
+          <p:cNvPr id="11" name="footer">
+            <a:extLst xmlns:a="http://schemas.openxmlformats.org/drawingml/2006/main">
+              <a:ext uri="{FF2B5EF4-FFF2-40B4-BE49-F238E27FC236}">
+                <a16:creationId xmlns:a16="http://schemas.microsoft.com/office/drawing/2014/main" id="{CDEBFE09-2C1B-400D-900A-50B6F310BF5A}"/>
               </a:ext>
             </a:extLst>
           </p:cNvPr>
@@ -5095,10 +5303,10 @@
       </p:sp>
       <p:sp>
         <p:nvSpPr>
-          <p:cNvPr id="10" name="page-number">
-            <a:extLst xmlns:a="http://schemas.openxmlformats.org/drawingml/2006/main">
-              <a:ext uri="{FF2B5EF4-FFF2-40B4-BE49-F238E27FC236}">
-                <a16:creationId xmlns:a16="http://schemas.microsoft.com/office/drawing/2014/main" id="{E22BF9BE-4361-48C0-B087-A93260A7EA50}"/>
+          <p:cNvPr id="12" name="page-number">
+            <a:extLst xmlns:a="http://schemas.openxmlformats.org/drawingml/2006/main">
+              <a:ext uri="{FF2B5EF4-FFF2-40B4-BE49-F238E27FC236}">
+                <a16:creationId xmlns:a16="http://schemas.microsoft.com/office/drawing/2014/main" id="{49B506F9-0205-40C8-A31D-77C8D357D73A}"/>
               </a:ext>
             </a:extLst>
           </p:cNvPr>
@@ -5151,7 +5359,7 @@
     </p:spTree>
     <p:extLst>
       <p:ext uri="{BB962C8B-B14F-4D97-AF65-F5344CB8AC3E}">
-        <p14:creationId xmlns:p14="http://schemas.microsoft.com/office/powerpoint/2010/main" val="722200293"/>
+        <p14:creationId xmlns:p14="http://schemas.microsoft.com/office/powerpoint/2010/main" val="1895795855"/>
       </p:ext>
     </p:extLst>
   </p:cSld>
@@ -5187,10 +5395,10 @@
       </p:grpSpPr>
       <p:sp>
         <p:nvSpPr>
-          <p:cNvPr id="9" name="slide-title">
-            <a:extLst xmlns:a="http://schemas.openxmlformats.org/drawingml/2006/main">
-              <a:ext uri="{FF2B5EF4-FFF2-40B4-BE49-F238E27FC236}">
-                <a16:creationId xmlns:a16="http://schemas.microsoft.com/office/drawing/2014/main" id="{3920C7D5-F325-46AC-8493-EEBD86B750A4}"/>
+          <p:cNvPr id="11" name="slide-title">
+            <a:extLst xmlns:a="http://schemas.openxmlformats.org/drawingml/2006/main">
+              <a:ext uri="{FF2B5EF4-FFF2-40B4-BE49-F238E27FC236}">
+                <a16:creationId xmlns:a16="http://schemas.microsoft.com/office/drawing/2014/main" id="{C458D6FA-A148-4EC5-91BA-3277B66CD5A1}"/>
               </a:ext>
             </a:extLst>
           </p:cNvPr>
@@ -5241,7 +5449,7 @@
           <p:cNvPr id="2" name="code-surface">
             <a:extLst xmlns:a="http://schemas.openxmlformats.org/drawingml/2006/main">
               <a:ext uri="{FF2B5EF4-FFF2-40B4-BE49-F238E27FC236}">
-                <a16:creationId xmlns:a16="http://schemas.microsoft.com/office/drawing/2014/main" id="{0C1D5F67-68BD-4385-A6A5-016021ACDC2F}"/>
+                <a16:creationId xmlns:a16="http://schemas.microsoft.com/office/drawing/2014/main" id="{06BAADCB-98CA-495E-8753-CE5FAFF7AD4C}"/>
               </a:ext>
             </a:extLst>
           </p:cNvPr>
@@ -5276,7 +5484,7 @@
           <p:cNvPr id="3" name="command">
             <a:extLst xmlns:a="http://schemas.openxmlformats.org/drawingml/2006/main">
               <a:ext uri="{FF2B5EF4-FFF2-40B4-BE49-F238E27FC236}">
-                <a16:creationId xmlns:a16="http://schemas.microsoft.com/office/drawing/2014/main" id="{CBBE08DE-23FD-4A96-AFA7-5B20BD6B2BCB}"/>
+                <a16:creationId xmlns:a16="http://schemas.microsoft.com/office/drawing/2014/main" id="{E5382439-A46B-4C66-B5E1-FC3B20EDE4F6}"/>
               </a:ext>
             </a:extLst>
           </p:cNvPr>
@@ -5327,7 +5535,7 @@
           <p:cNvPr id="4" name="command-help">
             <a:extLst xmlns:a="http://schemas.openxmlformats.org/drawingml/2006/main">
               <a:ext uri="{FF2B5EF4-FFF2-40B4-BE49-F238E27FC236}">
-                <a16:creationId xmlns:a16="http://schemas.microsoft.com/office/drawing/2014/main" id="{C95E398B-750A-477C-AFAF-8CE0611D77BF}"/>
+                <a16:creationId xmlns:a16="http://schemas.microsoft.com/office/drawing/2014/main" id="{E7D6BD59-9F55-4906-96CB-655F38EB3C70}"/>
               </a:ext>
             </a:extLst>
           </p:cNvPr>
@@ -5378,7 +5586,7 @@
           <p:cNvPr id="5" name="eyebrow">
             <a:extLst xmlns:a="http://schemas.openxmlformats.org/drawingml/2006/main">
               <a:ext uri="{FF2B5EF4-FFF2-40B4-BE49-F238E27FC236}">
-                <a16:creationId xmlns:a16="http://schemas.microsoft.com/office/drawing/2014/main" id="{87125C4A-C9BF-45CF-AA18-04288C0ABF3E}"/>
+                <a16:creationId xmlns:a16="http://schemas.microsoft.com/office/drawing/2014/main" id="{AD550D71-6DFA-480A-8F68-C537574AFBB8}"/>
               </a:ext>
             </a:extLst>
           </p:cNvPr>
@@ -5426,10 +5634,69 @@
       </p:sp>
       <p:sp>
         <p:nvSpPr>
-          <p:cNvPr id="6" name="footer-rule">
-            <a:extLst xmlns:a="http://schemas.openxmlformats.org/drawingml/2006/main">
-              <a:ext uri="{FF2B5EF4-FFF2-40B4-BE49-F238E27FC236}">
-                <a16:creationId xmlns:a16="http://schemas.microsoft.com/office/drawing/2014/main" id="{1F7D096B-0592-4D78-873F-E87233B53D7B}"/>
+          <p:cNvPr id="6" name="rescue-point-logo-background">
+            <a:extLst xmlns:a="http://schemas.openxmlformats.org/drawingml/2006/main">
+              <a:ext uri="{FF2B5EF4-FFF2-40B4-BE49-F238E27FC236}">
+                <a16:creationId xmlns:a16="http://schemas.microsoft.com/office/drawing/2014/main" id="{F8B64D3A-DCC4-45AA-BEB3-6C2DB5CC471C}"/>
+              </a:ext>
+            </a:extLst>
+          </p:cNvPr>
+          <p:cNvSpPr>
+            <a:spLocks xmlns:a="http://schemas.openxmlformats.org/drawingml/2006/main" noGrp="1"/>
+          </p:cNvSpPr>
+          <p:nvPr/>
+        </p:nvSpPr>
+        <p:spPr>
+          <a:xfrm xmlns:a="http://schemas.openxmlformats.org/drawingml/2006/main">
+            <a:off x="9772650" y="133350"/>
+            <a:ext cx="1733550" cy="457200"/>
+          </a:xfrm>
+          <a:prstGeom xmlns:a="http://schemas.openxmlformats.org/drawingml/2006/main" prst="roundRect">
+            <a:avLst>
+              <a:gd name="adj" fmla="val 16667"/>
+            </a:avLst>
+          </a:prstGeom>
+          <a:solidFill xmlns:a="http://schemas.openxmlformats.org/drawingml/2006/main">
+            <a:srgbClr val="06142E"/>
+          </a:solidFill>
+          <a:ln xmlns:a="http://schemas.openxmlformats.org/drawingml/2006/main" w="9525">
+            <a:solidFill>
+              <a:srgbClr val="1EC5FF">
+                <a:alpha val="33333"/>
+              </a:srgbClr>
+            </a:solidFill>
+            <a:prstDash val="solid"/>
+          </a:ln>
+        </p:spPr>
+      </p:sp>
+      <p:pic>
+        <p:nvPicPr>
+          <p:cNvPr id="19" name="" descr="Figura oficial da documentação dbt usada para explicar: Demonstração — execute — python course.py checkpoint 01."/>
+          <p:cNvPicPr>
+            <a:picLocks xmlns:a="http://schemas.openxmlformats.org/drawingml/2006/main" noChangeAspect="1"/>
+          </p:cNvPicPr>
+          <p:nvPr/>
+        </p:nvPicPr>
+        <p:blipFill>
+          <a:blip xmlns:r="http://schemas.openxmlformats.org/officeDocument/2006/relationships" xmlns:a="http://schemas.openxmlformats.org/drawingml/2006/main" r:embed="R38f768bf295c4807"/>
+          <a:stretch xmlns:a="http://schemas.openxmlformats.org/drawingml/2006/main"/>
+        </p:blipFill>
+        <p:spPr>
+          <a:xfrm xmlns:a="http://schemas.openxmlformats.org/drawingml/2006/main">
+            <a:off x="9893718" y="209550"/>
+            <a:ext cx="1491414" cy="323850"/>
+          </a:xfrm>
+          <a:prstGeom xmlns:a="http://schemas.openxmlformats.org/drawingml/2006/main" prst="rect">
+            <a:avLst/>
+          </a:prstGeom>
+        </p:spPr>
+      </p:pic>
+      <p:sp>
+        <p:nvSpPr>
+          <p:cNvPr id="8" name="footer-rule">
+            <a:extLst xmlns:a="http://schemas.openxmlformats.org/drawingml/2006/main">
+              <a:ext uri="{FF2B5EF4-FFF2-40B4-BE49-F238E27FC236}">
+                <a16:creationId xmlns:a16="http://schemas.microsoft.com/office/drawing/2014/main" id="{25064239-715A-460E-A716-64FEFBA17E4F}"/>
               </a:ext>
             </a:extLst>
           </p:cNvPr>
@@ -5459,10 +5726,10 @@
       </p:sp>
       <p:sp>
         <p:nvSpPr>
-          <p:cNvPr id="7" name="footer">
-            <a:extLst xmlns:a="http://schemas.openxmlformats.org/drawingml/2006/main">
-              <a:ext uri="{FF2B5EF4-FFF2-40B4-BE49-F238E27FC236}">
-                <a16:creationId xmlns:a16="http://schemas.microsoft.com/office/drawing/2014/main" id="{CCA4FC4E-7E2D-447F-B1DA-81E1BF156DD9}"/>
+          <p:cNvPr id="9" name="footer">
+            <a:extLst xmlns:a="http://schemas.openxmlformats.org/drawingml/2006/main">
+              <a:ext uri="{FF2B5EF4-FFF2-40B4-BE49-F238E27FC236}">
+                <a16:creationId xmlns:a16="http://schemas.microsoft.com/office/drawing/2014/main" id="{19305EC5-257B-4F4C-8E63-064D4EBFB634}"/>
               </a:ext>
             </a:extLst>
           </p:cNvPr>
@@ -5514,10 +5781,10 @@
       </p:sp>
       <p:sp>
         <p:nvSpPr>
-          <p:cNvPr id="8" name="page-number">
-            <a:extLst xmlns:a="http://schemas.openxmlformats.org/drawingml/2006/main">
-              <a:ext uri="{FF2B5EF4-FFF2-40B4-BE49-F238E27FC236}">
-                <a16:creationId xmlns:a16="http://schemas.microsoft.com/office/drawing/2014/main" id="{A0757FCB-C1D5-422C-ABC4-9620CDD4AA68}"/>
+          <p:cNvPr id="10" name="page-number">
+            <a:extLst xmlns:a="http://schemas.openxmlformats.org/drawingml/2006/main">
+              <a:ext uri="{FF2B5EF4-FFF2-40B4-BE49-F238E27FC236}">
+                <a16:creationId xmlns:a16="http://schemas.microsoft.com/office/drawing/2014/main" id="{73F64778-6C7B-4131-86ED-B791B6294476}"/>
               </a:ext>
             </a:extLst>
           </p:cNvPr>
@@ -5570,7 +5837,7 @@
     </p:spTree>
     <p:extLst>
       <p:ext uri="{BB962C8B-B14F-4D97-AF65-F5344CB8AC3E}">
-        <p14:creationId xmlns:p14="http://schemas.microsoft.com/office/powerpoint/2010/main" val="1101685973"/>
+        <p14:creationId xmlns:p14="http://schemas.microsoft.com/office/powerpoint/2010/main" val="1251463575"/>
       </p:ext>
     </p:extLst>
   </p:cSld>
@@ -5598,10 +5865,10 @@
       </p:grpSpPr>
       <p:sp>
         <p:nvSpPr>
-          <p:cNvPr id="14" name="slide-title">
-            <a:extLst xmlns:a="http://schemas.openxmlformats.org/drawingml/2006/main">
-              <a:ext uri="{FF2B5EF4-FFF2-40B4-BE49-F238E27FC236}">
-                <a16:creationId xmlns:a16="http://schemas.microsoft.com/office/drawing/2014/main" id="{324F1E5F-FCF2-4423-B44A-6A758DF9CDD9}"/>
+          <p:cNvPr id="16" name="slide-title">
+            <a:extLst xmlns:a="http://schemas.openxmlformats.org/drawingml/2006/main">
+              <a:ext uri="{FF2B5EF4-FFF2-40B4-BE49-F238E27FC236}">
+                <a16:creationId xmlns:a16="http://schemas.microsoft.com/office/drawing/2014/main" id="{66C61B02-A1DC-4A06-82E9-0785044EC02C}"/>
               </a:ext>
             </a:extLst>
           </p:cNvPr>
@@ -5652,7 +5919,7 @@
           <p:cNvPr id="2" name="step-num-1">
             <a:extLst xmlns:a="http://schemas.openxmlformats.org/drawingml/2006/main">
               <a:ext uri="{FF2B5EF4-FFF2-40B4-BE49-F238E27FC236}">
-                <a16:creationId xmlns:a16="http://schemas.microsoft.com/office/drawing/2014/main" id="{4560EB09-4031-4869-8CBD-9E1FBF762788}"/>
+                <a16:creationId xmlns:a16="http://schemas.microsoft.com/office/drawing/2014/main" id="{E9792289-E1EA-47F5-BAA8-9CFB4D6AB8CF}"/>
               </a:ext>
             </a:extLst>
           </p:cNvPr>
@@ -5703,7 +5970,7 @@
           <p:cNvPr id="3" name="step-label-1">
             <a:extLst xmlns:a="http://schemas.openxmlformats.org/drawingml/2006/main">
               <a:ext uri="{FF2B5EF4-FFF2-40B4-BE49-F238E27FC236}">
-                <a16:creationId xmlns:a16="http://schemas.microsoft.com/office/drawing/2014/main" id="{F0D50119-DE66-4168-9A2E-3B18A14FB06B}"/>
+                <a16:creationId xmlns:a16="http://schemas.microsoft.com/office/drawing/2014/main" id="{2C0E5915-12E2-4C39-96B3-47A0D3652628}"/>
               </a:ext>
             </a:extLst>
           </p:cNvPr>
@@ -5754,7 +6021,7 @@
           <p:cNvPr id="4" name="step-line-1">
             <a:extLst xmlns:a="http://schemas.openxmlformats.org/drawingml/2006/main">
               <a:ext uri="{FF2B5EF4-FFF2-40B4-BE49-F238E27FC236}">
-                <a16:creationId xmlns:a16="http://schemas.microsoft.com/office/drawing/2014/main" id="{C364F7EF-FC5D-42FA-B011-B2140D17DC0A}"/>
+                <a16:creationId xmlns:a16="http://schemas.microsoft.com/office/drawing/2014/main" id="{0ADDF578-7AC6-4CBF-B221-30643627B0E9}"/>
               </a:ext>
             </a:extLst>
           </p:cNvPr>
@@ -5785,7 +6052,7 @@
           <p:cNvPr id="5" name="step-num-2">
             <a:extLst xmlns:a="http://schemas.openxmlformats.org/drawingml/2006/main">
               <a:ext uri="{FF2B5EF4-FFF2-40B4-BE49-F238E27FC236}">
-                <a16:creationId xmlns:a16="http://schemas.microsoft.com/office/drawing/2014/main" id="{D965E932-8132-4823-8AC3-851163C2841A}"/>
+                <a16:creationId xmlns:a16="http://schemas.microsoft.com/office/drawing/2014/main" id="{B3FB86FD-7AD5-4193-A7E9-7C94F4F2EB97}"/>
               </a:ext>
             </a:extLst>
           </p:cNvPr>
@@ -5836,7 +6103,7 @@
           <p:cNvPr id="6" name="step-label-2">
             <a:extLst xmlns:a="http://schemas.openxmlformats.org/drawingml/2006/main">
               <a:ext uri="{FF2B5EF4-FFF2-40B4-BE49-F238E27FC236}">
-                <a16:creationId xmlns:a16="http://schemas.microsoft.com/office/drawing/2014/main" id="{9B74DDDE-2270-4059-BE6A-D2858F23463D}"/>
+                <a16:creationId xmlns:a16="http://schemas.microsoft.com/office/drawing/2014/main" id="{04E94F52-C124-457C-ADB7-949A4C069601}"/>
               </a:ext>
             </a:extLst>
           </p:cNvPr>
@@ -5887,7 +6154,7 @@
           <p:cNvPr id="7" name="step-line-2">
             <a:extLst xmlns:a="http://schemas.openxmlformats.org/drawingml/2006/main">
               <a:ext uri="{FF2B5EF4-FFF2-40B4-BE49-F238E27FC236}">
-                <a16:creationId xmlns:a16="http://schemas.microsoft.com/office/drawing/2014/main" id="{9232820C-66EF-435B-B258-02195F66271C}"/>
+                <a16:creationId xmlns:a16="http://schemas.microsoft.com/office/drawing/2014/main" id="{3BB1A19A-0E9B-41DB-9A70-8B4E8082BA91}"/>
               </a:ext>
             </a:extLst>
           </p:cNvPr>
@@ -5918,7 +6185,7 @@
           <p:cNvPr id="8" name="step-num-3">
             <a:extLst xmlns:a="http://schemas.openxmlformats.org/drawingml/2006/main">
               <a:ext uri="{FF2B5EF4-FFF2-40B4-BE49-F238E27FC236}">
-                <a16:creationId xmlns:a16="http://schemas.microsoft.com/office/drawing/2014/main" id="{38CA152F-7C3C-4DD3-BC3B-02AB84499100}"/>
+                <a16:creationId xmlns:a16="http://schemas.microsoft.com/office/drawing/2014/main" id="{11632C64-536B-4502-AA69-EB059BEFF8D6}"/>
               </a:ext>
             </a:extLst>
           </p:cNvPr>
@@ -5969,7 +6236,7 @@
           <p:cNvPr id="9" name="step-label-3">
             <a:extLst xmlns:a="http://schemas.openxmlformats.org/drawingml/2006/main">
               <a:ext uri="{FF2B5EF4-FFF2-40B4-BE49-F238E27FC236}">
-                <a16:creationId xmlns:a16="http://schemas.microsoft.com/office/drawing/2014/main" id="{2C860EA0-025F-4C49-8A87-D5B85E655B29}"/>
+                <a16:creationId xmlns:a16="http://schemas.microsoft.com/office/drawing/2014/main" id="{740C0B53-01B5-4EA3-B2CC-B4BD85B96041}"/>
               </a:ext>
             </a:extLst>
           </p:cNvPr>
@@ -6020,7 +6287,7 @@
           <p:cNvPr id="10" name="eyebrow">
             <a:extLst xmlns:a="http://schemas.openxmlformats.org/drawingml/2006/main">
               <a:ext uri="{FF2B5EF4-FFF2-40B4-BE49-F238E27FC236}">
-                <a16:creationId xmlns:a16="http://schemas.microsoft.com/office/drawing/2014/main" id="{E2BF2234-BCE9-424E-9CE7-C5E45DD247F5}"/>
+                <a16:creationId xmlns:a16="http://schemas.microsoft.com/office/drawing/2014/main" id="{318F07E4-05A0-42B5-8B68-AB662FDCA592}"/>
               </a:ext>
             </a:extLst>
           </p:cNvPr>
@@ -6068,10 +6335,69 @@
       </p:sp>
       <p:sp>
         <p:nvSpPr>
-          <p:cNvPr id="11" name="footer-rule">
-            <a:extLst xmlns:a="http://schemas.openxmlformats.org/drawingml/2006/main">
-              <a:ext uri="{FF2B5EF4-FFF2-40B4-BE49-F238E27FC236}">
-                <a16:creationId xmlns:a16="http://schemas.microsoft.com/office/drawing/2014/main" id="{A2CCF2BA-F53E-40AB-8E47-64BE3FF59708}"/>
+          <p:cNvPr id="11" name="rescue-point-logo-background">
+            <a:extLst xmlns:a="http://schemas.openxmlformats.org/drawingml/2006/main">
+              <a:ext uri="{FF2B5EF4-FFF2-40B4-BE49-F238E27FC236}">
+                <a16:creationId xmlns:a16="http://schemas.microsoft.com/office/drawing/2014/main" id="{154451FB-2793-4ECE-9241-A91DD4EEB9E1}"/>
+              </a:ext>
+            </a:extLst>
+          </p:cNvPr>
+          <p:cNvSpPr>
+            <a:spLocks xmlns:a="http://schemas.openxmlformats.org/drawingml/2006/main" noGrp="1"/>
+          </p:cNvSpPr>
+          <p:nvPr/>
+        </p:nvSpPr>
+        <p:spPr>
+          <a:xfrm xmlns:a="http://schemas.openxmlformats.org/drawingml/2006/main">
+            <a:off x="9772650" y="133350"/>
+            <a:ext cx="1733550" cy="457200"/>
+          </a:xfrm>
+          <a:prstGeom xmlns:a="http://schemas.openxmlformats.org/drawingml/2006/main" prst="roundRect">
+            <a:avLst>
+              <a:gd name="adj" fmla="val 16667"/>
+            </a:avLst>
+          </a:prstGeom>
+          <a:solidFill xmlns:a="http://schemas.openxmlformats.org/drawingml/2006/main">
+            <a:srgbClr val="06142E"/>
+          </a:solidFill>
+          <a:ln xmlns:a="http://schemas.openxmlformats.org/drawingml/2006/main" w="9525">
+            <a:solidFill>
+              <a:srgbClr val="1EC5FF">
+                <a:alpha val="33333"/>
+              </a:srgbClr>
+            </a:solidFill>
+            <a:prstDash val="solid"/>
+          </a:ln>
+        </p:spPr>
+      </p:sp>
+      <p:pic>
+        <p:nvPicPr>
+          <p:cNvPr id="29" name="" descr="Figura oficial da documentação dbt usada para explicar: Demonstração — observe — 01."/>
+          <p:cNvPicPr>
+            <a:picLocks xmlns:a="http://schemas.openxmlformats.org/drawingml/2006/main" noChangeAspect="1"/>
+          </p:cNvPicPr>
+          <p:nvPr/>
+        </p:nvPicPr>
+        <p:blipFill>
+          <a:blip xmlns:r="http://schemas.openxmlformats.org/officeDocument/2006/relationships" xmlns:a="http://schemas.openxmlformats.org/drawingml/2006/main" r:embed="R6685bdbefc46435c"/>
+          <a:stretch xmlns:a="http://schemas.openxmlformats.org/drawingml/2006/main"/>
+        </p:blipFill>
+        <p:spPr>
+          <a:xfrm xmlns:a="http://schemas.openxmlformats.org/drawingml/2006/main">
+            <a:off x="9893718" y="209550"/>
+            <a:ext cx="1491414" cy="323850"/>
+          </a:xfrm>
+          <a:prstGeom xmlns:a="http://schemas.openxmlformats.org/drawingml/2006/main" prst="rect">
+            <a:avLst/>
+          </a:prstGeom>
+        </p:spPr>
+      </p:pic>
+      <p:sp>
+        <p:nvSpPr>
+          <p:cNvPr id="13" name="footer-rule">
+            <a:extLst xmlns:a="http://schemas.openxmlformats.org/drawingml/2006/main">
+              <a:ext uri="{FF2B5EF4-FFF2-40B4-BE49-F238E27FC236}">
+                <a16:creationId xmlns:a16="http://schemas.microsoft.com/office/drawing/2014/main" id="{E3AC3851-5A00-4EB6-99C6-BCC75A8C913A}"/>
               </a:ext>
             </a:extLst>
           </p:cNvPr>
@@ -6101,10 +6427,10 @@
       </p:sp>
       <p:sp>
         <p:nvSpPr>
-          <p:cNvPr id="12" name="footer">
-            <a:extLst xmlns:a="http://schemas.openxmlformats.org/drawingml/2006/main">
-              <a:ext uri="{FF2B5EF4-FFF2-40B4-BE49-F238E27FC236}">
-                <a16:creationId xmlns:a16="http://schemas.microsoft.com/office/drawing/2014/main" id="{32FA2050-48D5-4DFC-AB25-69CAAC803BF0}"/>
+          <p:cNvPr id="14" name="footer">
+            <a:extLst xmlns:a="http://schemas.openxmlformats.org/drawingml/2006/main">
+              <a:ext uri="{FF2B5EF4-FFF2-40B4-BE49-F238E27FC236}">
+                <a16:creationId xmlns:a16="http://schemas.microsoft.com/office/drawing/2014/main" id="{E659733D-45B6-43EC-98FD-2767EBC6B22F}"/>
               </a:ext>
             </a:extLst>
           </p:cNvPr>
@@ -6156,10 +6482,10 @@
       </p:sp>
       <p:sp>
         <p:nvSpPr>
-          <p:cNvPr id="13" name="page-number">
-            <a:extLst xmlns:a="http://schemas.openxmlformats.org/drawingml/2006/main">
-              <a:ext uri="{FF2B5EF4-FFF2-40B4-BE49-F238E27FC236}">
-                <a16:creationId xmlns:a16="http://schemas.microsoft.com/office/drawing/2014/main" id="{DFBD959B-8CF1-4021-81A7-4E1023A7B8CF}"/>
+          <p:cNvPr id="15" name="page-number">
+            <a:extLst xmlns:a="http://schemas.openxmlformats.org/drawingml/2006/main">
+              <a:ext uri="{FF2B5EF4-FFF2-40B4-BE49-F238E27FC236}">
+                <a16:creationId xmlns:a16="http://schemas.microsoft.com/office/drawing/2014/main" id="{A16CB2CF-A855-4C6F-80BD-D3E93980F5E1}"/>
               </a:ext>
             </a:extLst>
           </p:cNvPr>
@@ -6212,7 +6538,7 @@
     </p:spTree>
     <p:extLst>
       <p:ext uri="{BB962C8B-B14F-4D97-AF65-F5344CB8AC3E}">
-        <p14:creationId xmlns:p14="http://schemas.microsoft.com/office/powerpoint/2010/main" val="355035646"/>
+        <p14:creationId xmlns:p14="http://schemas.microsoft.com/office/powerpoint/2010/main" val="383355481"/>
       </p:ext>
     </p:extLst>
   </p:cSld>
@@ -6248,10 +6574,10 @@
       </p:grpSpPr>
       <p:sp>
         <p:nvSpPr>
-          <p:cNvPr id="10" name="result-label">
-            <a:extLst xmlns:a="http://schemas.openxmlformats.org/drawingml/2006/main">
-              <a:ext uri="{FF2B5EF4-FFF2-40B4-BE49-F238E27FC236}">
-                <a16:creationId xmlns:a16="http://schemas.microsoft.com/office/drawing/2014/main" id="{4494651B-7988-4D9D-B617-F1B22436A3BA}"/>
+          <p:cNvPr id="12" name="result-label">
+            <a:extLst xmlns:a="http://schemas.openxmlformats.org/drawingml/2006/main">
+              <a:ext uri="{FF2B5EF4-FFF2-40B4-BE49-F238E27FC236}">
+                <a16:creationId xmlns:a16="http://schemas.microsoft.com/office/drawing/2014/main" id="{FF1BA4F8-1BBC-4CAE-BBAB-2211D0EFABAA}"/>
               </a:ext>
             </a:extLst>
           </p:cNvPr>
@@ -6302,7 +6628,7 @@
           <p:cNvPr id="2" name="result">
             <a:extLst xmlns:a="http://schemas.openxmlformats.org/drawingml/2006/main">
               <a:ext uri="{FF2B5EF4-FFF2-40B4-BE49-F238E27FC236}">
-                <a16:creationId xmlns:a16="http://schemas.microsoft.com/office/drawing/2014/main" id="{29FF96A6-DC04-4FAD-8086-335E1B4729C3}"/>
+                <a16:creationId xmlns:a16="http://schemas.microsoft.com/office/drawing/2014/main" id="{A28BB849-90B0-4EBA-A560-450FCCCE51F7}"/>
               </a:ext>
             </a:extLst>
           </p:cNvPr>
@@ -6353,7 +6679,7 @@
           <p:cNvPr id="3" name="result-meta">
             <a:extLst xmlns:a="http://schemas.openxmlformats.org/drawingml/2006/main">
               <a:ext uri="{FF2B5EF4-FFF2-40B4-BE49-F238E27FC236}">
-                <a16:creationId xmlns:a16="http://schemas.microsoft.com/office/drawing/2014/main" id="{6E5CC1B5-D6DE-4264-BDFB-EAF7DDA5ECEA}"/>
+                <a16:creationId xmlns:a16="http://schemas.microsoft.com/office/drawing/2014/main" id="{8E869C23-A5D7-455B-829D-DDB6B7F90452}"/>
               </a:ext>
             </a:extLst>
           </p:cNvPr>
@@ -6404,7 +6730,7 @@
           <p:cNvPr id="4" name="ambient-glow">
             <a:extLst xmlns:a="http://schemas.openxmlformats.org/drawingml/2006/main">
               <a:ext uri="{FF2B5EF4-FFF2-40B4-BE49-F238E27FC236}">
-                <a16:creationId xmlns:a16="http://schemas.microsoft.com/office/drawing/2014/main" id="{9F314F0A-7CE3-4AAD-BBE4-B2B0FA59A4F1}"/>
+                <a16:creationId xmlns:a16="http://schemas.microsoft.com/office/drawing/2014/main" id="{C2FAE920-457E-41D5-AA4B-77558B64D05E}"/>
               </a:ext>
             </a:extLst>
           </p:cNvPr>
@@ -6441,7 +6767,7 @@
           <p:cNvPr id="5" name="ambient-core">
             <a:extLst xmlns:a="http://schemas.openxmlformats.org/drawingml/2006/main">
               <a:ext uri="{FF2B5EF4-FFF2-40B4-BE49-F238E27FC236}">
-                <a16:creationId xmlns:a16="http://schemas.microsoft.com/office/drawing/2014/main" id="{50CBA09C-6434-4476-A80E-669E3EC3956B}"/>
+                <a16:creationId xmlns:a16="http://schemas.microsoft.com/office/drawing/2014/main" id="{6F2FD3A0-97FD-467A-BCE1-0C0206184988}"/>
               </a:ext>
             </a:extLst>
           </p:cNvPr>
@@ -6478,7 +6804,7 @@
           <p:cNvPr id="6" name="eyebrow">
             <a:extLst xmlns:a="http://schemas.openxmlformats.org/drawingml/2006/main">
               <a:ext uri="{FF2B5EF4-FFF2-40B4-BE49-F238E27FC236}">
-                <a16:creationId xmlns:a16="http://schemas.microsoft.com/office/drawing/2014/main" id="{A428B6EF-5E42-4603-B906-871B33E8499D}"/>
+                <a16:creationId xmlns:a16="http://schemas.microsoft.com/office/drawing/2014/main" id="{420CC175-3B51-4569-AA89-754169D0BAEA}"/>
               </a:ext>
             </a:extLst>
           </p:cNvPr>
@@ -6526,10 +6852,69 @@
       </p:sp>
       <p:sp>
         <p:nvSpPr>
-          <p:cNvPr id="7" name="footer-rule">
-            <a:extLst xmlns:a="http://schemas.openxmlformats.org/drawingml/2006/main">
-              <a:ext uri="{FF2B5EF4-FFF2-40B4-BE49-F238E27FC236}">
-                <a16:creationId xmlns:a16="http://schemas.microsoft.com/office/drawing/2014/main" id="{17D6351F-62F6-4659-8E0C-2B9172F17D3E}"/>
+          <p:cNvPr id="7" name="rescue-point-logo-background">
+            <a:extLst xmlns:a="http://schemas.openxmlformats.org/drawingml/2006/main">
+              <a:ext uri="{FF2B5EF4-FFF2-40B4-BE49-F238E27FC236}">
+                <a16:creationId xmlns:a16="http://schemas.microsoft.com/office/drawing/2014/main" id="{E8E653B2-A720-4E0C-83D4-68EC9C4D61FD}"/>
+              </a:ext>
+            </a:extLst>
+          </p:cNvPr>
+          <p:cNvSpPr>
+            <a:spLocks xmlns:a="http://schemas.openxmlformats.org/drawingml/2006/main" noGrp="1"/>
+          </p:cNvSpPr>
+          <p:nvPr/>
+        </p:nvSpPr>
+        <p:spPr>
+          <a:xfrm xmlns:a="http://schemas.openxmlformats.org/drawingml/2006/main">
+            <a:off x="9772650" y="133350"/>
+            <a:ext cx="1733550" cy="457200"/>
+          </a:xfrm>
+          <a:prstGeom xmlns:a="http://schemas.openxmlformats.org/drawingml/2006/main" prst="roundRect">
+            <a:avLst>
+              <a:gd name="adj" fmla="val 16667"/>
+            </a:avLst>
+          </a:prstGeom>
+          <a:solidFill xmlns:a="http://schemas.openxmlformats.org/drawingml/2006/main">
+            <a:srgbClr val="06142E"/>
+          </a:solidFill>
+          <a:ln xmlns:a="http://schemas.openxmlformats.org/drawingml/2006/main" w="9525">
+            <a:solidFill>
+              <a:srgbClr val="1EC5FF">
+                <a:alpha val="33333"/>
+              </a:srgbClr>
+            </a:solidFill>
+            <a:prstDash val="solid"/>
+          </a:ln>
+        </p:spPr>
+      </p:sp>
+      <p:pic>
+        <p:nvPicPr>
+          <p:cNvPr id="21" name="" descr="Figura oficial da documentação dbt usada para explicar: RESULTADO ESPERADO — Baseline reproduzido."/>
+          <p:cNvPicPr>
+            <a:picLocks xmlns:a="http://schemas.openxmlformats.org/drawingml/2006/main" noChangeAspect="1"/>
+          </p:cNvPicPr>
+          <p:nvPr/>
+        </p:nvPicPr>
+        <p:blipFill>
+          <a:blip xmlns:r="http://schemas.openxmlformats.org/officeDocument/2006/relationships" xmlns:a="http://schemas.openxmlformats.org/drawingml/2006/main" r:embed="R4e0fcd5ee7274a31"/>
+          <a:stretch xmlns:a="http://schemas.openxmlformats.org/drawingml/2006/main"/>
+        </p:blipFill>
+        <p:spPr>
+          <a:xfrm xmlns:a="http://schemas.openxmlformats.org/drawingml/2006/main">
+            <a:off x="9893718" y="209550"/>
+            <a:ext cx="1491414" cy="323850"/>
+          </a:xfrm>
+          <a:prstGeom xmlns:a="http://schemas.openxmlformats.org/drawingml/2006/main" prst="rect">
+            <a:avLst/>
+          </a:prstGeom>
+        </p:spPr>
+      </p:pic>
+      <p:sp>
+        <p:nvSpPr>
+          <p:cNvPr id="9" name="footer-rule">
+            <a:extLst xmlns:a="http://schemas.openxmlformats.org/drawingml/2006/main">
+              <a:ext uri="{FF2B5EF4-FFF2-40B4-BE49-F238E27FC236}">
+                <a16:creationId xmlns:a16="http://schemas.microsoft.com/office/drawing/2014/main" id="{B6F2D2F7-108E-4C31-9BEA-4BD2D85C0321}"/>
               </a:ext>
             </a:extLst>
           </p:cNvPr>
@@ -6559,10 +6944,10 @@
       </p:sp>
       <p:sp>
         <p:nvSpPr>
-          <p:cNvPr id="8" name="footer">
-            <a:extLst xmlns:a="http://schemas.openxmlformats.org/drawingml/2006/main">
-              <a:ext uri="{FF2B5EF4-FFF2-40B4-BE49-F238E27FC236}">
-                <a16:creationId xmlns:a16="http://schemas.microsoft.com/office/drawing/2014/main" id="{2B45A18D-FE94-4709-AB96-9A9A3C7B0874}"/>
+          <p:cNvPr id="10" name="footer">
+            <a:extLst xmlns:a="http://schemas.openxmlformats.org/drawingml/2006/main">
+              <a:ext uri="{FF2B5EF4-FFF2-40B4-BE49-F238E27FC236}">
+                <a16:creationId xmlns:a16="http://schemas.microsoft.com/office/drawing/2014/main" id="{306DFB04-54F9-4644-90D0-CCD6289722D6}"/>
               </a:ext>
             </a:extLst>
           </p:cNvPr>
@@ -6614,10 +6999,10 @@
       </p:sp>
       <p:sp>
         <p:nvSpPr>
-          <p:cNvPr id="9" name="page-number">
-            <a:extLst xmlns:a="http://schemas.openxmlformats.org/drawingml/2006/main">
-              <a:ext uri="{FF2B5EF4-FFF2-40B4-BE49-F238E27FC236}">
-                <a16:creationId xmlns:a16="http://schemas.microsoft.com/office/drawing/2014/main" id="{6322DEC6-A6DE-46CB-9CD9-89AE5B8B2C6E}"/>
+          <p:cNvPr id="11" name="page-number">
+            <a:extLst xmlns:a="http://schemas.openxmlformats.org/drawingml/2006/main">
+              <a:ext uri="{FF2B5EF4-FFF2-40B4-BE49-F238E27FC236}">
+                <a16:creationId xmlns:a16="http://schemas.microsoft.com/office/drawing/2014/main" id="{B54B291F-3EC2-4D6A-A8A4-D0B762D64C0C}"/>
               </a:ext>
             </a:extLst>
           </p:cNvPr>
@@ -6670,7 +7055,7 @@
     </p:spTree>
     <p:extLst>
       <p:ext uri="{BB962C8B-B14F-4D97-AF65-F5344CB8AC3E}">
-        <p14:creationId xmlns:p14="http://schemas.microsoft.com/office/powerpoint/2010/main" val="1390565644"/>
+        <p14:creationId xmlns:p14="http://schemas.microsoft.com/office/powerpoint/2010/main" val="992739790"/>
       </p:ext>
     </p:extLst>
   </p:cSld>
@@ -6698,10 +7083,10 @@
       </p:grpSpPr>
       <p:sp>
         <p:nvSpPr>
-          <p:cNvPr id="14" name="slide-title">
-            <a:extLst xmlns:a="http://schemas.openxmlformats.org/drawingml/2006/main">
-              <a:ext uri="{FF2B5EF4-FFF2-40B4-BE49-F238E27FC236}">
-                <a16:creationId xmlns:a16="http://schemas.microsoft.com/office/drawing/2014/main" id="{B3BE8022-91A4-4F51-9543-76A8B6FFD0A3}"/>
+          <p:cNvPr id="16" name="slide-title">
+            <a:extLst xmlns:a="http://schemas.openxmlformats.org/drawingml/2006/main">
+              <a:ext uri="{FF2B5EF4-FFF2-40B4-BE49-F238E27FC236}">
+                <a16:creationId xmlns:a16="http://schemas.microsoft.com/office/drawing/2014/main" id="{F085A0DF-D0D0-4219-A052-9D4A814C5122}"/>
               </a:ext>
             </a:extLst>
           </p:cNvPr>
@@ -6752,7 +7137,7 @@
           <p:cNvPr id="2" name="step-num-1">
             <a:extLst xmlns:a="http://schemas.openxmlformats.org/drawingml/2006/main">
               <a:ext uri="{FF2B5EF4-FFF2-40B4-BE49-F238E27FC236}">
-                <a16:creationId xmlns:a16="http://schemas.microsoft.com/office/drawing/2014/main" id="{7BBDBA59-2857-4EC2-891A-5839B4812C61}"/>
+                <a16:creationId xmlns:a16="http://schemas.microsoft.com/office/drawing/2014/main" id="{75C58B72-305F-4778-B328-840A93525474}"/>
               </a:ext>
             </a:extLst>
           </p:cNvPr>
@@ -6803,7 +7188,7 @@
           <p:cNvPr id="3" name="step-label-1">
             <a:extLst xmlns:a="http://schemas.openxmlformats.org/drawingml/2006/main">
               <a:ext uri="{FF2B5EF4-FFF2-40B4-BE49-F238E27FC236}">
-                <a16:creationId xmlns:a16="http://schemas.microsoft.com/office/drawing/2014/main" id="{5CA8FCA0-8B14-48D5-88AA-43D2D0D86F4C}"/>
+                <a16:creationId xmlns:a16="http://schemas.microsoft.com/office/drawing/2014/main" id="{4AE339C0-16FC-46DE-940B-78804F72F317}"/>
               </a:ext>
             </a:extLst>
           </p:cNvPr>
@@ -6854,7 +7239,7 @@
           <p:cNvPr id="4" name="step-line-1">
             <a:extLst xmlns:a="http://schemas.openxmlformats.org/drawingml/2006/main">
               <a:ext uri="{FF2B5EF4-FFF2-40B4-BE49-F238E27FC236}">
-                <a16:creationId xmlns:a16="http://schemas.microsoft.com/office/drawing/2014/main" id="{90410F1A-38DD-4DDE-BFB6-06282884E0AF}"/>
+                <a16:creationId xmlns:a16="http://schemas.microsoft.com/office/drawing/2014/main" id="{B0D93868-93AD-4204-B0E1-2D2FCF332D09}"/>
               </a:ext>
             </a:extLst>
           </p:cNvPr>
@@ -6885,7 +7270,7 @@
           <p:cNvPr id="5" name="step-num-2">
             <a:extLst xmlns:a="http://schemas.openxmlformats.org/drawingml/2006/main">
               <a:ext uri="{FF2B5EF4-FFF2-40B4-BE49-F238E27FC236}">
-                <a16:creationId xmlns:a16="http://schemas.microsoft.com/office/drawing/2014/main" id="{54A9717A-CE7B-42F1-8D53-F64B149B7EAE}"/>
+                <a16:creationId xmlns:a16="http://schemas.microsoft.com/office/drawing/2014/main" id="{6D4DC737-F301-4F8D-A34A-E0539E51C611}"/>
               </a:ext>
             </a:extLst>
           </p:cNvPr>
@@ -6936,7 +7321,7 @@
           <p:cNvPr id="6" name="step-label-2">
             <a:extLst xmlns:a="http://schemas.openxmlformats.org/drawingml/2006/main">
               <a:ext uri="{FF2B5EF4-FFF2-40B4-BE49-F238E27FC236}">
-                <a16:creationId xmlns:a16="http://schemas.microsoft.com/office/drawing/2014/main" id="{AFFA8C74-B147-45EB-9F7D-69C8FEF66EFD}"/>
+                <a16:creationId xmlns:a16="http://schemas.microsoft.com/office/drawing/2014/main" id="{86722911-F256-4A10-A132-4FAC2A4036B8}"/>
               </a:ext>
             </a:extLst>
           </p:cNvPr>
@@ -6987,7 +7372,7 @@
           <p:cNvPr id="7" name="step-line-2">
             <a:extLst xmlns:a="http://schemas.openxmlformats.org/drawingml/2006/main">
               <a:ext uri="{FF2B5EF4-FFF2-40B4-BE49-F238E27FC236}">
-                <a16:creationId xmlns:a16="http://schemas.microsoft.com/office/drawing/2014/main" id="{258BE137-7E63-4930-834B-FBC1A4E5AEE1}"/>
+                <a16:creationId xmlns:a16="http://schemas.microsoft.com/office/drawing/2014/main" id="{152EFD0D-9FD8-4B1B-AAEB-49EC0C4AB910}"/>
               </a:ext>
             </a:extLst>
           </p:cNvPr>
@@ -7018,7 +7403,7 @@
           <p:cNvPr id="8" name="step-num-3">
             <a:extLst xmlns:a="http://schemas.openxmlformats.org/drawingml/2006/main">
               <a:ext uri="{FF2B5EF4-FFF2-40B4-BE49-F238E27FC236}">
-                <a16:creationId xmlns:a16="http://schemas.microsoft.com/office/drawing/2014/main" id="{842D94B2-E6F9-4585-891B-F44EB2496AB5}"/>
+                <a16:creationId xmlns:a16="http://schemas.microsoft.com/office/drawing/2014/main" id="{14191F58-5257-4526-ABFC-50607039BA91}"/>
               </a:ext>
             </a:extLst>
           </p:cNvPr>
@@ -7069,7 +7454,7 @@
           <p:cNvPr id="9" name="step-label-3">
             <a:extLst xmlns:a="http://schemas.openxmlformats.org/drawingml/2006/main">
               <a:ext uri="{FF2B5EF4-FFF2-40B4-BE49-F238E27FC236}">
-                <a16:creationId xmlns:a16="http://schemas.microsoft.com/office/drawing/2014/main" id="{BEEAF4C9-0219-435C-87CE-766906ECBDFE}"/>
+                <a16:creationId xmlns:a16="http://schemas.microsoft.com/office/drawing/2014/main" id="{39EC2E7D-7AC6-41FD-BC16-51A4E23CA146}"/>
               </a:ext>
             </a:extLst>
           </p:cNvPr>
@@ -7120,7 +7505,7 @@
           <p:cNvPr id="10" name="eyebrow">
             <a:extLst xmlns:a="http://schemas.openxmlformats.org/drawingml/2006/main">
               <a:ext uri="{FF2B5EF4-FFF2-40B4-BE49-F238E27FC236}">
-                <a16:creationId xmlns:a16="http://schemas.microsoft.com/office/drawing/2014/main" id="{644FB903-53F4-4DB8-9BCE-F13F8DC85C87}"/>
+                <a16:creationId xmlns:a16="http://schemas.microsoft.com/office/drawing/2014/main" id="{C687AA15-CE10-4D3E-8515-4C50CEFFC83A}"/>
               </a:ext>
             </a:extLst>
           </p:cNvPr>
@@ -7168,10 +7553,69 @@
       </p:sp>
       <p:sp>
         <p:nvSpPr>
-          <p:cNvPr id="11" name="footer-rule">
-            <a:extLst xmlns:a="http://schemas.openxmlformats.org/drawingml/2006/main">
-              <a:ext uri="{FF2B5EF4-FFF2-40B4-BE49-F238E27FC236}">
-                <a16:creationId xmlns:a16="http://schemas.microsoft.com/office/drawing/2014/main" id="{764D0CDF-16BA-4385-B919-B7ABD3F4F6EF}"/>
+          <p:cNvPr id="11" name="rescue-point-logo-background">
+            <a:extLst xmlns:a="http://schemas.openxmlformats.org/drawingml/2006/main">
+              <a:ext uri="{FF2B5EF4-FFF2-40B4-BE49-F238E27FC236}">
+                <a16:creationId xmlns:a16="http://schemas.microsoft.com/office/drawing/2014/main" id="{1F6ADA99-6FC8-4CED-81D3-DD435A6A2D29}"/>
+              </a:ext>
+            </a:extLst>
+          </p:cNvPr>
+          <p:cNvSpPr>
+            <a:spLocks xmlns:a="http://schemas.openxmlformats.org/drawingml/2006/main" noGrp="1"/>
+          </p:cNvSpPr>
+          <p:nvPr/>
+        </p:nvSpPr>
+        <p:spPr>
+          <a:xfrm xmlns:a="http://schemas.openxmlformats.org/drawingml/2006/main">
+            <a:off x="9772650" y="133350"/>
+            <a:ext cx="1733550" cy="457200"/>
+          </a:xfrm>
+          <a:prstGeom xmlns:a="http://schemas.openxmlformats.org/drawingml/2006/main" prst="roundRect">
+            <a:avLst>
+              <a:gd name="adj" fmla="val 16667"/>
+            </a:avLst>
+          </a:prstGeom>
+          <a:solidFill xmlns:a="http://schemas.openxmlformats.org/drawingml/2006/main">
+            <a:srgbClr val="06142E"/>
+          </a:solidFill>
+          <a:ln xmlns:a="http://schemas.openxmlformats.org/drawingml/2006/main" w="9525">
+            <a:solidFill>
+              <a:srgbClr val="1EC5FF">
+                <a:alpha val="33333"/>
+              </a:srgbClr>
+            </a:solidFill>
+            <a:prstDash val="solid"/>
+          </a:ln>
+        </p:spPr>
+      </p:sp>
+      <p:pic>
+        <p:nvPicPr>
+          <p:cNvPr id="29" name="" descr="Figura oficial da documentação dbt usada para explicar: O mesmo recurso afeta três decisões — 01."/>
+          <p:cNvPicPr>
+            <a:picLocks xmlns:a="http://schemas.openxmlformats.org/drawingml/2006/main" noChangeAspect="1"/>
+          </p:cNvPicPr>
+          <p:nvPr/>
+        </p:nvPicPr>
+        <p:blipFill>
+          <a:blip xmlns:r="http://schemas.openxmlformats.org/officeDocument/2006/relationships" xmlns:a="http://schemas.openxmlformats.org/drawingml/2006/main" r:embed="Ref745f4c72254556"/>
+          <a:stretch xmlns:a="http://schemas.openxmlformats.org/drawingml/2006/main"/>
+        </p:blipFill>
+        <p:spPr>
+          <a:xfrm xmlns:a="http://schemas.openxmlformats.org/drawingml/2006/main">
+            <a:off x="9893718" y="209550"/>
+            <a:ext cx="1491414" cy="323850"/>
+          </a:xfrm>
+          <a:prstGeom xmlns:a="http://schemas.openxmlformats.org/drawingml/2006/main" prst="rect">
+            <a:avLst/>
+          </a:prstGeom>
+        </p:spPr>
+      </p:pic>
+      <p:sp>
+        <p:nvSpPr>
+          <p:cNvPr id="13" name="footer-rule">
+            <a:extLst xmlns:a="http://schemas.openxmlformats.org/drawingml/2006/main">
+              <a:ext uri="{FF2B5EF4-FFF2-40B4-BE49-F238E27FC236}">
+                <a16:creationId xmlns:a16="http://schemas.microsoft.com/office/drawing/2014/main" id="{27743363-3729-4631-AE85-B84D0A44556F}"/>
               </a:ext>
             </a:extLst>
           </p:cNvPr>
@@ -7201,10 +7645,10 @@
       </p:sp>
       <p:sp>
         <p:nvSpPr>
-          <p:cNvPr id="12" name="footer">
-            <a:extLst xmlns:a="http://schemas.openxmlformats.org/drawingml/2006/main">
-              <a:ext uri="{FF2B5EF4-FFF2-40B4-BE49-F238E27FC236}">
-                <a16:creationId xmlns:a16="http://schemas.microsoft.com/office/drawing/2014/main" id="{6DE26DB6-4D8F-47E9-A71B-8F7727EE8A2E}"/>
+          <p:cNvPr id="14" name="footer">
+            <a:extLst xmlns:a="http://schemas.openxmlformats.org/drawingml/2006/main">
+              <a:ext uri="{FF2B5EF4-FFF2-40B4-BE49-F238E27FC236}">
+                <a16:creationId xmlns:a16="http://schemas.microsoft.com/office/drawing/2014/main" id="{575334E0-57B1-41DD-A967-5FC66C9C5FC7}"/>
               </a:ext>
             </a:extLst>
           </p:cNvPr>
@@ -7256,10 +7700,10 @@
       </p:sp>
       <p:sp>
         <p:nvSpPr>
-          <p:cNvPr id="13" name="page-number">
-            <a:extLst xmlns:a="http://schemas.openxmlformats.org/drawingml/2006/main">
-              <a:ext uri="{FF2B5EF4-FFF2-40B4-BE49-F238E27FC236}">
-                <a16:creationId xmlns:a16="http://schemas.microsoft.com/office/drawing/2014/main" id="{A14138F8-2E5A-4CE5-BECF-01F8A174108A}"/>
+          <p:cNvPr id="15" name="page-number">
+            <a:extLst xmlns:a="http://schemas.openxmlformats.org/drawingml/2006/main">
+              <a:ext uri="{FF2B5EF4-FFF2-40B4-BE49-F238E27FC236}">
+                <a16:creationId xmlns:a16="http://schemas.microsoft.com/office/drawing/2014/main" id="{E19CA421-4FFD-49A8-9E92-3BAF62EC166E}"/>
               </a:ext>
             </a:extLst>
           </p:cNvPr>
@@ -7312,7 +7756,7 @@
     </p:spTree>
     <p:extLst>
       <p:ext uri="{BB962C8B-B14F-4D97-AF65-F5344CB8AC3E}">
-        <p14:creationId xmlns:p14="http://schemas.microsoft.com/office/powerpoint/2010/main" val="2104760436"/>
+        <p14:creationId xmlns:p14="http://schemas.microsoft.com/office/powerpoint/2010/main" val="1507777511"/>
       </p:ext>
     </p:extLst>
   </p:cSld>
@@ -7348,10 +7792,10 @@
       </p:grpSpPr>
       <p:sp>
         <p:nvSpPr>
-          <p:cNvPr id="9" name="case-number">
-            <a:extLst xmlns:a="http://schemas.openxmlformats.org/drawingml/2006/main">
-              <a:ext uri="{FF2B5EF4-FFF2-40B4-BE49-F238E27FC236}">
-                <a16:creationId xmlns:a16="http://schemas.microsoft.com/office/drawing/2014/main" id="{D7F32624-C71A-4BC9-934D-7689FA27127C}"/>
+          <p:cNvPr id="11" name="case-number">
+            <a:extLst xmlns:a="http://schemas.openxmlformats.org/drawingml/2006/main">
+              <a:ext uri="{FF2B5EF4-FFF2-40B4-BE49-F238E27FC236}">
+                <a16:creationId xmlns:a16="http://schemas.microsoft.com/office/drawing/2014/main" id="{8A0EA83E-FF1B-4A1D-9426-9AAC09CD8050}"/>
               </a:ext>
             </a:extLst>
           </p:cNvPr>
@@ -7402,7 +7846,7 @@
           <p:cNvPr id="2" name="case-label">
             <a:extLst xmlns:a="http://schemas.openxmlformats.org/drawingml/2006/main">
               <a:ext uri="{FF2B5EF4-FFF2-40B4-BE49-F238E27FC236}">
-                <a16:creationId xmlns:a16="http://schemas.microsoft.com/office/drawing/2014/main" id="{9609985C-A37D-4CD5-A0E9-87B66DD3BAA3}"/>
+                <a16:creationId xmlns:a16="http://schemas.microsoft.com/office/drawing/2014/main" id="{6FFDFEEF-B06B-4836-BBCE-AA93C958A8E8}"/>
               </a:ext>
             </a:extLst>
           </p:cNvPr>
@@ -7453,7 +7897,7 @@
           <p:cNvPr id="3" name="case-divider">
             <a:extLst xmlns:a="http://schemas.openxmlformats.org/drawingml/2006/main">
               <a:ext uri="{FF2B5EF4-FFF2-40B4-BE49-F238E27FC236}">
-                <a16:creationId xmlns:a16="http://schemas.microsoft.com/office/drawing/2014/main" id="{7AE8BFD6-5378-42F4-BA1B-66BEF6AB7AD3}"/>
+                <a16:creationId xmlns:a16="http://schemas.microsoft.com/office/drawing/2014/main" id="{35126F2D-815B-4AD2-AC34-80C1FE04650A}"/>
               </a:ext>
             </a:extLst>
           </p:cNvPr>
@@ -7486,7 +7930,7 @@
           <p:cNvPr id="4" name="case-caveat">
             <a:extLst xmlns:a="http://schemas.openxmlformats.org/drawingml/2006/main">
               <a:ext uri="{FF2B5EF4-FFF2-40B4-BE49-F238E27FC236}">
-                <a16:creationId xmlns:a16="http://schemas.microsoft.com/office/drawing/2014/main" id="{546F5CD4-C548-4F49-88E5-98AB863203A4}"/>
+                <a16:creationId xmlns:a16="http://schemas.microsoft.com/office/drawing/2014/main" id="{CF2E92C3-BB9A-4AFC-A0D3-41792CF48F2A}"/>
               </a:ext>
             </a:extLst>
           </p:cNvPr>
@@ -7537,7 +7981,7 @@
           <p:cNvPr id="5" name="eyebrow">
             <a:extLst xmlns:a="http://schemas.openxmlformats.org/drawingml/2006/main">
               <a:ext uri="{FF2B5EF4-FFF2-40B4-BE49-F238E27FC236}">
-                <a16:creationId xmlns:a16="http://schemas.microsoft.com/office/drawing/2014/main" id="{AAF8A4F5-2C7D-4E05-8499-12D18273E243}"/>
+                <a16:creationId xmlns:a16="http://schemas.microsoft.com/office/drawing/2014/main" id="{15E2AB9A-4DE7-407B-8D5D-253457812165}"/>
               </a:ext>
             </a:extLst>
           </p:cNvPr>
@@ -7585,10 +8029,69 @@
       </p:sp>
       <p:sp>
         <p:nvSpPr>
-          <p:cNvPr id="6" name="footer-rule">
-            <a:extLst xmlns:a="http://schemas.openxmlformats.org/drawingml/2006/main">
-              <a:ext uri="{FF2B5EF4-FFF2-40B4-BE49-F238E27FC236}">
-                <a16:creationId xmlns:a16="http://schemas.microsoft.com/office/drawing/2014/main" id="{31B16BC6-3254-45B7-940C-9CBD68EEF163}"/>
+          <p:cNvPr id="6" name="rescue-point-logo-background">
+            <a:extLst xmlns:a="http://schemas.openxmlformats.org/drawingml/2006/main">
+              <a:ext uri="{FF2B5EF4-FFF2-40B4-BE49-F238E27FC236}">
+                <a16:creationId xmlns:a16="http://schemas.microsoft.com/office/drawing/2014/main" id="{C947B986-F0E0-405A-BF6B-97D8A3A365CB}"/>
+              </a:ext>
+            </a:extLst>
+          </p:cNvPr>
+          <p:cNvSpPr>
+            <a:spLocks xmlns:a="http://schemas.openxmlformats.org/drawingml/2006/main" noGrp="1"/>
+          </p:cNvSpPr>
+          <p:nvPr/>
+        </p:nvSpPr>
+        <p:spPr>
+          <a:xfrm xmlns:a="http://schemas.openxmlformats.org/drawingml/2006/main">
+            <a:off x="9772650" y="133350"/>
+            <a:ext cx="1733550" cy="457200"/>
+          </a:xfrm>
+          <a:prstGeom xmlns:a="http://schemas.openxmlformats.org/drawingml/2006/main" prst="roundRect">
+            <a:avLst>
+              <a:gd name="adj" fmla="val 16667"/>
+            </a:avLst>
+          </a:prstGeom>
+          <a:solidFill xmlns:a="http://schemas.openxmlformats.org/drawingml/2006/main">
+            <a:srgbClr val="06142E"/>
+          </a:solidFill>
+          <a:ln xmlns:a="http://schemas.openxmlformats.org/drawingml/2006/main" w="9525">
+            <a:solidFill>
+              <a:srgbClr val="1EC5FF">
+                <a:alpha val="33333"/>
+              </a:srgbClr>
+            </a:solidFill>
+            <a:prstDash val="solid"/>
+          </a:ln>
+        </p:spPr>
+      </p:sp>
+      <p:pic>
+        <p:nvPicPr>
+          <p:cNvPr id="19" name="" descr="Figura oficial da documentação dbt usada para explicar: 8 / 740 / 630 — pedidos / receita bruta / entregue."/>
+          <p:cNvPicPr>
+            <a:picLocks xmlns:a="http://schemas.openxmlformats.org/drawingml/2006/main" noChangeAspect="1"/>
+          </p:cNvPicPr>
+          <p:nvPr/>
+        </p:nvPicPr>
+        <p:blipFill>
+          <a:blip xmlns:r="http://schemas.openxmlformats.org/officeDocument/2006/relationships" xmlns:a="http://schemas.openxmlformats.org/drawingml/2006/main" r:embed="R5d969e0abe024726"/>
+          <a:stretch xmlns:a="http://schemas.openxmlformats.org/drawingml/2006/main"/>
+        </p:blipFill>
+        <p:spPr>
+          <a:xfrm xmlns:a="http://schemas.openxmlformats.org/drawingml/2006/main">
+            <a:off x="9893718" y="209550"/>
+            <a:ext cx="1491414" cy="323850"/>
+          </a:xfrm>
+          <a:prstGeom xmlns:a="http://schemas.openxmlformats.org/drawingml/2006/main" prst="rect">
+            <a:avLst/>
+          </a:prstGeom>
+        </p:spPr>
+      </p:pic>
+      <p:sp>
+        <p:nvSpPr>
+          <p:cNvPr id="8" name="footer-rule">
+            <a:extLst xmlns:a="http://schemas.openxmlformats.org/drawingml/2006/main">
+              <a:ext uri="{FF2B5EF4-FFF2-40B4-BE49-F238E27FC236}">
+                <a16:creationId xmlns:a16="http://schemas.microsoft.com/office/drawing/2014/main" id="{A6E2862D-5ABE-45C3-87F1-3A4C3EED9872}"/>
               </a:ext>
             </a:extLst>
           </p:cNvPr>
@@ -7618,10 +8121,10 @@
       </p:sp>
       <p:sp>
         <p:nvSpPr>
-          <p:cNvPr id="7" name="footer">
-            <a:extLst xmlns:a="http://schemas.openxmlformats.org/drawingml/2006/main">
-              <a:ext uri="{FF2B5EF4-FFF2-40B4-BE49-F238E27FC236}">
-                <a16:creationId xmlns:a16="http://schemas.microsoft.com/office/drawing/2014/main" id="{439ADF13-CF7C-4E8D-BC6D-0B4B36454AEB}"/>
+          <p:cNvPr id="9" name="footer">
+            <a:extLst xmlns:a="http://schemas.openxmlformats.org/drawingml/2006/main">
+              <a:ext uri="{FF2B5EF4-FFF2-40B4-BE49-F238E27FC236}">
+                <a16:creationId xmlns:a16="http://schemas.microsoft.com/office/drawing/2014/main" id="{F17F1CC0-BCE3-49ED-A7C3-98B5826B3656}"/>
               </a:ext>
             </a:extLst>
           </p:cNvPr>
@@ -7673,10 +8176,10 @@
       </p:sp>
       <p:sp>
         <p:nvSpPr>
-          <p:cNvPr id="8" name="page-number">
-            <a:extLst xmlns:a="http://schemas.openxmlformats.org/drawingml/2006/main">
-              <a:ext uri="{FF2B5EF4-FFF2-40B4-BE49-F238E27FC236}">
-                <a16:creationId xmlns:a16="http://schemas.microsoft.com/office/drawing/2014/main" id="{C523C624-2F01-4D56-AD1C-26631044E766}"/>
+          <p:cNvPr id="10" name="page-number">
+            <a:extLst xmlns:a="http://schemas.openxmlformats.org/drawingml/2006/main">
+              <a:ext uri="{FF2B5EF4-FFF2-40B4-BE49-F238E27FC236}">
+                <a16:creationId xmlns:a16="http://schemas.microsoft.com/office/drawing/2014/main" id="{1091D1B1-7723-4F94-9683-8270D481B92B}"/>
               </a:ext>
             </a:extLst>
           </p:cNvPr>
@@ -7729,7 +8232,7 @@
     </p:spTree>
     <p:extLst>
       <p:ext uri="{BB962C8B-B14F-4D97-AF65-F5344CB8AC3E}">
-        <p14:creationId xmlns:p14="http://schemas.microsoft.com/office/powerpoint/2010/main" val="1305496515"/>
+        <p14:creationId xmlns:p14="http://schemas.microsoft.com/office/powerpoint/2010/main" val="435876085"/>
       </p:ext>
     </p:extLst>
   </p:cSld>
@@ -7757,10 +8260,10 @@
       </p:grpSpPr>
       <p:sp>
         <p:nvSpPr>
-          <p:cNvPr id="7" name="slide-title">
-            <a:extLst xmlns:a="http://schemas.openxmlformats.org/drawingml/2006/main">
-              <a:ext uri="{FF2B5EF4-FFF2-40B4-BE49-F238E27FC236}">
-                <a16:creationId xmlns:a16="http://schemas.microsoft.com/office/drawing/2014/main" id="{196E9731-C0DC-4A6F-84CC-4F9859FA000E}"/>
+          <p:cNvPr id="9" name="slide-title">
+            <a:extLst xmlns:a="http://schemas.openxmlformats.org/drawingml/2006/main">
+              <a:ext uri="{FF2B5EF4-FFF2-40B4-BE49-F238E27FC236}">
+                <a16:creationId xmlns:a16="http://schemas.microsoft.com/office/drawing/2014/main" id="{61841220-075C-47C5-BD14-045C7CE3412D}"/>
               </a:ext>
             </a:extLst>
           </p:cNvPr>
@@ -7811,7 +8314,7 @@
           <p:cNvPr id="2" name="bullets">
             <a:extLst xmlns:a="http://schemas.openxmlformats.org/drawingml/2006/main">
               <a:ext uri="{FF2B5EF4-FFF2-40B4-BE49-F238E27FC236}">
-                <a16:creationId xmlns:a16="http://schemas.microsoft.com/office/drawing/2014/main" id="{F3000498-FFD7-4031-82F4-760D563937F9}"/>
+                <a16:creationId xmlns:a16="http://schemas.microsoft.com/office/drawing/2014/main" id="{31282738-FFCC-4A53-91D2-7ACFAA1539D9}"/>
               </a:ext>
             </a:extLst>
           </p:cNvPr>
@@ -7898,7 +8401,7 @@
           <p:cNvPr id="3" name="eyebrow">
             <a:extLst xmlns:a="http://schemas.openxmlformats.org/drawingml/2006/main">
               <a:ext uri="{FF2B5EF4-FFF2-40B4-BE49-F238E27FC236}">
-                <a16:creationId xmlns:a16="http://schemas.microsoft.com/office/drawing/2014/main" id="{791F412C-591A-4F9F-A2C1-A9A11C160CA7}"/>
+                <a16:creationId xmlns:a16="http://schemas.microsoft.com/office/drawing/2014/main" id="{C5D60D30-C2E5-411A-8F7C-CB594CBCFB39}"/>
               </a:ext>
             </a:extLst>
           </p:cNvPr>
@@ -7946,10 +8449,69 @@
       </p:sp>
       <p:sp>
         <p:nvSpPr>
-          <p:cNvPr id="4" name="footer-rule">
-            <a:extLst xmlns:a="http://schemas.openxmlformats.org/drawingml/2006/main">
-              <a:ext uri="{FF2B5EF4-FFF2-40B4-BE49-F238E27FC236}">
-                <a16:creationId xmlns:a16="http://schemas.microsoft.com/office/drawing/2014/main" id="{74C5DE50-02D3-4443-8D93-8DED096C92F8}"/>
+          <p:cNvPr id="4" name="rescue-point-logo-background">
+            <a:extLst xmlns:a="http://schemas.openxmlformats.org/drawingml/2006/main">
+              <a:ext uri="{FF2B5EF4-FFF2-40B4-BE49-F238E27FC236}">
+                <a16:creationId xmlns:a16="http://schemas.microsoft.com/office/drawing/2014/main" id="{8EB81A61-D4BA-4BDF-9898-2ACF1616DF19}"/>
+              </a:ext>
+            </a:extLst>
+          </p:cNvPr>
+          <p:cNvSpPr>
+            <a:spLocks xmlns:a="http://schemas.openxmlformats.org/drawingml/2006/main" noGrp="1"/>
+          </p:cNvSpPr>
+          <p:nvPr/>
+        </p:nvSpPr>
+        <p:spPr>
+          <a:xfrm xmlns:a="http://schemas.openxmlformats.org/drawingml/2006/main">
+            <a:off x="9772650" y="133350"/>
+            <a:ext cx="1733550" cy="457200"/>
+          </a:xfrm>
+          <a:prstGeom xmlns:a="http://schemas.openxmlformats.org/drawingml/2006/main" prst="roundRect">
+            <a:avLst>
+              <a:gd name="adj" fmla="val 16667"/>
+            </a:avLst>
+          </a:prstGeom>
+          <a:solidFill xmlns:a="http://schemas.openxmlformats.org/drawingml/2006/main">
+            <a:srgbClr val="06142E"/>
+          </a:solidFill>
+          <a:ln xmlns:a="http://schemas.openxmlformats.org/drawingml/2006/main" w="9525">
+            <a:solidFill>
+              <a:srgbClr val="1EC5FF">
+                <a:alpha val="33333"/>
+              </a:srgbClr>
+            </a:solidFill>
+            <a:prstDash val="solid"/>
+          </a:ln>
+        </p:spPr>
+      </p:sp>
+      <p:pic>
+        <p:nvPicPr>
+          <p:cNvPr id="15" name="" descr="Figura oficial da documentação dbt usada para explicar: Limitações que precisam permanecer visíveis — • Incremental, testes e deploy não estavam implementados na série original."/>
+          <p:cNvPicPr>
+            <a:picLocks xmlns:a="http://schemas.openxmlformats.org/drawingml/2006/main" noChangeAspect="1"/>
+          </p:cNvPicPr>
+          <p:nvPr/>
+        </p:nvPicPr>
+        <p:blipFill>
+          <a:blip xmlns:r="http://schemas.openxmlformats.org/officeDocument/2006/relationships" xmlns:a="http://schemas.openxmlformats.org/drawingml/2006/main" r:embed="R2e398bbe141e47cf"/>
+          <a:stretch xmlns:a="http://schemas.openxmlformats.org/drawingml/2006/main"/>
+        </p:blipFill>
+        <p:spPr>
+          <a:xfrm xmlns:a="http://schemas.openxmlformats.org/drawingml/2006/main">
+            <a:off x="9893718" y="209550"/>
+            <a:ext cx="1491414" cy="323850"/>
+          </a:xfrm>
+          <a:prstGeom xmlns:a="http://schemas.openxmlformats.org/drawingml/2006/main" prst="rect">
+            <a:avLst/>
+          </a:prstGeom>
+        </p:spPr>
+      </p:pic>
+      <p:sp>
+        <p:nvSpPr>
+          <p:cNvPr id="6" name="footer-rule">
+            <a:extLst xmlns:a="http://schemas.openxmlformats.org/drawingml/2006/main">
+              <a:ext uri="{FF2B5EF4-FFF2-40B4-BE49-F238E27FC236}">
+                <a16:creationId xmlns:a16="http://schemas.microsoft.com/office/drawing/2014/main" id="{DAE490AE-35F0-4C29-85E1-E0107AD71D5B}"/>
               </a:ext>
             </a:extLst>
           </p:cNvPr>
@@ -7979,10 +8541,10 @@
       </p:sp>
       <p:sp>
         <p:nvSpPr>
-          <p:cNvPr id="5" name="footer">
-            <a:extLst xmlns:a="http://schemas.openxmlformats.org/drawingml/2006/main">
-              <a:ext uri="{FF2B5EF4-FFF2-40B4-BE49-F238E27FC236}">
-                <a16:creationId xmlns:a16="http://schemas.microsoft.com/office/drawing/2014/main" id="{27631398-0929-4D12-88C3-CF67C52B2016}"/>
+          <p:cNvPr id="7" name="footer">
+            <a:extLst xmlns:a="http://schemas.openxmlformats.org/drawingml/2006/main">
+              <a:ext uri="{FF2B5EF4-FFF2-40B4-BE49-F238E27FC236}">
+                <a16:creationId xmlns:a16="http://schemas.microsoft.com/office/drawing/2014/main" id="{59AF80C8-DCFB-4C10-B2BD-D914505489ED}"/>
               </a:ext>
             </a:extLst>
           </p:cNvPr>
@@ -8034,10 +8596,10 @@
       </p:sp>
       <p:sp>
         <p:nvSpPr>
-          <p:cNvPr id="6" name="page-number">
-            <a:extLst xmlns:a="http://schemas.openxmlformats.org/drawingml/2006/main">
-              <a:ext uri="{FF2B5EF4-FFF2-40B4-BE49-F238E27FC236}">
-                <a16:creationId xmlns:a16="http://schemas.microsoft.com/office/drawing/2014/main" id="{719998F4-944C-4678-9C8E-6FC0E4234DAC}"/>
+          <p:cNvPr id="8" name="page-number">
+            <a:extLst xmlns:a="http://schemas.openxmlformats.org/drawingml/2006/main">
+              <a:ext uri="{FF2B5EF4-FFF2-40B4-BE49-F238E27FC236}">
+                <a16:creationId xmlns:a16="http://schemas.microsoft.com/office/drawing/2014/main" id="{63BC4940-11AE-43F1-95A4-CC1068068F87}"/>
               </a:ext>
             </a:extLst>
           </p:cNvPr>
@@ -8090,7 +8652,7 @@
     </p:spTree>
     <p:extLst>
       <p:ext uri="{BB962C8B-B14F-4D97-AF65-F5344CB8AC3E}">
-        <p14:creationId xmlns:p14="http://schemas.microsoft.com/office/powerpoint/2010/main" val="1873332413"/>
+        <p14:creationId xmlns:p14="http://schemas.microsoft.com/office/powerpoint/2010/main" val="399616687"/>
       </p:ext>
     </p:extLst>
   </p:cSld>
@@ -8126,10 +8688,10 @@
       </p:grpSpPr>
       <p:sp>
         <p:nvSpPr>
-          <p:cNvPr id="10" name="radar-label">
-            <a:extLst xmlns:a="http://schemas.openxmlformats.org/drawingml/2006/main">
-              <a:ext uri="{FF2B5EF4-FFF2-40B4-BE49-F238E27FC236}">
-                <a16:creationId xmlns:a16="http://schemas.microsoft.com/office/drawing/2014/main" id="{B2021F54-D31C-4A11-BF43-CDE583E9D82A}"/>
+          <p:cNvPr id="12" name="radar-label">
+            <a:extLst xmlns:a="http://schemas.openxmlformats.org/drawingml/2006/main">
+              <a:ext uri="{FF2B5EF4-FFF2-40B4-BE49-F238E27FC236}">
+                <a16:creationId xmlns:a16="http://schemas.microsoft.com/office/drawing/2014/main" id="{2DBDDE6F-A08D-4171-B935-09C722ED116E}"/>
               </a:ext>
             </a:extLst>
           </p:cNvPr>
@@ -8180,7 +8742,7 @@
           <p:cNvPr id="2" name="radar-text">
             <a:extLst xmlns:a="http://schemas.openxmlformats.org/drawingml/2006/main">
               <a:ext uri="{FF2B5EF4-FFF2-40B4-BE49-F238E27FC236}">
-                <a16:creationId xmlns:a16="http://schemas.microsoft.com/office/drawing/2014/main" id="{82B4D82D-F34F-4E97-8B26-06A20925A072}"/>
+                <a16:creationId xmlns:a16="http://schemas.microsoft.com/office/drawing/2014/main" id="{407C693B-D09D-4F3B-B9AB-283163C12549}"/>
               </a:ext>
             </a:extLst>
           </p:cNvPr>
@@ -8231,7 +8793,7 @@
           <p:cNvPr id="3" name="radar-rule">
             <a:extLst xmlns:a="http://schemas.openxmlformats.org/drawingml/2006/main">
               <a:ext uri="{FF2B5EF4-FFF2-40B4-BE49-F238E27FC236}">
-                <a16:creationId xmlns:a16="http://schemas.microsoft.com/office/drawing/2014/main" id="{B33689D4-686E-4014-A9D3-5B9603B6F161}"/>
+                <a16:creationId xmlns:a16="http://schemas.microsoft.com/office/drawing/2014/main" id="{143FA643-05DE-4B27-8248-56DFB5E0281F}"/>
               </a:ext>
             </a:extLst>
           </p:cNvPr>
@@ -8282,7 +8844,7 @@
           <p:cNvPr id="4" name="ambient-glow">
             <a:extLst xmlns:a="http://schemas.openxmlformats.org/drawingml/2006/main">
               <a:ext uri="{FF2B5EF4-FFF2-40B4-BE49-F238E27FC236}">
-                <a16:creationId xmlns:a16="http://schemas.microsoft.com/office/drawing/2014/main" id="{B7C5A35B-F8E4-4F47-B968-33E5392F9D60}"/>
+                <a16:creationId xmlns:a16="http://schemas.microsoft.com/office/drawing/2014/main" id="{65C2AC57-5245-41F3-BD9F-7FB861727BBB}"/>
               </a:ext>
             </a:extLst>
           </p:cNvPr>
@@ -8319,7 +8881,7 @@
           <p:cNvPr id="5" name="ambient-core">
             <a:extLst xmlns:a="http://schemas.openxmlformats.org/drawingml/2006/main">
               <a:ext uri="{FF2B5EF4-FFF2-40B4-BE49-F238E27FC236}">
-                <a16:creationId xmlns:a16="http://schemas.microsoft.com/office/drawing/2014/main" id="{B47B97D3-52CC-4C3E-8224-AF6C2531563E}"/>
+                <a16:creationId xmlns:a16="http://schemas.microsoft.com/office/drawing/2014/main" id="{64334C51-E363-46C3-8128-D00FB00F65D4}"/>
               </a:ext>
             </a:extLst>
           </p:cNvPr>
@@ -8356,7 +8918,7 @@
           <p:cNvPr id="6" name="eyebrow">
             <a:extLst xmlns:a="http://schemas.openxmlformats.org/drawingml/2006/main">
               <a:ext uri="{FF2B5EF4-FFF2-40B4-BE49-F238E27FC236}">
-                <a16:creationId xmlns:a16="http://schemas.microsoft.com/office/drawing/2014/main" id="{4CA2D0AB-10F5-4C18-9837-87B5EA869E99}"/>
+                <a16:creationId xmlns:a16="http://schemas.microsoft.com/office/drawing/2014/main" id="{F767FB71-A973-4792-9484-D3A36E41093C}"/>
               </a:ext>
             </a:extLst>
           </p:cNvPr>
@@ -8404,10 +8966,69 @@
       </p:sp>
       <p:sp>
         <p:nvSpPr>
-          <p:cNvPr id="7" name="footer-rule">
-            <a:extLst xmlns:a="http://schemas.openxmlformats.org/drawingml/2006/main">
-              <a:ext uri="{FF2B5EF4-FFF2-40B4-BE49-F238E27FC236}">
-                <a16:creationId xmlns:a16="http://schemas.microsoft.com/office/drawing/2014/main" id="{B3F4B599-E729-4F35-B701-E5F823FB1859}"/>
+          <p:cNvPr id="7" name="rescue-point-logo-background">
+            <a:extLst xmlns:a="http://schemas.openxmlformats.org/drawingml/2006/main">
+              <a:ext uri="{FF2B5EF4-FFF2-40B4-BE49-F238E27FC236}">
+                <a16:creationId xmlns:a16="http://schemas.microsoft.com/office/drawing/2014/main" id="{FCC3F5BA-D1A2-4194-B5B5-59BF8167CCFD}"/>
+              </a:ext>
+            </a:extLst>
+          </p:cNvPr>
+          <p:cNvSpPr>
+            <a:spLocks xmlns:a="http://schemas.openxmlformats.org/drawingml/2006/main" noGrp="1"/>
+          </p:cNvSpPr>
+          <p:nvPr/>
+        </p:nvSpPr>
+        <p:spPr>
+          <a:xfrm xmlns:a="http://schemas.openxmlformats.org/drawingml/2006/main">
+            <a:off x="9772650" y="133350"/>
+            <a:ext cx="1733550" cy="457200"/>
+          </a:xfrm>
+          <a:prstGeom xmlns:a="http://schemas.openxmlformats.org/drawingml/2006/main" prst="roundRect">
+            <a:avLst>
+              <a:gd name="adj" fmla="val 16667"/>
+            </a:avLst>
+          </a:prstGeom>
+          <a:solidFill xmlns:a="http://schemas.openxmlformats.org/drawingml/2006/main">
+            <a:srgbClr val="06142E"/>
+          </a:solidFill>
+          <a:ln xmlns:a="http://schemas.openxmlformats.org/drawingml/2006/main" w="9525">
+            <a:solidFill>
+              <a:srgbClr val="1EC5FF">
+                <a:alpha val="33333"/>
+              </a:srgbClr>
+            </a:solidFill>
+            <a:prstDash val="solid"/>
+          </a:ln>
+        </p:spPr>
+      </p:sp>
+      <p:pic>
+        <p:nvPicPr>
+          <p:cNvPr id="21" name="" descr="Figura oficial da documentação dbt usada para explicar: RADAR — Novidade não substitui maturidade: Core 2.0 e Fusion aparecem sem recomendação de produção.."/>
+          <p:cNvPicPr>
+            <a:picLocks xmlns:a="http://schemas.openxmlformats.org/drawingml/2006/main" noChangeAspect="1"/>
+          </p:cNvPicPr>
+          <p:nvPr/>
+        </p:nvPicPr>
+        <p:blipFill>
+          <a:blip xmlns:r="http://schemas.openxmlformats.org/officeDocument/2006/relationships" xmlns:a="http://schemas.openxmlformats.org/drawingml/2006/main" r:embed="R0d0d2a26630f4410"/>
+          <a:stretch xmlns:a="http://schemas.openxmlformats.org/drawingml/2006/main"/>
+        </p:blipFill>
+        <p:spPr>
+          <a:xfrm xmlns:a="http://schemas.openxmlformats.org/drawingml/2006/main">
+            <a:off x="9893718" y="209550"/>
+            <a:ext cx="1491414" cy="323850"/>
+          </a:xfrm>
+          <a:prstGeom xmlns:a="http://schemas.openxmlformats.org/drawingml/2006/main" prst="rect">
+            <a:avLst/>
+          </a:prstGeom>
+        </p:spPr>
+      </p:pic>
+      <p:sp>
+        <p:nvSpPr>
+          <p:cNvPr id="9" name="footer-rule">
+            <a:extLst xmlns:a="http://schemas.openxmlformats.org/drawingml/2006/main">
+              <a:ext uri="{FF2B5EF4-FFF2-40B4-BE49-F238E27FC236}">
+                <a16:creationId xmlns:a16="http://schemas.microsoft.com/office/drawing/2014/main" id="{11A7343A-06B6-4179-A737-F9B42E62028E}"/>
               </a:ext>
             </a:extLst>
           </p:cNvPr>
@@ -8437,10 +9058,10 @@
       </p:sp>
       <p:sp>
         <p:nvSpPr>
-          <p:cNvPr id="8" name="footer">
-            <a:extLst xmlns:a="http://schemas.openxmlformats.org/drawingml/2006/main">
-              <a:ext uri="{FF2B5EF4-FFF2-40B4-BE49-F238E27FC236}">
-                <a16:creationId xmlns:a16="http://schemas.microsoft.com/office/drawing/2014/main" id="{175695EF-ECF7-47A2-845C-C88FBB7E9B62}"/>
+          <p:cNvPr id="10" name="footer">
+            <a:extLst xmlns:a="http://schemas.openxmlformats.org/drawingml/2006/main">
+              <a:ext uri="{FF2B5EF4-FFF2-40B4-BE49-F238E27FC236}">
+                <a16:creationId xmlns:a16="http://schemas.microsoft.com/office/drawing/2014/main" id="{F924688C-A918-4194-AE60-2215829B4522}"/>
               </a:ext>
             </a:extLst>
           </p:cNvPr>
@@ -8492,10 +9113,10 @@
       </p:sp>
       <p:sp>
         <p:nvSpPr>
-          <p:cNvPr id="9" name="page-number">
-            <a:extLst xmlns:a="http://schemas.openxmlformats.org/drawingml/2006/main">
-              <a:ext uri="{FF2B5EF4-FFF2-40B4-BE49-F238E27FC236}">
-                <a16:creationId xmlns:a16="http://schemas.microsoft.com/office/drawing/2014/main" id="{9D4D9AD1-C771-498D-A34C-9EC2AF47D423}"/>
+          <p:cNvPr id="11" name="page-number">
+            <a:extLst xmlns:a="http://schemas.openxmlformats.org/drawingml/2006/main">
+              <a:ext uri="{FF2B5EF4-FFF2-40B4-BE49-F238E27FC236}">
+                <a16:creationId xmlns:a16="http://schemas.microsoft.com/office/drawing/2014/main" id="{E7829B0A-FEC7-48E1-B29E-6E344A5182A2}"/>
               </a:ext>
             </a:extLst>
           </p:cNvPr>
@@ -8548,7 +9169,7 @@
     </p:spTree>
     <p:extLst>
       <p:ext uri="{BB962C8B-B14F-4D97-AF65-F5344CB8AC3E}">
-        <p14:creationId xmlns:p14="http://schemas.microsoft.com/office/powerpoint/2010/main" val="842539552"/>
+        <p14:creationId xmlns:p14="http://schemas.microsoft.com/office/powerpoint/2010/main" val="957948013"/>
       </p:ext>
     </p:extLst>
   </p:cSld>
@@ -8576,10 +9197,10 @@
       </p:grpSpPr>
       <p:sp>
         <p:nvSpPr>
-          <p:cNvPr id="8" name="cta-label">
-            <a:extLst xmlns:a="http://schemas.openxmlformats.org/drawingml/2006/main">
-              <a:ext uri="{FF2B5EF4-FFF2-40B4-BE49-F238E27FC236}">
-                <a16:creationId xmlns:a16="http://schemas.microsoft.com/office/drawing/2014/main" id="{97E780FA-3E8F-4C84-A051-18C87BC5009E}"/>
+          <p:cNvPr id="10" name="cta-label">
+            <a:extLst xmlns:a="http://schemas.openxmlformats.org/drawingml/2006/main">
+              <a:ext uri="{FF2B5EF4-FFF2-40B4-BE49-F238E27FC236}">
+                <a16:creationId xmlns:a16="http://schemas.microsoft.com/office/drawing/2014/main" id="{CD69B747-BE6A-4951-8B93-F55DDA65467B}"/>
               </a:ext>
             </a:extLst>
           </p:cNvPr>
@@ -8630,7 +9251,7 @@
           <p:cNvPr id="2" name="cta">
             <a:extLst xmlns:a="http://schemas.openxmlformats.org/drawingml/2006/main">
               <a:ext uri="{FF2B5EF4-FFF2-40B4-BE49-F238E27FC236}">
-                <a16:creationId xmlns:a16="http://schemas.microsoft.com/office/drawing/2014/main" id="{BA630CC7-BB1F-4229-A4A3-0BC0AAE6984F}"/>
+                <a16:creationId xmlns:a16="http://schemas.microsoft.com/office/drawing/2014/main" id="{078733E2-CAC2-4807-A47E-C3C55F472C95}"/>
               </a:ext>
             </a:extLst>
           </p:cNvPr>
@@ -8681,7 +9302,7 @@
           <p:cNvPr id="3" name="cta-meta">
             <a:extLst xmlns:a="http://schemas.openxmlformats.org/drawingml/2006/main">
               <a:ext uri="{FF2B5EF4-FFF2-40B4-BE49-F238E27FC236}">
-                <a16:creationId xmlns:a16="http://schemas.microsoft.com/office/drawing/2014/main" id="{213418D3-BE8B-4BD4-8659-CD34D2732041}"/>
+                <a16:creationId xmlns:a16="http://schemas.microsoft.com/office/drawing/2014/main" id="{8DE23413-C13C-4C13-BC84-1E05EE77B3E3}"/>
               </a:ext>
             </a:extLst>
           </p:cNvPr>
@@ -8732,7 +9353,7 @@
           <p:cNvPr id="4" name="eyebrow">
             <a:extLst xmlns:a="http://schemas.openxmlformats.org/drawingml/2006/main">
               <a:ext uri="{FF2B5EF4-FFF2-40B4-BE49-F238E27FC236}">
-                <a16:creationId xmlns:a16="http://schemas.microsoft.com/office/drawing/2014/main" id="{65DDFA44-6DDD-4865-AAA2-D6000F9A5E51}"/>
+                <a16:creationId xmlns:a16="http://schemas.microsoft.com/office/drawing/2014/main" id="{21ED3FE6-17C1-4CDC-9E1B-9ECAAE9AC23D}"/>
               </a:ext>
             </a:extLst>
           </p:cNvPr>
@@ -8780,10 +9401,69 @@
       </p:sp>
       <p:sp>
         <p:nvSpPr>
-          <p:cNvPr id="5" name="footer-rule">
-            <a:extLst xmlns:a="http://schemas.openxmlformats.org/drawingml/2006/main">
-              <a:ext uri="{FF2B5EF4-FFF2-40B4-BE49-F238E27FC236}">
-                <a16:creationId xmlns:a16="http://schemas.microsoft.com/office/drawing/2014/main" id="{22E8E095-A18B-442A-AB7A-669E7393CF55}"/>
+          <p:cNvPr id="5" name="rescue-point-logo-background">
+            <a:extLst xmlns:a="http://schemas.openxmlformats.org/drawingml/2006/main">
+              <a:ext uri="{FF2B5EF4-FFF2-40B4-BE49-F238E27FC236}">
+                <a16:creationId xmlns:a16="http://schemas.microsoft.com/office/drawing/2014/main" id="{0D4F83D5-C305-496D-9446-40BEF91E8DBD}"/>
+              </a:ext>
+            </a:extLst>
+          </p:cNvPr>
+          <p:cNvSpPr>
+            <a:spLocks xmlns:a="http://schemas.openxmlformats.org/drawingml/2006/main" noGrp="1"/>
+          </p:cNvSpPr>
+          <p:nvPr/>
+        </p:nvSpPr>
+        <p:spPr>
+          <a:xfrm xmlns:a="http://schemas.openxmlformats.org/drawingml/2006/main">
+            <a:off x="9772650" y="133350"/>
+            <a:ext cx="1733550" cy="457200"/>
+          </a:xfrm>
+          <a:prstGeom xmlns:a="http://schemas.openxmlformats.org/drawingml/2006/main" prst="roundRect">
+            <a:avLst>
+              <a:gd name="adj" fmla="val 16667"/>
+            </a:avLst>
+          </a:prstGeom>
+          <a:solidFill xmlns:a="http://schemas.openxmlformats.org/drawingml/2006/main">
+            <a:srgbClr val="06142E"/>
+          </a:solidFill>
+          <a:ln xmlns:a="http://schemas.openxmlformats.org/drawingml/2006/main" w="9525">
+            <a:solidFill>
+              <a:srgbClr val="1EC5FF">
+                <a:alpha val="33333"/>
+              </a:srgbClr>
+            </a:solidFill>
+            <a:prstDash val="solid"/>
+          </a:ln>
+        </p:spPr>
+      </p:sp>
+      <p:pic>
+        <p:nvPicPr>
+          <p:cNvPr id="17" name="" descr="Figura oficial da documentação dbt usada para explicar: PRÓXIMO PASSO — Reproduza o checkpoint e abra manifest.json antes do episódio 2.."/>
+          <p:cNvPicPr>
+            <a:picLocks xmlns:a="http://schemas.openxmlformats.org/drawingml/2006/main" noChangeAspect="1"/>
+          </p:cNvPicPr>
+          <p:nvPr/>
+        </p:nvPicPr>
+        <p:blipFill>
+          <a:blip xmlns:r="http://schemas.openxmlformats.org/officeDocument/2006/relationships" xmlns:a="http://schemas.openxmlformats.org/drawingml/2006/main" r:embed="Rd97f9452431c414c"/>
+          <a:stretch xmlns:a="http://schemas.openxmlformats.org/drawingml/2006/main"/>
+        </p:blipFill>
+        <p:spPr>
+          <a:xfrm xmlns:a="http://schemas.openxmlformats.org/drawingml/2006/main">
+            <a:off x="9893718" y="209550"/>
+            <a:ext cx="1491414" cy="323850"/>
+          </a:xfrm>
+          <a:prstGeom xmlns:a="http://schemas.openxmlformats.org/drawingml/2006/main" prst="rect">
+            <a:avLst/>
+          </a:prstGeom>
+        </p:spPr>
+      </p:pic>
+      <p:sp>
+        <p:nvSpPr>
+          <p:cNvPr id="7" name="footer-rule">
+            <a:extLst xmlns:a="http://schemas.openxmlformats.org/drawingml/2006/main">
+              <a:ext uri="{FF2B5EF4-FFF2-40B4-BE49-F238E27FC236}">
+                <a16:creationId xmlns:a16="http://schemas.microsoft.com/office/drawing/2014/main" id="{2034053B-9019-4EA4-9D8B-74B94300786D}"/>
               </a:ext>
             </a:extLst>
           </p:cNvPr>
@@ -8813,10 +9493,10 @@
       </p:sp>
       <p:sp>
         <p:nvSpPr>
-          <p:cNvPr id="6" name="footer">
-            <a:extLst xmlns:a="http://schemas.openxmlformats.org/drawingml/2006/main">
-              <a:ext uri="{FF2B5EF4-FFF2-40B4-BE49-F238E27FC236}">
-                <a16:creationId xmlns:a16="http://schemas.microsoft.com/office/drawing/2014/main" id="{91027B87-5772-471A-BDA3-84706D64DF11}"/>
+          <p:cNvPr id="8" name="footer">
+            <a:extLst xmlns:a="http://schemas.openxmlformats.org/drawingml/2006/main">
+              <a:ext uri="{FF2B5EF4-FFF2-40B4-BE49-F238E27FC236}">
+                <a16:creationId xmlns:a16="http://schemas.microsoft.com/office/drawing/2014/main" id="{F759919D-8719-4FD4-BC98-5C05B2C5E216}"/>
               </a:ext>
             </a:extLst>
           </p:cNvPr>
@@ -8868,10 +9548,10 @@
       </p:sp>
       <p:sp>
         <p:nvSpPr>
-          <p:cNvPr id="7" name="page-number">
-            <a:extLst xmlns:a="http://schemas.openxmlformats.org/drawingml/2006/main">
-              <a:ext uri="{FF2B5EF4-FFF2-40B4-BE49-F238E27FC236}">
-                <a16:creationId xmlns:a16="http://schemas.microsoft.com/office/drawing/2014/main" id="{6B3414CC-F1B2-4171-B84D-1A9B41A10E92}"/>
+          <p:cNvPr id="9" name="page-number">
+            <a:extLst xmlns:a="http://schemas.openxmlformats.org/drawingml/2006/main">
+              <a:ext uri="{FF2B5EF4-FFF2-40B4-BE49-F238E27FC236}">
+                <a16:creationId xmlns:a16="http://schemas.microsoft.com/office/drawing/2014/main" id="{9F340568-986C-4EA4-A34B-81D78F8AAD7E}"/>
               </a:ext>
             </a:extLst>
           </p:cNvPr>
@@ -8924,7 +9604,7 @@
     </p:spTree>
     <p:extLst>
       <p:ext uri="{BB962C8B-B14F-4D97-AF65-F5344CB8AC3E}">
-        <p14:creationId xmlns:p14="http://schemas.microsoft.com/office/powerpoint/2010/main" val="95176112"/>
+        <p14:creationId xmlns:p14="http://schemas.microsoft.com/office/powerpoint/2010/main" val="1275072452"/>
       </p:ext>
     </p:extLst>
   </p:cSld>
@@ -8952,10 +9632,10 @@
       </p:grpSpPr>
       <p:sp>
         <p:nvSpPr>
-          <p:cNvPr id="10" name="hook">
-            <a:extLst xmlns:a="http://schemas.openxmlformats.org/drawingml/2006/main">
-              <a:ext uri="{FF2B5EF4-FFF2-40B4-BE49-F238E27FC236}">
-                <a16:creationId xmlns:a16="http://schemas.microsoft.com/office/drawing/2014/main" id="{19E65929-90E2-4662-A842-06D5922AD99A}"/>
+          <p:cNvPr id="12" name="hook">
+            <a:extLst xmlns:a="http://schemas.openxmlformats.org/drawingml/2006/main">
+              <a:ext uri="{FF2B5EF4-FFF2-40B4-BE49-F238E27FC236}">
+                <a16:creationId xmlns:a16="http://schemas.microsoft.com/office/drawing/2014/main" id="{53C51127-EE22-4FD9-A095-D864D5B0E3E7}"/>
               </a:ext>
             </a:extLst>
           </p:cNvPr>
@@ -9006,7 +9686,7 @@
           <p:cNvPr id="2" name="hook-rule">
             <a:extLst xmlns:a="http://schemas.openxmlformats.org/drawingml/2006/main">
               <a:ext uri="{FF2B5EF4-FFF2-40B4-BE49-F238E27FC236}">
-                <a16:creationId xmlns:a16="http://schemas.microsoft.com/office/drawing/2014/main" id="{E8C18D91-C792-420B-8BCE-DEB38322A1CE}"/>
+                <a16:creationId xmlns:a16="http://schemas.microsoft.com/office/drawing/2014/main" id="{F39B574D-7DDC-4863-8EE5-538421F35B9F}"/>
               </a:ext>
             </a:extLst>
           </p:cNvPr>
@@ -9037,7 +9717,7 @@
           <p:cNvPr id="3" name="hook-label">
             <a:extLst xmlns:a="http://schemas.openxmlformats.org/drawingml/2006/main">
               <a:ext uri="{FF2B5EF4-FFF2-40B4-BE49-F238E27FC236}">
-                <a16:creationId xmlns:a16="http://schemas.microsoft.com/office/drawing/2014/main" id="{1B40B25A-AF68-4F4F-90EB-D6BB0142DAFB}"/>
+                <a16:creationId xmlns:a16="http://schemas.microsoft.com/office/drawing/2014/main" id="{D9CA356E-203E-4F8D-BFF6-C9433051549F}"/>
               </a:ext>
             </a:extLst>
           </p:cNvPr>
@@ -9088,7 +9768,7 @@
           <p:cNvPr id="4" name="diagram-surface">
             <a:extLst xmlns:a="http://schemas.openxmlformats.org/drawingml/2006/main">
               <a:ext uri="{FF2B5EF4-FFF2-40B4-BE49-F238E27FC236}">
-                <a16:creationId xmlns:a16="http://schemas.microsoft.com/office/drawing/2014/main" id="{92E87DAE-2A53-4B0D-B5D7-03A8BCEBA2F4}"/>
+                <a16:creationId xmlns:a16="http://schemas.microsoft.com/office/drawing/2014/main" id="{A70B09BF-F606-4583-95DA-4DEC6A86B05C}"/>
               </a:ext>
             </a:extLst>
           </p:cNvPr>
@@ -9120,14 +9800,14 @@
       </p:sp>
       <p:pic>
         <p:nvPicPr>
-          <p:cNvPr id="16" name="" descr="Diagrama didático autoral que apresenta: Título de vídeo não é evidência. Manifest, testes e resultados executáveis são. — A pergunta que guia a aula."/>
+          <p:cNvPr id="19" name="" descr="Diagrama didático autoral que apresenta: Título de vídeo não é evidência. Manifest, testes e resultados executáveis são. — A pergunta que guia a aula."/>
           <p:cNvPicPr>
             <a:picLocks xmlns:a="http://schemas.openxmlformats.org/drawingml/2006/main" noChangeAspect="1"/>
           </p:cNvPicPr>
           <p:nvPr/>
         </p:nvPicPr>
         <p:blipFill>
-          <a:blip xmlns:r="http://schemas.openxmlformats.org/officeDocument/2006/relationships" xmlns:a="http://schemas.openxmlformats.org/drawingml/2006/main" r:embed="R86a6ea56926c401d"/>
+          <a:blip xmlns:r="http://schemas.openxmlformats.org/officeDocument/2006/relationships" xmlns:a="http://schemas.openxmlformats.org/drawingml/2006/main" r:embed="Ra1f4fab17b324c1a"/>
           <a:stretch xmlns:a="http://schemas.openxmlformats.org/drawingml/2006/main"/>
         </p:blipFill>
         <p:spPr>
@@ -9145,7 +9825,7 @@
           <p:cNvPr id="6" name="eyebrow">
             <a:extLst xmlns:a="http://schemas.openxmlformats.org/drawingml/2006/main">
               <a:ext uri="{FF2B5EF4-FFF2-40B4-BE49-F238E27FC236}">
-                <a16:creationId xmlns:a16="http://schemas.microsoft.com/office/drawing/2014/main" id="{A94DC450-E35F-4592-BBC0-9E7EAB8F648A}"/>
+                <a16:creationId xmlns:a16="http://schemas.microsoft.com/office/drawing/2014/main" id="{B7271DCF-F0C9-470C-AB9A-E9746552356E}"/>
               </a:ext>
             </a:extLst>
           </p:cNvPr>
@@ -9193,10 +9873,69 @@
       </p:sp>
       <p:sp>
         <p:nvSpPr>
-          <p:cNvPr id="7" name="footer-rule">
-            <a:extLst xmlns:a="http://schemas.openxmlformats.org/drawingml/2006/main">
-              <a:ext uri="{FF2B5EF4-FFF2-40B4-BE49-F238E27FC236}">
-                <a16:creationId xmlns:a16="http://schemas.microsoft.com/office/drawing/2014/main" id="{99071F4F-0EC1-4CC4-B41B-8CCD86BA568E}"/>
+          <p:cNvPr id="7" name="rescue-point-logo-background">
+            <a:extLst xmlns:a="http://schemas.openxmlformats.org/drawingml/2006/main">
+              <a:ext uri="{FF2B5EF4-FFF2-40B4-BE49-F238E27FC236}">
+                <a16:creationId xmlns:a16="http://schemas.microsoft.com/office/drawing/2014/main" id="{8949F518-691D-41EC-BCA6-40F1DC665478}"/>
+              </a:ext>
+            </a:extLst>
+          </p:cNvPr>
+          <p:cNvSpPr>
+            <a:spLocks xmlns:a="http://schemas.openxmlformats.org/drawingml/2006/main" noGrp="1"/>
+          </p:cNvSpPr>
+          <p:nvPr/>
+        </p:nvSpPr>
+        <p:spPr>
+          <a:xfrm xmlns:a="http://schemas.openxmlformats.org/drawingml/2006/main">
+            <a:off x="9772650" y="133350"/>
+            <a:ext cx="1733550" cy="457200"/>
+          </a:xfrm>
+          <a:prstGeom xmlns:a="http://schemas.openxmlformats.org/drawingml/2006/main" prst="roundRect">
+            <a:avLst>
+              <a:gd name="adj" fmla="val 16667"/>
+            </a:avLst>
+          </a:prstGeom>
+          <a:solidFill xmlns:a="http://schemas.openxmlformats.org/drawingml/2006/main">
+            <a:srgbClr val="06142E"/>
+          </a:solidFill>
+          <a:ln xmlns:a="http://schemas.openxmlformats.org/drawingml/2006/main" w="9525">
+            <a:solidFill>
+              <a:srgbClr val="1EC5FF">
+                <a:alpha val="33333"/>
+              </a:srgbClr>
+            </a:solidFill>
+            <a:prstDash val="solid"/>
+          </a:ln>
+        </p:spPr>
+      </p:sp>
+      <p:pic>
+        <p:nvPicPr>
+          <p:cNvPr id="22" name="" descr="Diagrama didático autoral que apresenta: Título de vídeo não é evidência. Manifest, testes e resultados executáveis são. — A pergunta que guia a aula."/>
+          <p:cNvPicPr>
+            <a:picLocks xmlns:a="http://schemas.openxmlformats.org/drawingml/2006/main" noChangeAspect="1"/>
+          </p:cNvPicPr>
+          <p:nvPr/>
+        </p:nvPicPr>
+        <p:blipFill>
+          <a:blip xmlns:r="http://schemas.openxmlformats.org/officeDocument/2006/relationships" xmlns:a="http://schemas.openxmlformats.org/drawingml/2006/main" r:embed="Rb97adff34ec04e1a"/>
+          <a:stretch xmlns:a="http://schemas.openxmlformats.org/drawingml/2006/main"/>
+        </p:blipFill>
+        <p:spPr>
+          <a:xfrm xmlns:a="http://schemas.openxmlformats.org/drawingml/2006/main">
+            <a:off x="9893718" y="209550"/>
+            <a:ext cx="1491414" cy="323850"/>
+          </a:xfrm>
+          <a:prstGeom xmlns:a="http://schemas.openxmlformats.org/drawingml/2006/main" prst="rect">
+            <a:avLst/>
+          </a:prstGeom>
+        </p:spPr>
+      </p:pic>
+      <p:sp>
+        <p:nvSpPr>
+          <p:cNvPr id="9" name="footer-rule">
+            <a:extLst xmlns:a="http://schemas.openxmlformats.org/drawingml/2006/main">
+              <a:ext uri="{FF2B5EF4-FFF2-40B4-BE49-F238E27FC236}">
+                <a16:creationId xmlns:a16="http://schemas.microsoft.com/office/drawing/2014/main" id="{4270807B-2C2B-4B69-B463-E0D60246D22C}"/>
               </a:ext>
             </a:extLst>
           </p:cNvPr>
@@ -9226,10 +9965,10 @@
       </p:sp>
       <p:sp>
         <p:nvSpPr>
-          <p:cNvPr id="8" name="footer">
-            <a:extLst xmlns:a="http://schemas.openxmlformats.org/drawingml/2006/main">
-              <a:ext uri="{FF2B5EF4-FFF2-40B4-BE49-F238E27FC236}">
-                <a16:creationId xmlns:a16="http://schemas.microsoft.com/office/drawing/2014/main" id="{689797E8-C594-424F-8434-C6CA94362CAE}"/>
+          <p:cNvPr id="10" name="footer">
+            <a:extLst xmlns:a="http://schemas.openxmlformats.org/drawingml/2006/main">
+              <a:ext uri="{FF2B5EF4-FFF2-40B4-BE49-F238E27FC236}">
+                <a16:creationId xmlns:a16="http://schemas.microsoft.com/office/drawing/2014/main" id="{E58C2D3F-2767-48BC-B60E-592D2E51EF98}"/>
               </a:ext>
             </a:extLst>
           </p:cNvPr>
@@ -9281,10 +10020,10 @@
       </p:sp>
       <p:sp>
         <p:nvSpPr>
-          <p:cNvPr id="9" name="page-number">
-            <a:extLst xmlns:a="http://schemas.openxmlformats.org/drawingml/2006/main">
-              <a:ext uri="{FF2B5EF4-FFF2-40B4-BE49-F238E27FC236}">
-                <a16:creationId xmlns:a16="http://schemas.microsoft.com/office/drawing/2014/main" id="{D4D19934-93E0-4F18-B28A-2549E7E4F7D1}"/>
+          <p:cNvPr id="11" name="page-number">
+            <a:extLst xmlns:a="http://schemas.openxmlformats.org/drawingml/2006/main">
+              <a:ext uri="{FF2B5EF4-FFF2-40B4-BE49-F238E27FC236}">
+                <a16:creationId xmlns:a16="http://schemas.microsoft.com/office/drawing/2014/main" id="{2B3F48EC-58D4-437E-B844-E92ACA240B57}"/>
               </a:ext>
             </a:extLst>
           </p:cNvPr>
@@ -9337,7 +10076,7 @@
     </p:spTree>
     <p:extLst>
       <p:ext uri="{BB962C8B-B14F-4D97-AF65-F5344CB8AC3E}">
-        <p14:creationId xmlns:p14="http://schemas.microsoft.com/office/powerpoint/2010/main" val="289322860"/>
+        <p14:creationId xmlns:p14="http://schemas.microsoft.com/office/powerpoint/2010/main" val="801537020"/>
       </p:ext>
     </p:extLst>
   </p:cSld>
@@ -9373,10 +10112,10 @@
       </p:grpSpPr>
       <p:sp>
         <p:nvSpPr>
-          <p:cNvPr id="14" name="slide-title">
-            <a:extLst xmlns:a="http://schemas.openxmlformats.org/drawingml/2006/main">
-              <a:ext uri="{FF2B5EF4-FFF2-40B4-BE49-F238E27FC236}">
-                <a16:creationId xmlns:a16="http://schemas.microsoft.com/office/drawing/2014/main" id="{E4AC106E-22CE-4885-AD77-8388AD255B05}"/>
+          <p:cNvPr id="16" name="slide-title">
+            <a:extLst xmlns:a="http://schemas.openxmlformats.org/drawingml/2006/main">
+              <a:ext uri="{FF2B5EF4-FFF2-40B4-BE49-F238E27FC236}">
+                <a16:creationId xmlns:a16="http://schemas.microsoft.com/office/drawing/2014/main" id="{8F2C7011-5D80-41EC-8B11-CAF294A37688}"/>
               </a:ext>
             </a:extLst>
           </p:cNvPr>
@@ -9427,7 +10166,7 @@
           <p:cNvPr id="2" name="step-num-1">
             <a:extLst xmlns:a="http://schemas.openxmlformats.org/drawingml/2006/main">
               <a:ext uri="{FF2B5EF4-FFF2-40B4-BE49-F238E27FC236}">
-                <a16:creationId xmlns:a16="http://schemas.microsoft.com/office/drawing/2014/main" id="{0C0C9C55-0D2F-4E90-9F66-F0EB3BEC9E9D}"/>
+                <a16:creationId xmlns:a16="http://schemas.microsoft.com/office/drawing/2014/main" id="{57431078-4089-45B4-AAE2-F8638F6B9225}"/>
               </a:ext>
             </a:extLst>
           </p:cNvPr>
@@ -9478,7 +10217,7 @@
           <p:cNvPr id="3" name="step-label-1">
             <a:extLst xmlns:a="http://schemas.openxmlformats.org/drawingml/2006/main">
               <a:ext uri="{FF2B5EF4-FFF2-40B4-BE49-F238E27FC236}">
-                <a16:creationId xmlns:a16="http://schemas.microsoft.com/office/drawing/2014/main" id="{C1DB482C-8F46-4212-B525-F832EB86C105}"/>
+                <a16:creationId xmlns:a16="http://schemas.microsoft.com/office/drawing/2014/main" id="{2CE15D1B-35C9-41C7-8387-10833087C99A}"/>
               </a:ext>
             </a:extLst>
           </p:cNvPr>
@@ -9529,7 +10268,7 @@
           <p:cNvPr id="4" name="step-line-1">
             <a:extLst xmlns:a="http://schemas.openxmlformats.org/drawingml/2006/main">
               <a:ext uri="{FF2B5EF4-FFF2-40B4-BE49-F238E27FC236}">
-                <a16:creationId xmlns:a16="http://schemas.microsoft.com/office/drawing/2014/main" id="{F1EC39F4-7F02-4659-8FD8-7A297EFC8F0D}"/>
+                <a16:creationId xmlns:a16="http://schemas.microsoft.com/office/drawing/2014/main" id="{282A8870-FDD1-49AD-8E85-7E6E25172C32}"/>
               </a:ext>
             </a:extLst>
           </p:cNvPr>
@@ -9560,7 +10299,7 @@
           <p:cNvPr id="5" name="step-num-2">
             <a:extLst xmlns:a="http://schemas.openxmlformats.org/drawingml/2006/main">
               <a:ext uri="{FF2B5EF4-FFF2-40B4-BE49-F238E27FC236}">
-                <a16:creationId xmlns:a16="http://schemas.microsoft.com/office/drawing/2014/main" id="{9F3DD033-79C4-4777-AB48-78E7B1827FF9}"/>
+                <a16:creationId xmlns:a16="http://schemas.microsoft.com/office/drawing/2014/main" id="{915492CD-3F1F-442D-A416-6BBBACF62B89}"/>
               </a:ext>
             </a:extLst>
           </p:cNvPr>
@@ -9611,7 +10350,7 @@
           <p:cNvPr id="6" name="step-label-2">
             <a:extLst xmlns:a="http://schemas.openxmlformats.org/drawingml/2006/main">
               <a:ext uri="{FF2B5EF4-FFF2-40B4-BE49-F238E27FC236}">
-                <a16:creationId xmlns:a16="http://schemas.microsoft.com/office/drawing/2014/main" id="{014C1272-0490-4CB2-A151-0E3703AFE776}"/>
+                <a16:creationId xmlns:a16="http://schemas.microsoft.com/office/drawing/2014/main" id="{4FF60738-E312-4650-994D-6404C3DA7500}"/>
               </a:ext>
             </a:extLst>
           </p:cNvPr>
@@ -9662,7 +10401,7 @@
           <p:cNvPr id="7" name="step-line-2">
             <a:extLst xmlns:a="http://schemas.openxmlformats.org/drawingml/2006/main">
               <a:ext uri="{FF2B5EF4-FFF2-40B4-BE49-F238E27FC236}">
-                <a16:creationId xmlns:a16="http://schemas.microsoft.com/office/drawing/2014/main" id="{1EB6511F-9E64-4FEF-9BF7-B874670EE1AC}"/>
+                <a16:creationId xmlns:a16="http://schemas.microsoft.com/office/drawing/2014/main" id="{FFC55675-3F36-4D74-9D10-39696CF064D8}"/>
               </a:ext>
             </a:extLst>
           </p:cNvPr>
@@ -9693,7 +10432,7 @@
           <p:cNvPr id="8" name="step-num-3">
             <a:extLst xmlns:a="http://schemas.openxmlformats.org/drawingml/2006/main">
               <a:ext uri="{FF2B5EF4-FFF2-40B4-BE49-F238E27FC236}">
-                <a16:creationId xmlns:a16="http://schemas.microsoft.com/office/drawing/2014/main" id="{26F5D98F-3CFC-4ADB-872B-92CDA3304EBE}"/>
+                <a16:creationId xmlns:a16="http://schemas.microsoft.com/office/drawing/2014/main" id="{19FBBB97-507C-4234-8BC9-8F3F596C83BA}"/>
               </a:ext>
             </a:extLst>
           </p:cNvPr>
@@ -9744,7 +10483,7 @@
           <p:cNvPr id="9" name="step-label-3">
             <a:extLst xmlns:a="http://schemas.openxmlformats.org/drawingml/2006/main">
               <a:ext uri="{FF2B5EF4-FFF2-40B4-BE49-F238E27FC236}">
-                <a16:creationId xmlns:a16="http://schemas.microsoft.com/office/drawing/2014/main" id="{070D6A77-D119-448C-887C-FCB697816A39}"/>
+                <a16:creationId xmlns:a16="http://schemas.microsoft.com/office/drawing/2014/main" id="{7522E14C-7F4E-4FD2-B8B8-D03A7DFC843A}"/>
               </a:ext>
             </a:extLst>
           </p:cNvPr>
@@ -9795,7 +10534,7 @@
           <p:cNvPr id="10" name="eyebrow">
             <a:extLst xmlns:a="http://schemas.openxmlformats.org/drawingml/2006/main">
               <a:ext uri="{FF2B5EF4-FFF2-40B4-BE49-F238E27FC236}">
-                <a16:creationId xmlns:a16="http://schemas.microsoft.com/office/drawing/2014/main" id="{3AEEEE54-4948-49D8-B069-01F1C4DE897F}"/>
+                <a16:creationId xmlns:a16="http://schemas.microsoft.com/office/drawing/2014/main" id="{C013A533-1F9B-4E1D-A642-1831EADB0231}"/>
               </a:ext>
             </a:extLst>
           </p:cNvPr>
@@ -9843,10 +10582,69 @@
       </p:sp>
       <p:sp>
         <p:nvSpPr>
-          <p:cNvPr id="11" name="footer-rule">
-            <a:extLst xmlns:a="http://schemas.openxmlformats.org/drawingml/2006/main">
-              <a:ext uri="{FF2B5EF4-FFF2-40B4-BE49-F238E27FC236}">
-                <a16:creationId xmlns:a16="http://schemas.microsoft.com/office/drawing/2014/main" id="{D9FB2CBC-766A-4047-8BF1-5944AB60FE89}"/>
+          <p:cNvPr id="11" name="rescue-point-logo-background">
+            <a:extLst xmlns:a="http://schemas.openxmlformats.org/drawingml/2006/main">
+              <a:ext uri="{FF2B5EF4-FFF2-40B4-BE49-F238E27FC236}">
+                <a16:creationId xmlns:a16="http://schemas.microsoft.com/office/drawing/2014/main" id="{55334EAC-C42A-47E8-B5B3-147B12F5C0C8}"/>
+              </a:ext>
+            </a:extLst>
+          </p:cNvPr>
+          <p:cNvSpPr>
+            <a:spLocks xmlns:a="http://schemas.openxmlformats.org/drawingml/2006/main" noGrp="1"/>
+          </p:cNvSpPr>
+          <p:nvPr/>
+        </p:nvSpPr>
+        <p:spPr>
+          <a:xfrm xmlns:a="http://schemas.openxmlformats.org/drawingml/2006/main">
+            <a:off x="9772650" y="133350"/>
+            <a:ext cx="1733550" cy="457200"/>
+          </a:xfrm>
+          <a:prstGeom xmlns:a="http://schemas.openxmlformats.org/drawingml/2006/main" prst="roundRect">
+            <a:avLst>
+              <a:gd name="adj" fmla="val 16667"/>
+            </a:avLst>
+          </a:prstGeom>
+          <a:solidFill xmlns:a="http://schemas.openxmlformats.org/drawingml/2006/main">
+            <a:srgbClr val="06142E"/>
+          </a:solidFill>
+          <a:ln xmlns:a="http://schemas.openxmlformats.org/drawingml/2006/main" w="9525">
+            <a:solidFill>
+              <a:srgbClr val="1EC5FF">
+                <a:alpha val="33333"/>
+              </a:srgbClr>
+            </a:solidFill>
+            <a:prstDash val="solid"/>
+          </a:ln>
+        </p:spPr>
+      </p:sp>
+      <p:pic>
+        <p:nvPicPr>
+          <p:cNvPr id="29" name="" descr="Figura oficial da documentação dbt usada para explicar: Ao final, você consegue... — 01."/>
+          <p:cNvPicPr>
+            <a:picLocks xmlns:a="http://schemas.openxmlformats.org/drawingml/2006/main" noChangeAspect="1"/>
+          </p:cNvPicPr>
+          <p:nvPr/>
+        </p:nvPicPr>
+        <p:blipFill>
+          <a:blip xmlns:r="http://schemas.openxmlformats.org/officeDocument/2006/relationships" xmlns:a="http://schemas.openxmlformats.org/drawingml/2006/main" r:embed="R5fdd9375bacc4cd4"/>
+          <a:stretch xmlns:a="http://schemas.openxmlformats.org/drawingml/2006/main"/>
+        </p:blipFill>
+        <p:spPr>
+          <a:xfrm xmlns:a="http://schemas.openxmlformats.org/drawingml/2006/main">
+            <a:off x="9893718" y="209550"/>
+            <a:ext cx="1491414" cy="323850"/>
+          </a:xfrm>
+          <a:prstGeom xmlns:a="http://schemas.openxmlformats.org/drawingml/2006/main" prst="rect">
+            <a:avLst/>
+          </a:prstGeom>
+        </p:spPr>
+      </p:pic>
+      <p:sp>
+        <p:nvSpPr>
+          <p:cNvPr id="13" name="footer-rule">
+            <a:extLst xmlns:a="http://schemas.openxmlformats.org/drawingml/2006/main">
+              <a:ext uri="{FF2B5EF4-FFF2-40B4-BE49-F238E27FC236}">
+                <a16:creationId xmlns:a16="http://schemas.microsoft.com/office/drawing/2014/main" id="{F782B02E-5E98-4D5B-BD41-5374862C1678}"/>
               </a:ext>
             </a:extLst>
           </p:cNvPr>
@@ -9876,10 +10674,10 @@
       </p:sp>
       <p:sp>
         <p:nvSpPr>
-          <p:cNvPr id="12" name="footer">
-            <a:extLst xmlns:a="http://schemas.openxmlformats.org/drawingml/2006/main">
-              <a:ext uri="{FF2B5EF4-FFF2-40B4-BE49-F238E27FC236}">
-                <a16:creationId xmlns:a16="http://schemas.microsoft.com/office/drawing/2014/main" id="{454AA7E4-422A-43A1-A2DF-FB78E30D158F}"/>
+          <p:cNvPr id="14" name="footer">
+            <a:extLst xmlns:a="http://schemas.openxmlformats.org/drawingml/2006/main">
+              <a:ext uri="{FF2B5EF4-FFF2-40B4-BE49-F238E27FC236}">
+                <a16:creationId xmlns:a16="http://schemas.microsoft.com/office/drawing/2014/main" id="{A7128CC0-5C92-4005-ADFA-9AC340CD9775}"/>
               </a:ext>
             </a:extLst>
           </p:cNvPr>
@@ -9931,10 +10729,10 @@
       </p:sp>
       <p:sp>
         <p:nvSpPr>
-          <p:cNvPr id="13" name="page-number">
-            <a:extLst xmlns:a="http://schemas.openxmlformats.org/drawingml/2006/main">
-              <a:ext uri="{FF2B5EF4-FFF2-40B4-BE49-F238E27FC236}">
-                <a16:creationId xmlns:a16="http://schemas.microsoft.com/office/drawing/2014/main" id="{D87A7FE4-FDDA-4181-B906-D037BBE4F4D7}"/>
+          <p:cNvPr id="15" name="page-number">
+            <a:extLst xmlns:a="http://schemas.openxmlformats.org/drawingml/2006/main">
+              <a:ext uri="{FF2B5EF4-FFF2-40B4-BE49-F238E27FC236}">
+                <a16:creationId xmlns:a16="http://schemas.microsoft.com/office/drawing/2014/main" id="{1FA4B8BE-304A-4476-B94B-4B741A4F8DDB}"/>
               </a:ext>
             </a:extLst>
           </p:cNvPr>
@@ -9987,7 +10785,7 @@
     </p:spTree>
     <p:extLst>
       <p:ext uri="{BB962C8B-B14F-4D97-AF65-F5344CB8AC3E}">
-        <p14:creationId xmlns:p14="http://schemas.microsoft.com/office/powerpoint/2010/main" val="387349629"/>
+        <p14:creationId xmlns:p14="http://schemas.microsoft.com/office/powerpoint/2010/main" val="101098534"/>
       </p:ext>
     </p:extLst>
   </p:cSld>
@@ -10023,10 +10821,10 @@
       </p:grpSpPr>
       <p:sp>
         <p:nvSpPr>
-          <p:cNvPr id="11" name="slide-title">
-            <a:extLst xmlns:a="http://schemas.openxmlformats.org/drawingml/2006/main">
-              <a:ext uri="{FF2B5EF4-FFF2-40B4-BE49-F238E27FC236}">
-                <a16:creationId xmlns:a16="http://schemas.microsoft.com/office/drawing/2014/main" id="{0DD735E2-AA12-4739-9890-42EE66B1AFDE}"/>
+          <p:cNvPr id="13" name="slide-title">
+            <a:extLst xmlns:a="http://schemas.openxmlformats.org/drawingml/2006/main">
+              <a:ext uri="{FF2B5EF4-FFF2-40B4-BE49-F238E27FC236}">
+                <a16:creationId xmlns:a16="http://schemas.microsoft.com/office/drawing/2014/main" id="{2FF3D28D-E78D-444B-8B14-842461F31A6B}"/>
               </a:ext>
             </a:extLst>
           </p:cNvPr>
@@ -10077,7 +10875,7 @@
           <p:cNvPr id="2" name="slide-subtitle">
             <a:extLst xmlns:a="http://schemas.openxmlformats.org/drawingml/2006/main">
               <a:ext uri="{FF2B5EF4-FFF2-40B4-BE49-F238E27FC236}">
-                <a16:creationId xmlns:a16="http://schemas.microsoft.com/office/drawing/2014/main" id="{413BBA1B-C1D2-4BC7-9442-CF7FA6924AF3}"/>
+                <a16:creationId xmlns:a16="http://schemas.microsoft.com/office/drawing/2014/main" id="{9A98EA4D-6350-4B1A-A4A9-91C786D6D1AC}"/>
               </a:ext>
             </a:extLst>
           </p:cNvPr>
@@ -10128,7 +10926,7 @@
           <p:cNvPr id="3" name="bullets">
             <a:extLst xmlns:a="http://schemas.openxmlformats.org/drawingml/2006/main">
               <a:ext uri="{FF2B5EF4-FFF2-40B4-BE49-F238E27FC236}">
-                <a16:creationId xmlns:a16="http://schemas.microsoft.com/office/drawing/2014/main" id="{5B4BD37D-7926-48B5-B168-62DEC85471C5}"/>
+                <a16:creationId xmlns:a16="http://schemas.microsoft.com/office/drawing/2014/main" id="{61954F00-9439-41FB-9F4D-D9B127BBE61C}"/>
               </a:ext>
             </a:extLst>
           </p:cNvPr>
@@ -10215,7 +11013,7 @@
           <p:cNvPr id="4" name="ambient-glow">
             <a:extLst xmlns:a="http://schemas.openxmlformats.org/drawingml/2006/main">
               <a:ext uri="{FF2B5EF4-FFF2-40B4-BE49-F238E27FC236}">
-                <a16:creationId xmlns:a16="http://schemas.microsoft.com/office/drawing/2014/main" id="{B7EA4206-BB8E-4AAE-8C47-BFA54CA2EFCD}"/>
+                <a16:creationId xmlns:a16="http://schemas.microsoft.com/office/drawing/2014/main" id="{1CA4FBF9-7C4A-49AC-BE73-3FFB1318836B}"/>
               </a:ext>
             </a:extLst>
           </p:cNvPr>
@@ -10252,7 +11050,7 @@
           <p:cNvPr id="5" name="ambient-core">
             <a:extLst xmlns:a="http://schemas.openxmlformats.org/drawingml/2006/main">
               <a:ext uri="{FF2B5EF4-FFF2-40B4-BE49-F238E27FC236}">
-                <a16:creationId xmlns:a16="http://schemas.microsoft.com/office/drawing/2014/main" id="{B0E97256-4E5E-4AD9-B55C-DC1433DEFE36}"/>
+                <a16:creationId xmlns:a16="http://schemas.microsoft.com/office/drawing/2014/main" id="{EA5A7006-6B92-4188-9D41-F51157EA0010}"/>
               </a:ext>
             </a:extLst>
           </p:cNvPr>
@@ -10289,7 +11087,7 @@
           <p:cNvPr id="6" name="section-number">
             <a:extLst xmlns:a="http://schemas.openxmlformats.org/drawingml/2006/main">
               <a:ext uri="{FF2B5EF4-FFF2-40B4-BE49-F238E27FC236}">
-                <a16:creationId xmlns:a16="http://schemas.microsoft.com/office/drawing/2014/main" id="{43D73939-D6EB-4FBD-B666-E82F388B0A31}"/>
+                <a16:creationId xmlns:a16="http://schemas.microsoft.com/office/drawing/2014/main" id="{6B15C9BD-9930-4063-B210-883074C9D426}"/>
               </a:ext>
             </a:extLst>
           </p:cNvPr>
@@ -10340,7 +11138,7 @@
           <p:cNvPr id="7" name="eyebrow">
             <a:extLst xmlns:a="http://schemas.openxmlformats.org/drawingml/2006/main">
               <a:ext uri="{FF2B5EF4-FFF2-40B4-BE49-F238E27FC236}">
-                <a16:creationId xmlns:a16="http://schemas.microsoft.com/office/drawing/2014/main" id="{E38D10B4-CE0E-4969-BD8F-5343F296AB1D}"/>
+                <a16:creationId xmlns:a16="http://schemas.microsoft.com/office/drawing/2014/main" id="{AA6C2F6E-93E4-49E7-90FC-5CA88DCB9A48}"/>
               </a:ext>
             </a:extLst>
           </p:cNvPr>
@@ -10388,10 +11186,69 @@
       </p:sp>
       <p:sp>
         <p:nvSpPr>
-          <p:cNvPr id="8" name="footer-rule">
-            <a:extLst xmlns:a="http://schemas.openxmlformats.org/drawingml/2006/main">
-              <a:ext uri="{FF2B5EF4-FFF2-40B4-BE49-F238E27FC236}">
-                <a16:creationId xmlns:a16="http://schemas.microsoft.com/office/drawing/2014/main" id="{6F882E36-A191-47B8-92B3-D508369D7636}"/>
+          <p:cNvPr id="8" name="rescue-point-logo-background">
+            <a:extLst xmlns:a="http://schemas.openxmlformats.org/drawingml/2006/main">
+              <a:ext uri="{FF2B5EF4-FFF2-40B4-BE49-F238E27FC236}">
+                <a16:creationId xmlns:a16="http://schemas.microsoft.com/office/drawing/2014/main" id="{17D507A6-362D-4790-B15D-A6BFFA57F422}"/>
+              </a:ext>
+            </a:extLst>
+          </p:cNvPr>
+          <p:cNvSpPr>
+            <a:spLocks xmlns:a="http://schemas.openxmlformats.org/drawingml/2006/main" noGrp="1"/>
+          </p:cNvSpPr>
+          <p:nvPr/>
+        </p:nvSpPr>
+        <p:spPr>
+          <a:xfrm xmlns:a="http://schemas.openxmlformats.org/drawingml/2006/main">
+            <a:off x="9772650" y="133350"/>
+            <a:ext cx="1733550" cy="457200"/>
+          </a:xfrm>
+          <a:prstGeom xmlns:a="http://schemas.openxmlformats.org/drawingml/2006/main" prst="roundRect">
+            <a:avLst>
+              <a:gd name="adj" fmla="val 16667"/>
+            </a:avLst>
+          </a:prstGeom>
+          <a:solidFill xmlns:a="http://schemas.openxmlformats.org/drawingml/2006/main">
+            <a:srgbClr val="06142E"/>
+          </a:solidFill>
+          <a:ln xmlns:a="http://schemas.openxmlformats.org/drawingml/2006/main" w="9525">
+            <a:solidFill>
+              <a:srgbClr val="1EC5FF">
+                <a:alpha val="33333"/>
+              </a:srgbClr>
+            </a:solidFill>
+            <a:prstDash val="solid"/>
+          </a:ln>
+        </p:spPr>
+      </p:sp>
+      <p:pic>
+        <p:nvPicPr>
+          <p:cNvPr id="23" name="" descr="Figura oficial da documentação dbt usada para explicar: A base original continua valiosa — Ambiente, seeds, ref, table, view e primeira Gold foram demonstrados.."/>
+          <p:cNvPicPr>
+            <a:picLocks xmlns:a="http://schemas.openxmlformats.org/drawingml/2006/main" noChangeAspect="1"/>
+          </p:cNvPicPr>
+          <p:nvPr/>
+        </p:nvPicPr>
+        <p:blipFill>
+          <a:blip xmlns:r="http://schemas.openxmlformats.org/officeDocument/2006/relationships" xmlns:a="http://schemas.openxmlformats.org/drawingml/2006/main" r:embed="R2573bb51cf74419d"/>
+          <a:stretch xmlns:a="http://schemas.openxmlformats.org/drawingml/2006/main"/>
+        </p:blipFill>
+        <p:spPr>
+          <a:xfrm xmlns:a="http://schemas.openxmlformats.org/drawingml/2006/main">
+            <a:off x="9893718" y="209550"/>
+            <a:ext cx="1491414" cy="323850"/>
+          </a:xfrm>
+          <a:prstGeom xmlns:a="http://schemas.openxmlformats.org/drawingml/2006/main" prst="rect">
+            <a:avLst/>
+          </a:prstGeom>
+        </p:spPr>
+      </p:pic>
+      <p:sp>
+        <p:nvSpPr>
+          <p:cNvPr id="10" name="footer-rule">
+            <a:extLst xmlns:a="http://schemas.openxmlformats.org/drawingml/2006/main">
+              <a:ext uri="{FF2B5EF4-FFF2-40B4-BE49-F238E27FC236}">
+                <a16:creationId xmlns:a16="http://schemas.microsoft.com/office/drawing/2014/main" id="{113949D0-B52B-4E39-AC8E-082531E6420F}"/>
               </a:ext>
             </a:extLst>
           </p:cNvPr>
@@ -10421,10 +11278,10 @@
       </p:sp>
       <p:sp>
         <p:nvSpPr>
-          <p:cNvPr id="9" name="footer">
-            <a:extLst xmlns:a="http://schemas.openxmlformats.org/drawingml/2006/main">
-              <a:ext uri="{FF2B5EF4-FFF2-40B4-BE49-F238E27FC236}">
-                <a16:creationId xmlns:a16="http://schemas.microsoft.com/office/drawing/2014/main" id="{A396BDF2-78F1-4FC7-A392-C38B45C81A34}"/>
+          <p:cNvPr id="11" name="footer">
+            <a:extLst xmlns:a="http://schemas.openxmlformats.org/drawingml/2006/main">
+              <a:ext uri="{FF2B5EF4-FFF2-40B4-BE49-F238E27FC236}">
+                <a16:creationId xmlns:a16="http://schemas.microsoft.com/office/drawing/2014/main" id="{4F9AF42C-5C48-4F7A-853C-982E048563DC}"/>
               </a:ext>
             </a:extLst>
           </p:cNvPr>
@@ -10476,10 +11333,10 @@
       </p:sp>
       <p:sp>
         <p:nvSpPr>
-          <p:cNvPr id="10" name="page-number">
-            <a:extLst xmlns:a="http://schemas.openxmlformats.org/drawingml/2006/main">
-              <a:ext uri="{FF2B5EF4-FFF2-40B4-BE49-F238E27FC236}">
-                <a16:creationId xmlns:a16="http://schemas.microsoft.com/office/drawing/2014/main" id="{4E2B267D-87F2-4D97-91A8-8C2BDCB32F39}"/>
+          <p:cNvPr id="12" name="page-number">
+            <a:extLst xmlns:a="http://schemas.openxmlformats.org/drawingml/2006/main">
+              <a:ext uri="{FF2B5EF4-FFF2-40B4-BE49-F238E27FC236}">
+                <a16:creationId xmlns:a16="http://schemas.microsoft.com/office/drawing/2014/main" id="{EDF6B5B2-7C37-440B-BB3E-DBF36DFEB330}"/>
               </a:ext>
             </a:extLst>
           </p:cNvPr>
@@ -10532,7 +11389,7 @@
     </p:spTree>
     <p:extLst>
       <p:ext uri="{BB962C8B-B14F-4D97-AF65-F5344CB8AC3E}">
-        <p14:creationId xmlns:p14="http://schemas.microsoft.com/office/powerpoint/2010/main" val="2106156534"/>
+        <p14:creationId xmlns:p14="http://schemas.microsoft.com/office/powerpoint/2010/main" val="789334541"/>
       </p:ext>
     </p:extLst>
   </p:cSld>
@@ -10560,10 +11417,10 @@
       </p:grpSpPr>
       <p:sp>
         <p:nvSpPr>
-          <p:cNvPr id="11" name="slide-title">
-            <a:extLst xmlns:a="http://schemas.openxmlformats.org/drawingml/2006/main">
-              <a:ext uri="{FF2B5EF4-FFF2-40B4-BE49-F238E27FC236}">
-                <a16:creationId xmlns:a16="http://schemas.microsoft.com/office/drawing/2014/main" id="{88E7160B-23C1-4926-A55F-003712FE8ADE}"/>
+          <p:cNvPr id="13" name="slide-title">
+            <a:extLst xmlns:a="http://schemas.openxmlformats.org/drawingml/2006/main">
+              <a:ext uri="{FF2B5EF4-FFF2-40B4-BE49-F238E27FC236}">
+                <a16:creationId xmlns:a16="http://schemas.microsoft.com/office/drawing/2014/main" id="{6E51BCA4-EE73-487E-82E6-6BC902CC16B6}"/>
               </a:ext>
             </a:extLst>
           </p:cNvPr>
@@ -10614,7 +11471,7 @@
           <p:cNvPr id="2" name="slide-subtitle">
             <a:extLst xmlns:a="http://schemas.openxmlformats.org/drawingml/2006/main">
               <a:ext uri="{FF2B5EF4-FFF2-40B4-BE49-F238E27FC236}">
-                <a16:creationId xmlns:a16="http://schemas.microsoft.com/office/drawing/2014/main" id="{1AD99C82-B71C-4AEF-BE44-E37AA23DE2AC}"/>
+                <a16:creationId xmlns:a16="http://schemas.microsoft.com/office/drawing/2014/main" id="{2BBF41A9-DE90-4386-9C5F-7AC78DE7C559}"/>
               </a:ext>
             </a:extLst>
           </p:cNvPr>
@@ -10665,7 +11522,7 @@
           <p:cNvPr id="3" name="bullets">
             <a:extLst xmlns:a="http://schemas.openxmlformats.org/drawingml/2006/main">
               <a:ext uri="{FF2B5EF4-FFF2-40B4-BE49-F238E27FC236}">
-                <a16:creationId xmlns:a16="http://schemas.microsoft.com/office/drawing/2014/main" id="{A73763D9-F6C3-430E-B21A-4ECCE7D0D7A2}"/>
+                <a16:creationId xmlns:a16="http://schemas.microsoft.com/office/drawing/2014/main" id="{A5C3D8B4-7118-4E97-8E5F-C279133D0DFC}"/>
               </a:ext>
             </a:extLst>
           </p:cNvPr>
@@ -10752,7 +11609,7 @@
           <p:cNvPr id="4" name="ambient-glow">
             <a:extLst xmlns:a="http://schemas.openxmlformats.org/drawingml/2006/main">
               <a:ext uri="{FF2B5EF4-FFF2-40B4-BE49-F238E27FC236}">
-                <a16:creationId xmlns:a16="http://schemas.microsoft.com/office/drawing/2014/main" id="{A5D71CC5-CA40-46D9-86A5-6D8C4495827C}"/>
+                <a16:creationId xmlns:a16="http://schemas.microsoft.com/office/drawing/2014/main" id="{34BAC86E-E82E-476A-9A06-C581AA4A8FE1}"/>
               </a:ext>
             </a:extLst>
           </p:cNvPr>
@@ -10789,7 +11646,7 @@
           <p:cNvPr id="5" name="ambient-core">
             <a:extLst xmlns:a="http://schemas.openxmlformats.org/drawingml/2006/main">
               <a:ext uri="{FF2B5EF4-FFF2-40B4-BE49-F238E27FC236}">
-                <a16:creationId xmlns:a16="http://schemas.microsoft.com/office/drawing/2014/main" id="{FFA32837-F3A9-44C2-8A24-101CC3FBD8BE}"/>
+                <a16:creationId xmlns:a16="http://schemas.microsoft.com/office/drawing/2014/main" id="{8BB28CD0-0398-4D34-AC39-CD1C1C296182}"/>
               </a:ext>
             </a:extLst>
           </p:cNvPr>
@@ -10826,7 +11683,7 @@
           <p:cNvPr id="6" name="section-number">
             <a:extLst xmlns:a="http://schemas.openxmlformats.org/drawingml/2006/main">
               <a:ext uri="{FF2B5EF4-FFF2-40B4-BE49-F238E27FC236}">
-                <a16:creationId xmlns:a16="http://schemas.microsoft.com/office/drawing/2014/main" id="{8BFE8D73-BCFA-43BA-BBF1-0F5BA2E018AB}"/>
+                <a16:creationId xmlns:a16="http://schemas.microsoft.com/office/drawing/2014/main" id="{03C887A5-5D3E-4466-92D1-6A35AACD2636}"/>
               </a:ext>
             </a:extLst>
           </p:cNvPr>
@@ -10877,7 +11734,7 @@
           <p:cNvPr id="7" name="eyebrow">
             <a:extLst xmlns:a="http://schemas.openxmlformats.org/drawingml/2006/main">
               <a:ext uri="{FF2B5EF4-FFF2-40B4-BE49-F238E27FC236}">
-                <a16:creationId xmlns:a16="http://schemas.microsoft.com/office/drawing/2014/main" id="{CCE6FFDC-5C97-48C5-9D5C-B7B463FCF132}"/>
+                <a16:creationId xmlns:a16="http://schemas.microsoft.com/office/drawing/2014/main" id="{12BE2080-3C67-4A4E-9061-971F73055BF7}"/>
               </a:ext>
             </a:extLst>
           </p:cNvPr>
@@ -10925,10 +11782,69 @@
       </p:sp>
       <p:sp>
         <p:nvSpPr>
-          <p:cNvPr id="8" name="footer-rule">
-            <a:extLst xmlns:a="http://schemas.openxmlformats.org/drawingml/2006/main">
-              <a:ext uri="{FF2B5EF4-FFF2-40B4-BE49-F238E27FC236}">
-                <a16:creationId xmlns:a16="http://schemas.microsoft.com/office/drawing/2014/main" id="{C03F2DE5-5E1A-4B20-829B-7B0ACEC7E3F6}"/>
+          <p:cNvPr id="8" name="rescue-point-logo-background">
+            <a:extLst xmlns:a="http://schemas.openxmlformats.org/drawingml/2006/main">
+              <a:ext uri="{FF2B5EF4-FFF2-40B4-BE49-F238E27FC236}">
+                <a16:creationId xmlns:a16="http://schemas.microsoft.com/office/drawing/2014/main" id="{83FABD7F-884B-44E2-81B7-0B23858FB531}"/>
+              </a:ext>
+            </a:extLst>
+          </p:cNvPr>
+          <p:cNvSpPr>
+            <a:spLocks xmlns:a="http://schemas.openxmlformats.org/drawingml/2006/main" noGrp="1"/>
+          </p:cNvSpPr>
+          <p:nvPr/>
+        </p:nvSpPr>
+        <p:spPr>
+          <a:xfrm xmlns:a="http://schemas.openxmlformats.org/drawingml/2006/main">
+            <a:off x="9772650" y="133350"/>
+            <a:ext cx="1733550" cy="457200"/>
+          </a:xfrm>
+          <a:prstGeom xmlns:a="http://schemas.openxmlformats.org/drawingml/2006/main" prst="roundRect">
+            <a:avLst>
+              <a:gd name="adj" fmla="val 16667"/>
+            </a:avLst>
+          </a:prstGeom>
+          <a:solidFill xmlns:a="http://schemas.openxmlformats.org/drawingml/2006/main">
+            <a:srgbClr val="06142E"/>
+          </a:solidFill>
+          <a:ln xmlns:a="http://schemas.openxmlformats.org/drawingml/2006/main" w="9525">
+            <a:solidFill>
+              <a:srgbClr val="1EC5FF">
+                <a:alpha val="33333"/>
+              </a:srgbClr>
+            </a:solidFill>
+            <a:prstDash val="solid"/>
+          </a:ln>
+        </p:spPr>
+      </p:sp>
+      <p:pic>
+        <p:nvPicPr>
+          <p:cNvPr id="23" name="" descr="Figura oficial da documentação dbt usada para explicar: Produção começa no suportado — Core 1.12 e DuckDB estável formam a trilha executável.."/>
+          <p:cNvPicPr>
+            <a:picLocks xmlns:a="http://schemas.openxmlformats.org/drawingml/2006/main" noChangeAspect="1"/>
+          </p:cNvPicPr>
+          <p:nvPr/>
+        </p:nvPicPr>
+        <p:blipFill>
+          <a:blip xmlns:r="http://schemas.openxmlformats.org/officeDocument/2006/relationships" xmlns:a="http://schemas.openxmlformats.org/drawingml/2006/main" r:embed="R12518b72a9004998"/>
+          <a:stretch xmlns:a="http://schemas.openxmlformats.org/drawingml/2006/main"/>
+        </p:blipFill>
+        <p:spPr>
+          <a:xfrm xmlns:a="http://schemas.openxmlformats.org/drawingml/2006/main">
+            <a:off x="9893718" y="209550"/>
+            <a:ext cx="1491414" cy="323850"/>
+          </a:xfrm>
+          <a:prstGeom xmlns:a="http://schemas.openxmlformats.org/drawingml/2006/main" prst="rect">
+            <a:avLst/>
+          </a:prstGeom>
+        </p:spPr>
+      </p:pic>
+      <p:sp>
+        <p:nvSpPr>
+          <p:cNvPr id="10" name="footer-rule">
+            <a:extLst xmlns:a="http://schemas.openxmlformats.org/drawingml/2006/main">
+              <a:ext uri="{FF2B5EF4-FFF2-40B4-BE49-F238E27FC236}">
+                <a16:creationId xmlns:a16="http://schemas.microsoft.com/office/drawing/2014/main" id="{093FF3A0-FF04-405B-879A-01EDA846275F}"/>
               </a:ext>
             </a:extLst>
           </p:cNvPr>
@@ -10958,10 +11874,10 @@
       </p:sp>
       <p:sp>
         <p:nvSpPr>
-          <p:cNvPr id="9" name="footer">
-            <a:extLst xmlns:a="http://schemas.openxmlformats.org/drawingml/2006/main">
-              <a:ext uri="{FF2B5EF4-FFF2-40B4-BE49-F238E27FC236}">
-                <a16:creationId xmlns:a16="http://schemas.microsoft.com/office/drawing/2014/main" id="{D92897BF-40A8-4A13-9CEE-FB76E50CF4A8}"/>
+          <p:cNvPr id="11" name="footer">
+            <a:extLst xmlns:a="http://schemas.openxmlformats.org/drawingml/2006/main">
+              <a:ext uri="{FF2B5EF4-FFF2-40B4-BE49-F238E27FC236}">
+                <a16:creationId xmlns:a16="http://schemas.microsoft.com/office/drawing/2014/main" id="{A36DFD96-3D8F-40C4-BC74-D35E74A879FA}"/>
               </a:ext>
             </a:extLst>
           </p:cNvPr>
@@ -11013,10 +11929,10 @@
       </p:sp>
       <p:sp>
         <p:nvSpPr>
-          <p:cNvPr id="10" name="page-number">
-            <a:extLst xmlns:a="http://schemas.openxmlformats.org/drawingml/2006/main">
-              <a:ext uri="{FF2B5EF4-FFF2-40B4-BE49-F238E27FC236}">
-                <a16:creationId xmlns:a16="http://schemas.microsoft.com/office/drawing/2014/main" id="{FEC3F1D0-8A89-4E5C-BFE4-2D657677F948}"/>
+          <p:cNvPr id="12" name="page-number">
+            <a:extLst xmlns:a="http://schemas.openxmlformats.org/drawingml/2006/main">
+              <a:ext uri="{FF2B5EF4-FFF2-40B4-BE49-F238E27FC236}">
+                <a16:creationId xmlns:a16="http://schemas.microsoft.com/office/drawing/2014/main" id="{7255A28F-4B20-4921-8274-807473F90347}"/>
               </a:ext>
             </a:extLst>
           </p:cNvPr>
@@ -11069,7 +11985,7 @@
     </p:spTree>
     <p:extLst>
       <p:ext uri="{BB962C8B-B14F-4D97-AF65-F5344CB8AC3E}">
-        <p14:creationId xmlns:p14="http://schemas.microsoft.com/office/powerpoint/2010/main" val="415722468"/>
+        <p14:creationId xmlns:p14="http://schemas.microsoft.com/office/powerpoint/2010/main" val="30953809"/>
       </p:ext>
     </p:extLst>
   </p:cSld>
@@ -11105,10 +12021,10 @@
       </p:grpSpPr>
       <p:sp>
         <p:nvSpPr>
-          <p:cNvPr id="12" name="slide-title">
-            <a:extLst xmlns:a="http://schemas.openxmlformats.org/drawingml/2006/main">
-              <a:ext uri="{FF2B5EF4-FFF2-40B4-BE49-F238E27FC236}">
-                <a16:creationId xmlns:a16="http://schemas.microsoft.com/office/drawing/2014/main" id="{EAF9F9B5-6834-4274-B341-EA19A8A64168}"/>
+          <p:cNvPr id="14" name="slide-title">
+            <a:extLst xmlns:a="http://schemas.openxmlformats.org/drawingml/2006/main">
+              <a:ext uri="{FF2B5EF4-FFF2-40B4-BE49-F238E27FC236}">
+                <a16:creationId xmlns:a16="http://schemas.microsoft.com/office/drawing/2014/main" id="{DD4704E7-9093-4E38-B6F8-2C7D3103951C}"/>
               </a:ext>
             </a:extLst>
           </p:cNvPr>
@@ -11159,7 +12075,7 @@
           <p:cNvPr id="2" name="status-dot-1">
             <a:extLst xmlns:a="http://schemas.openxmlformats.org/drawingml/2006/main">
               <a:ext uri="{FF2B5EF4-FFF2-40B4-BE49-F238E27FC236}">
-                <a16:creationId xmlns:a16="http://schemas.microsoft.com/office/drawing/2014/main" id="{48C66351-53C8-4FB4-9A4D-751B6D474D51}"/>
+                <a16:creationId xmlns:a16="http://schemas.microsoft.com/office/drawing/2014/main" id="{B4162E21-0F92-4553-8340-64A3EB308C65}"/>
               </a:ext>
             </a:extLst>
           </p:cNvPr>
@@ -11192,7 +12108,7 @@
           <p:cNvPr id="3" name="status-label-1">
             <a:extLst xmlns:a="http://schemas.openxmlformats.org/drawingml/2006/main">
               <a:ext uri="{FF2B5EF4-FFF2-40B4-BE49-F238E27FC236}">
-                <a16:creationId xmlns:a16="http://schemas.microsoft.com/office/drawing/2014/main" id="{8B200F27-64B8-40DA-A77D-77F74355C611}"/>
+                <a16:creationId xmlns:a16="http://schemas.microsoft.com/office/drawing/2014/main" id="{600C5692-8C8A-4C68-844E-B510C37D7FD6}"/>
               </a:ext>
             </a:extLst>
           </p:cNvPr>
@@ -11243,7 +12159,7 @@
           <p:cNvPr id="4" name="status-dot-2">
             <a:extLst xmlns:a="http://schemas.openxmlformats.org/drawingml/2006/main">
               <a:ext uri="{FF2B5EF4-FFF2-40B4-BE49-F238E27FC236}">
-                <a16:creationId xmlns:a16="http://schemas.microsoft.com/office/drawing/2014/main" id="{F4F3791B-4222-4CFA-B703-9C72A490BD90}"/>
+                <a16:creationId xmlns:a16="http://schemas.microsoft.com/office/drawing/2014/main" id="{82C7F982-6903-4199-A3E8-BAEA550FA075}"/>
               </a:ext>
             </a:extLst>
           </p:cNvPr>
@@ -11276,7 +12192,7 @@
           <p:cNvPr id="5" name="status-label-2">
             <a:extLst xmlns:a="http://schemas.openxmlformats.org/drawingml/2006/main">
               <a:ext uri="{FF2B5EF4-FFF2-40B4-BE49-F238E27FC236}">
-                <a16:creationId xmlns:a16="http://schemas.microsoft.com/office/drawing/2014/main" id="{50FBFE14-5A2A-43A6-A382-A633EB7558B4}"/>
+                <a16:creationId xmlns:a16="http://schemas.microsoft.com/office/drawing/2014/main" id="{BC313281-0108-4136-BCBE-FF89B7EF5FAE}"/>
               </a:ext>
             </a:extLst>
           </p:cNvPr>
@@ -11327,7 +12243,7 @@
           <p:cNvPr id="6" name="status-dot-3">
             <a:extLst xmlns:a="http://schemas.openxmlformats.org/drawingml/2006/main">
               <a:ext uri="{FF2B5EF4-FFF2-40B4-BE49-F238E27FC236}">
-                <a16:creationId xmlns:a16="http://schemas.microsoft.com/office/drawing/2014/main" id="{732CC368-0E75-4F9E-BDDE-E1835C202CB4}"/>
+                <a16:creationId xmlns:a16="http://schemas.microsoft.com/office/drawing/2014/main" id="{2E32D110-1585-42FD-9A96-4508AE8CF7FF}"/>
               </a:ext>
             </a:extLst>
           </p:cNvPr>
@@ -11360,7 +12276,7 @@
           <p:cNvPr id="7" name="status-label-3">
             <a:extLst xmlns:a="http://schemas.openxmlformats.org/drawingml/2006/main">
               <a:ext uri="{FF2B5EF4-FFF2-40B4-BE49-F238E27FC236}">
-                <a16:creationId xmlns:a16="http://schemas.microsoft.com/office/drawing/2014/main" id="{6FE9AD34-DD6E-4A02-804E-8860A4CE851F}"/>
+                <a16:creationId xmlns:a16="http://schemas.microsoft.com/office/drawing/2014/main" id="{74F429DE-6AB7-46DA-BF9A-DAD3451E708E}"/>
               </a:ext>
             </a:extLst>
           </p:cNvPr>
@@ -11411,7 +12327,7 @@
           <p:cNvPr id="8" name="eyebrow">
             <a:extLst xmlns:a="http://schemas.openxmlformats.org/drawingml/2006/main">
               <a:ext uri="{FF2B5EF4-FFF2-40B4-BE49-F238E27FC236}">
-                <a16:creationId xmlns:a16="http://schemas.microsoft.com/office/drawing/2014/main" id="{DB325A06-0B1F-4935-B021-0199BA923BE1}"/>
+                <a16:creationId xmlns:a16="http://schemas.microsoft.com/office/drawing/2014/main" id="{97F1BE32-C2D0-45A8-A845-63A8B6C84E14}"/>
               </a:ext>
             </a:extLst>
           </p:cNvPr>
@@ -11459,10 +12375,69 @@
       </p:sp>
       <p:sp>
         <p:nvSpPr>
-          <p:cNvPr id="9" name="footer-rule">
-            <a:extLst xmlns:a="http://schemas.openxmlformats.org/drawingml/2006/main">
-              <a:ext uri="{FF2B5EF4-FFF2-40B4-BE49-F238E27FC236}">
-                <a16:creationId xmlns:a16="http://schemas.microsoft.com/office/drawing/2014/main" id="{B37CE49B-0052-44D2-92F0-E26D8B0348D4}"/>
+          <p:cNvPr id="9" name="rescue-point-logo-background">
+            <a:extLst xmlns:a="http://schemas.openxmlformats.org/drawingml/2006/main">
+              <a:ext uri="{FF2B5EF4-FFF2-40B4-BE49-F238E27FC236}">
+                <a16:creationId xmlns:a16="http://schemas.microsoft.com/office/drawing/2014/main" id="{C2455FBF-C72F-4145-99E7-184BACC090E8}"/>
+              </a:ext>
+            </a:extLst>
+          </p:cNvPr>
+          <p:cNvSpPr>
+            <a:spLocks xmlns:a="http://schemas.openxmlformats.org/drawingml/2006/main" noGrp="1"/>
+          </p:cNvSpPr>
+          <p:nvPr/>
+        </p:nvSpPr>
+        <p:spPr>
+          <a:xfrm xmlns:a="http://schemas.openxmlformats.org/drawingml/2006/main">
+            <a:off x="9772650" y="133350"/>
+            <a:ext cx="1733550" cy="457200"/>
+          </a:xfrm>
+          <a:prstGeom xmlns:a="http://schemas.openxmlformats.org/drawingml/2006/main" prst="roundRect">
+            <a:avLst>
+              <a:gd name="adj" fmla="val 16667"/>
+            </a:avLst>
+          </a:prstGeom>
+          <a:solidFill xmlns:a="http://schemas.openxmlformats.org/drawingml/2006/main">
+            <a:srgbClr val="06142E"/>
+          </a:solidFill>
+          <a:ln xmlns:a="http://schemas.openxmlformats.org/drawingml/2006/main" w="9525">
+            <a:solidFill>
+              <a:srgbClr val="1EC5FF">
+                <a:alpha val="33333"/>
+              </a:srgbClr>
+            </a:solidFill>
+            <a:prstDash val="solid"/>
+          </a:ln>
+        </p:spPr>
+      </p:sp>
+      <p:pic>
+        <p:nvPicPr>
+          <p:cNvPr id="25" name="" descr="Figura oficial da documentação dbt usada para explicar: Produção começa no suportado — OPEN."/>
+          <p:cNvPicPr>
+            <a:picLocks xmlns:a="http://schemas.openxmlformats.org/drawingml/2006/main" noChangeAspect="1"/>
+          </p:cNvPicPr>
+          <p:nvPr/>
+        </p:nvPicPr>
+        <p:blipFill>
+          <a:blip xmlns:r="http://schemas.openxmlformats.org/officeDocument/2006/relationships" xmlns:a="http://schemas.openxmlformats.org/drawingml/2006/main" r:embed="R8a3c88c7a27e4cdb"/>
+          <a:stretch xmlns:a="http://schemas.openxmlformats.org/drawingml/2006/main"/>
+        </p:blipFill>
+        <p:spPr>
+          <a:xfrm xmlns:a="http://schemas.openxmlformats.org/drawingml/2006/main">
+            <a:off x="9893718" y="209550"/>
+            <a:ext cx="1491414" cy="323850"/>
+          </a:xfrm>
+          <a:prstGeom xmlns:a="http://schemas.openxmlformats.org/drawingml/2006/main" prst="rect">
+            <a:avLst/>
+          </a:prstGeom>
+        </p:spPr>
+      </p:pic>
+      <p:sp>
+        <p:nvSpPr>
+          <p:cNvPr id="11" name="footer-rule">
+            <a:extLst xmlns:a="http://schemas.openxmlformats.org/drawingml/2006/main">
+              <a:ext uri="{FF2B5EF4-FFF2-40B4-BE49-F238E27FC236}">
+                <a16:creationId xmlns:a16="http://schemas.microsoft.com/office/drawing/2014/main" id="{89BCD0C6-68F4-449A-A3DA-A8BFA8C8623A}"/>
               </a:ext>
             </a:extLst>
           </p:cNvPr>
@@ -11492,10 +12467,10 @@
       </p:sp>
       <p:sp>
         <p:nvSpPr>
-          <p:cNvPr id="10" name="footer">
-            <a:extLst xmlns:a="http://schemas.openxmlformats.org/drawingml/2006/main">
-              <a:ext uri="{FF2B5EF4-FFF2-40B4-BE49-F238E27FC236}">
-                <a16:creationId xmlns:a16="http://schemas.microsoft.com/office/drawing/2014/main" id="{09B41ADE-0081-4C4A-8BC6-B45D7912965D}"/>
+          <p:cNvPr id="12" name="footer">
+            <a:extLst xmlns:a="http://schemas.openxmlformats.org/drawingml/2006/main">
+              <a:ext uri="{FF2B5EF4-FFF2-40B4-BE49-F238E27FC236}">
+                <a16:creationId xmlns:a16="http://schemas.microsoft.com/office/drawing/2014/main" id="{B51217B0-275A-41D1-9796-6F4D5FFEA92B}"/>
               </a:ext>
             </a:extLst>
           </p:cNvPr>
@@ -11547,10 +12522,10 @@
       </p:sp>
       <p:sp>
         <p:nvSpPr>
-          <p:cNvPr id="11" name="page-number">
-            <a:extLst xmlns:a="http://schemas.openxmlformats.org/drawingml/2006/main">
-              <a:ext uri="{FF2B5EF4-FFF2-40B4-BE49-F238E27FC236}">
-                <a16:creationId xmlns:a16="http://schemas.microsoft.com/office/drawing/2014/main" id="{077A3F3F-0BF3-4286-B0C9-739ED827ABD7}"/>
+          <p:cNvPr id="13" name="page-number">
+            <a:extLst xmlns:a="http://schemas.openxmlformats.org/drawingml/2006/main">
+              <a:ext uri="{FF2B5EF4-FFF2-40B4-BE49-F238E27FC236}">
+                <a16:creationId xmlns:a16="http://schemas.microsoft.com/office/drawing/2014/main" id="{ECC023FA-CE06-4C0B-97AD-2F24F96682EF}"/>
               </a:ext>
             </a:extLst>
           </p:cNvPr>
@@ -11603,7 +12578,7 @@
     </p:spTree>
     <p:extLst>
       <p:ext uri="{BB962C8B-B14F-4D97-AF65-F5344CB8AC3E}">
-        <p14:creationId xmlns:p14="http://schemas.microsoft.com/office/powerpoint/2010/main" val="1028372399"/>
+        <p14:creationId xmlns:p14="http://schemas.microsoft.com/office/powerpoint/2010/main" val="145752396"/>
       </p:ext>
     </p:extLst>
   </p:cSld>
@@ -11639,10 +12614,10 @@
       </p:grpSpPr>
       <p:sp>
         <p:nvSpPr>
-          <p:cNvPr id="11" name="slide-title">
-            <a:extLst xmlns:a="http://schemas.openxmlformats.org/drawingml/2006/main">
-              <a:ext uri="{FF2B5EF4-FFF2-40B4-BE49-F238E27FC236}">
-                <a16:creationId xmlns:a16="http://schemas.microsoft.com/office/drawing/2014/main" id="{5AE3DAD8-544A-4984-8879-6AF3F75239A8}"/>
+          <p:cNvPr id="13" name="slide-title">
+            <a:extLst xmlns:a="http://schemas.openxmlformats.org/drawingml/2006/main">
+              <a:ext uri="{FF2B5EF4-FFF2-40B4-BE49-F238E27FC236}">
+                <a16:creationId xmlns:a16="http://schemas.microsoft.com/office/drawing/2014/main" id="{C1DAE64F-F113-40C7-B368-D14AA71F2786}"/>
               </a:ext>
             </a:extLst>
           </p:cNvPr>
@@ -11693,7 +12668,7 @@
           <p:cNvPr id="2" name="slide-subtitle">
             <a:extLst xmlns:a="http://schemas.openxmlformats.org/drawingml/2006/main">
               <a:ext uri="{FF2B5EF4-FFF2-40B4-BE49-F238E27FC236}">
-                <a16:creationId xmlns:a16="http://schemas.microsoft.com/office/drawing/2014/main" id="{B01D9697-3DC6-416B-BC60-0A0A4661DB79}"/>
+                <a16:creationId xmlns:a16="http://schemas.microsoft.com/office/drawing/2014/main" id="{25F6E741-5A28-42BF-B9C5-5474E69A722D}"/>
               </a:ext>
             </a:extLst>
           </p:cNvPr>
@@ -11744,7 +12719,7 @@
           <p:cNvPr id="3" name="bullets">
             <a:extLst xmlns:a="http://schemas.openxmlformats.org/drawingml/2006/main">
               <a:ext uri="{FF2B5EF4-FFF2-40B4-BE49-F238E27FC236}">
-                <a16:creationId xmlns:a16="http://schemas.microsoft.com/office/drawing/2014/main" id="{48BA6553-211F-4E2A-A08E-DF6C56D34D95}"/>
+                <a16:creationId xmlns:a16="http://schemas.microsoft.com/office/drawing/2014/main" id="{44D42003-52CC-4B9B-8ABF-3331ED282FCE}"/>
               </a:ext>
             </a:extLst>
           </p:cNvPr>
@@ -11831,7 +12806,7 @@
           <p:cNvPr id="4" name="ambient-glow">
             <a:extLst xmlns:a="http://schemas.openxmlformats.org/drawingml/2006/main">
               <a:ext uri="{FF2B5EF4-FFF2-40B4-BE49-F238E27FC236}">
-                <a16:creationId xmlns:a16="http://schemas.microsoft.com/office/drawing/2014/main" id="{7DFDBDFB-72C5-4D7B-919C-433284BF5C7A}"/>
+                <a16:creationId xmlns:a16="http://schemas.microsoft.com/office/drawing/2014/main" id="{A64683FE-6175-4A83-8731-DB26F8CD48B6}"/>
               </a:ext>
             </a:extLst>
           </p:cNvPr>
@@ -11868,7 +12843,7 @@
           <p:cNvPr id="5" name="ambient-core">
             <a:extLst xmlns:a="http://schemas.openxmlformats.org/drawingml/2006/main">
               <a:ext uri="{FF2B5EF4-FFF2-40B4-BE49-F238E27FC236}">
-                <a16:creationId xmlns:a16="http://schemas.microsoft.com/office/drawing/2014/main" id="{88915342-0A0A-4BEC-9112-7B71CFB0C7BA}"/>
+                <a16:creationId xmlns:a16="http://schemas.microsoft.com/office/drawing/2014/main" id="{A5E379C7-BEDB-4AA1-A6F7-49033D2084E7}"/>
               </a:ext>
             </a:extLst>
           </p:cNvPr>
@@ -11905,7 +12880,7 @@
           <p:cNvPr id="6" name="section-number">
             <a:extLst xmlns:a="http://schemas.openxmlformats.org/drawingml/2006/main">
               <a:ext uri="{FF2B5EF4-FFF2-40B4-BE49-F238E27FC236}">
-                <a16:creationId xmlns:a16="http://schemas.microsoft.com/office/drawing/2014/main" id="{0CC3C63C-944A-44C1-BEA4-DBD3D869A9E7}"/>
+                <a16:creationId xmlns:a16="http://schemas.microsoft.com/office/drawing/2014/main" id="{857E7ECB-D92D-44C7-8135-8A85481EF2D3}"/>
               </a:ext>
             </a:extLst>
           </p:cNvPr>
@@ -11956,7 +12931,7 @@
           <p:cNvPr id="7" name="eyebrow">
             <a:extLst xmlns:a="http://schemas.openxmlformats.org/drawingml/2006/main">
               <a:ext uri="{FF2B5EF4-FFF2-40B4-BE49-F238E27FC236}">
-                <a16:creationId xmlns:a16="http://schemas.microsoft.com/office/drawing/2014/main" id="{D0F3595C-CB1D-45D9-B117-050100484496}"/>
+                <a16:creationId xmlns:a16="http://schemas.microsoft.com/office/drawing/2014/main" id="{96570C87-745E-4F9A-88AE-C38ADDA63EFC}"/>
               </a:ext>
             </a:extLst>
           </p:cNvPr>
@@ -12004,10 +12979,69 @@
       </p:sp>
       <p:sp>
         <p:nvSpPr>
-          <p:cNvPr id="8" name="footer-rule">
-            <a:extLst xmlns:a="http://schemas.openxmlformats.org/drawingml/2006/main">
-              <a:ext uri="{FF2B5EF4-FFF2-40B4-BE49-F238E27FC236}">
-                <a16:creationId xmlns:a16="http://schemas.microsoft.com/office/drawing/2014/main" id="{11143ED7-CF4A-44DD-950A-905711A612C4}"/>
+          <p:cNvPr id="8" name="rescue-point-logo-background">
+            <a:extLst xmlns:a="http://schemas.openxmlformats.org/drawingml/2006/main">
+              <a:ext uri="{FF2B5EF4-FFF2-40B4-BE49-F238E27FC236}">
+                <a16:creationId xmlns:a16="http://schemas.microsoft.com/office/drawing/2014/main" id="{AE377A52-F915-4E15-800E-C624D8F3668E}"/>
+              </a:ext>
+            </a:extLst>
+          </p:cNvPr>
+          <p:cNvSpPr>
+            <a:spLocks xmlns:a="http://schemas.openxmlformats.org/drawingml/2006/main" noGrp="1"/>
+          </p:cNvSpPr>
+          <p:nvPr/>
+        </p:nvSpPr>
+        <p:spPr>
+          <a:xfrm xmlns:a="http://schemas.openxmlformats.org/drawingml/2006/main">
+            <a:off x="9772650" y="133350"/>
+            <a:ext cx="1733550" cy="457200"/>
+          </a:xfrm>
+          <a:prstGeom xmlns:a="http://schemas.openxmlformats.org/drawingml/2006/main" prst="roundRect">
+            <a:avLst>
+              <a:gd name="adj" fmla="val 16667"/>
+            </a:avLst>
+          </a:prstGeom>
+          <a:solidFill xmlns:a="http://schemas.openxmlformats.org/drawingml/2006/main">
+            <a:srgbClr val="06142E"/>
+          </a:solidFill>
+          <a:ln xmlns:a="http://schemas.openxmlformats.org/drawingml/2006/main" w="9525">
+            <a:solidFill>
+              <a:srgbClr val="1EC5FF">
+                <a:alpha val="33333"/>
+              </a:srgbClr>
+            </a:solidFill>
+            <a:prstDash val="solid"/>
+          </a:ln>
+        </p:spPr>
+      </p:sp>
+      <p:pic>
+        <p:nvPicPr>
+          <p:cNvPr id="23" name="" descr="Figura oficial da documentação dbt usada para explicar: ref transforma SQL em um grafo — Dependências explícitas habilitam ordem, seleção e linhagem.."/>
+          <p:cNvPicPr>
+            <a:picLocks xmlns:a="http://schemas.openxmlformats.org/drawingml/2006/main" noChangeAspect="1"/>
+          </p:cNvPicPr>
+          <p:nvPr/>
+        </p:nvPicPr>
+        <p:blipFill>
+          <a:blip xmlns:r="http://schemas.openxmlformats.org/officeDocument/2006/relationships" xmlns:a="http://schemas.openxmlformats.org/drawingml/2006/main" r:embed="Rf583dd6e51e2445f"/>
+          <a:stretch xmlns:a="http://schemas.openxmlformats.org/drawingml/2006/main"/>
+        </p:blipFill>
+        <p:spPr>
+          <a:xfrm xmlns:a="http://schemas.openxmlformats.org/drawingml/2006/main">
+            <a:off x="9893718" y="209550"/>
+            <a:ext cx="1491414" cy="323850"/>
+          </a:xfrm>
+          <a:prstGeom xmlns:a="http://schemas.openxmlformats.org/drawingml/2006/main" prst="rect">
+            <a:avLst/>
+          </a:prstGeom>
+        </p:spPr>
+      </p:pic>
+      <p:sp>
+        <p:nvSpPr>
+          <p:cNvPr id="10" name="footer-rule">
+            <a:extLst xmlns:a="http://schemas.openxmlformats.org/drawingml/2006/main">
+              <a:ext uri="{FF2B5EF4-FFF2-40B4-BE49-F238E27FC236}">
+                <a16:creationId xmlns:a16="http://schemas.microsoft.com/office/drawing/2014/main" id="{66026C28-B578-49DF-A87A-F7E26ABDEF76}"/>
               </a:ext>
             </a:extLst>
           </p:cNvPr>
@@ -12037,10 +13071,10 @@
       </p:sp>
       <p:sp>
         <p:nvSpPr>
-          <p:cNvPr id="9" name="footer">
-            <a:extLst xmlns:a="http://schemas.openxmlformats.org/drawingml/2006/main">
-              <a:ext uri="{FF2B5EF4-FFF2-40B4-BE49-F238E27FC236}">
-                <a16:creationId xmlns:a16="http://schemas.microsoft.com/office/drawing/2014/main" id="{651880D3-05D1-4CC8-804C-7453DE2992C5}"/>
+          <p:cNvPr id="11" name="footer">
+            <a:extLst xmlns:a="http://schemas.openxmlformats.org/drawingml/2006/main">
+              <a:ext uri="{FF2B5EF4-FFF2-40B4-BE49-F238E27FC236}">
+                <a16:creationId xmlns:a16="http://schemas.microsoft.com/office/drawing/2014/main" id="{0AB5956B-8288-4E5A-8C46-CE9A5814AC87}"/>
               </a:ext>
             </a:extLst>
           </p:cNvPr>
@@ -12092,10 +13126,10 @@
       </p:sp>
       <p:sp>
         <p:nvSpPr>
-          <p:cNvPr id="10" name="page-number">
-            <a:extLst xmlns:a="http://schemas.openxmlformats.org/drawingml/2006/main">
-              <a:ext uri="{FF2B5EF4-FFF2-40B4-BE49-F238E27FC236}">
-                <a16:creationId xmlns:a16="http://schemas.microsoft.com/office/drawing/2014/main" id="{AEACAB37-F5A3-42F5-AB42-F3E3A6816D7E}"/>
+          <p:cNvPr id="12" name="page-number">
+            <a:extLst xmlns:a="http://schemas.openxmlformats.org/drawingml/2006/main">
+              <a:ext uri="{FF2B5EF4-FFF2-40B4-BE49-F238E27FC236}">
+                <a16:creationId xmlns:a16="http://schemas.microsoft.com/office/drawing/2014/main" id="{4385F5BF-8F07-4B1D-BB6B-A1DDFB669542}"/>
               </a:ext>
             </a:extLst>
           </p:cNvPr>
@@ -12148,7 +13182,7 @@
     </p:spTree>
     <p:extLst>
       <p:ext uri="{BB962C8B-B14F-4D97-AF65-F5344CB8AC3E}">
-        <p14:creationId xmlns:p14="http://schemas.microsoft.com/office/powerpoint/2010/main" val="1068036915"/>
+        <p14:creationId xmlns:p14="http://schemas.microsoft.com/office/powerpoint/2010/main" val="1644787925"/>
       </p:ext>
     </p:extLst>
   </p:cSld>
@@ -12176,10 +13210,10 @@
       </p:grpSpPr>
       <p:sp>
         <p:nvSpPr>
-          <p:cNvPr id="13" name="slide-title">
-            <a:extLst xmlns:a="http://schemas.openxmlformats.org/drawingml/2006/main">
-              <a:ext uri="{FF2B5EF4-FFF2-40B4-BE49-F238E27FC236}">
-                <a16:creationId xmlns:a16="http://schemas.microsoft.com/office/drawing/2014/main" id="{D61F419A-1E9B-4658-8221-A544D60B5CBD}"/>
+          <p:cNvPr id="15" name="slide-title">
+            <a:extLst xmlns:a="http://schemas.openxmlformats.org/drawingml/2006/main">
+              <a:ext uri="{FF2B5EF4-FFF2-40B4-BE49-F238E27FC236}">
+                <a16:creationId xmlns:a16="http://schemas.microsoft.com/office/drawing/2014/main" id="{C20509C2-549E-44A0-903E-C84CA3F909DD}"/>
               </a:ext>
             </a:extLst>
           </p:cNvPr>
@@ -12230,7 +13264,7 @@
           <p:cNvPr id="2" name="flow-1">
             <a:extLst xmlns:a="http://schemas.openxmlformats.org/drawingml/2006/main">
               <a:ext uri="{FF2B5EF4-FFF2-40B4-BE49-F238E27FC236}">
-                <a16:creationId xmlns:a16="http://schemas.microsoft.com/office/drawing/2014/main" id="{750ABA8A-11A6-4110-893A-13124051CD20}"/>
+                <a16:creationId xmlns:a16="http://schemas.microsoft.com/office/drawing/2014/main" id="{041B6CA6-F9C1-4B2C-8DB9-6204115347E5}"/>
               </a:ext>
             </a:extLst>
           </p:cNvPr>
@@ -12287,7 +13321,7 @@
           <p:cNvPr id="3" name="flow-2">
             <a:extLst xmlns:a="http://schemas.openxmlformats.org/drawingml/2006/main">
               <a:ext uri="{FF2B5EF4-FFF2-40B4-BE49-F238E27FC236}">
-                <a16:creationId xmlns:a16="http://schemas.microsoft.com/office/drawing/2014/main" id="{3FDCFAF4-A569-466A-868F-E1BF89D56C59}"/>
+                <a16:creationId xmlns:a16="http://schemas.microsoft.com/office/drawing/2014/main" id="{F223765F-0336-4DC1-B299-8473A146202B}"/>
               </a:ext>
             </a:extLst>
           </p:cNvPr>
@@ -12344,7 +13378,7 @@
           <p:cNvPr id="4" name="flow-3">
             <a:extLst xmlns:a="http://schemas.openxmlformats.org/drawingml/2006/main">
               <a:ext uri="{FF2B5EF4-FFF2-40B4-BE49-F238E27FC236}">
-                <a16:creationId xmlns:a16="http://schemas.microsoft.com/office/drawing/2014/main" id="{D6EF3896-48D8-4B76-974B-E94CBA58B28C}"/>
+                <a16:creationId xmlns:a16="http://schemas.microsoft.com/office/drawing/2014/main" id="{6AA40338-CA14-4172-9862-CC2E9881D764}"/>
               </a:ext>
             </a:extLst>
           </p:cNvPr>
@@ -12401,7 +13435,7 @@
           <p:cNvPr id="5" name="flow-4">
             <a:extLst xmlns:a="http://schemas.openxmlformats.org/drawingml/2006/main">
               <a:ext uri="{FF2B5EF4-FFF2-40B4-BE49-F238E27FC236}">
-                <a16:creationId xmlns:a16="http://schemas.microsoft.com/office/drawing/2014/main" id="{7A2B7336-1BCA-444F-9AD4-88B805B033E3}"/>
+                <a16:creationId xmlns:a16="http://schemas.microsoft.com/office/drawing/2014/main" id="{319AEA8C-16A7-471D-9A0C-065C015A0805}"/>
               </a:ext>
             </a:extLst>
           </p:cNvPr>
@@ -12455,7 +13489,7 @@
       </p:sp>
       <p:cxnSp>
         <p:nvCxnSpPr>
-          <p:cNvPr id="26" name=""/>
+          <p:cNvPr id="29" name=""/>
           <p:cNvCxnSpPr>
             <a:stCxn xmlns:a="http://schemas.openxmlformats.org/drawingml/2006/main" id="2" idx="3"/>
             <a:endCxn xmlns:a="http://schemas.openxmlformats.org/drawingml/2006/main" id="3" idx="1"/>
@@ -12481,7 +13515,7 @@
       </p:cxnSp>
       <p:cxnSp>
         <p:nvCxnSpPr>
-          <p:cNvPr id="27" name=""/>
+          <p:cNvPr id="30" name=""/>
           <p:cNvCxnSpPr>
             <a:stCxn xmlns:a="http://schemas.openxmlformats.org/drawingml/2006/main" id="3" idx="3"/>
             <a:endCxn xmlns:a="http://schemas.openxmlformats.org/drawingml/2006/main" id="4" idx="1"/>
@@ -12507,7 +13541,7 @@
       </p:cxnSp>
       <p:cxnSp>
         <p:nvCxnSpPr>
-          <p:cNvPr id="28" name=""/>
+          <p:cNvPr id="31" name=""/>
           <p:cNvCxnSpPr>
             <a:stCxn xmlns:a="http://schemas.openxmlformats.org/drawingml/2006/main" id="4" idx="3"/>
             <a:endCxn xmlns:a="http://schemas.openxmlformats.org/drawingml/2006/main" id="5" idx="1"/>
@@ -12536,7 +13570,7 @@
           <p:cNvPr id="9" name="eyebrow">
             <a:extLst xmlns:a="http://schemas.openxmlformats.org/drawingml/2006/main">
               <a:ext uri="{FF2B5EF4-FFF2-40B4-BE49-F238E27FC236}">
-                <a16:creationId xmlns:a16="http://schemas.microsoft.com/office/drawing/2014/main" id="{B8C23A9B-C718-4379-8AA3-6F19B940E6BE}"/>
+                <a16:creationId xmlns:a16="http://schemas.microsoft.com/office/drawing/2014/main" id="{31BB4099-91B9-494F-8D15-95A160ACAFED}"/>
               </a:ext>
             </a:extLst>
           </p:cNvPr>
@@ -12584,10 +13618,69 @@
       </p:sp>
       <p:sp>
         <p:nvSpPr>
-          <p:cNvPr id="10" name="footer-rule">
-            <a:extLst xmlns:a="http://schemas.openxmlformats.org/drawingml/2006/main">
-              <a:ext uri="{FF2B5EF4-FFF2-40B4-BE49-F238E27FC236}">
-                <a16:creationId xmlns:a16="http://schemas.microsoft.com/office/drawing/2014/main" id="{52969381-8740-4A4B-8916-B43311FABE16}"/>
+          <p:cNvPr id="10" name="rescue-point-logo-background">
+            <a:extLst xmlns:a="http://schemas.openxmlformats.org/drawingml/2006/main">
+              <a:ext uri="{FF2B5EF4-FFF2-40B4-BE49-F238E27FC236}">
+                <a16:creationId xmlns:a16="http://schemas.microsoft.com/office/drawing/2014/main" id="{C3196741-9C44-430F-BC4B-0A05F46E8A9F}"/>
+              </a:ext>
+            </a:extLst>
+          </p:cNvPr>
+          <p:cNvSpPr>
+            <a:spLocks xmlns:a="http://schemas.openxmlformats.org/drawingml/2006/main" noGrp="1"/>
+          </p:cNvSpPr>
+          <p:nvPr/>
+        </p:nvSpPr>
+        <p:spPr>
+          <a:xfrm xmlns:a="http://schemas.openxmlformats.org/drawingml/2006/main">
+            <a:off x="9772650" y="133350"/>
+            <a:ext cx="1733550" cy="457200"/>
+          </a:xfrm>
+          <a:prstGeom xmlns:a="http://schemas.openxmlformats.org/drawingml/2006/main" prst="roundRect">
+            <a:avLst>
+              <a:gd name="adj" fmla="val 16667"/>
+            </a:avLst>
+          </a:prstGeom>
+          <a:solidFill xmlns:a="http://schemas.openxmlformats.org/drawingml/2006/main">
+            <a:srgbClr val="06142E"/>
+          </a:solidFill>
+          <a:ln xmlns:a="http://schemas.openxmlformats.org/drawingml/2006/main" w="9525">
+            <a:solidFill>
+              <a:srgbClr val="1EC5FF">
+                <a:alpha val="33333"/>
+              </a:srgbClr>
+            </a:solidFill>
+            <a:prstDash val="solid"/>
+          </a:ln>
+        </p:spPr>
+      </p:sp>
+      <p:pic>
+        <p:nvPicPr>
+          <p:cNvPr id="34" name="" descr="Figura oficial da documentação dbt usada para explicar: ref transforma SQL em um grafo — source."/>
+          <p:cNvPicPr>
+            <a:picLocks xmlns:a="http://schemas.openxmlformats.org/drawingml/2006/main" noChangeAspect="1"/>
+          </p:cNvPicPr>
+          <p:nvPr/>
+        </p:nvPicPr>
+        <p:blipFill>
+          <a:blip xmlns:r="http://schemas.openxmlformats.org/officeDocument/2006/relationships" xmlns:a="http://schemas.openxmlformats.org/drawingml/2006/main" r:embed="R6a2bf3d8de674f59"/>
+          <a:stretch xmlns:a="http://schemas.openxmlformats.org/drawingml/2006/main"/>
+        </p:blipFill>
+        <p:spPr>
+          <a:xfrm xmlns:a="http://schemas.openxmlformats.org/drawingml/2006/main">
+            <a:off x="9893718" y="209550"/>
+            <a:ext cx="1491414" cy="323850"/>
+          </a:xfrm>
+          <a:prstGeom xmlns:a="http://schemas.openxmlformats.org/drawingml/2006/main" prst="rect">
+            <a:avLst/>
+          </a:prstGeom>
+        </p:spPr>
+      </p:pic>
+      <p:sp>
+        <p:nvSpPr>
+          <p:cNvPr id="12" name="footer-rule">
+            <a:extLst xmlns:a="http://schemas.openxmlformats.org/drawingml/2006/main">
+              <a:ext uri="{FF2B5EF4-FFF2-40B4-BE49-F238E27FC236}">
+                <a16:creationId xmlns:a16="http://schemas.microsoft.com/office/drawing/2014/main" id="{9BEF98FC-8798-430C-AAB8-344B95573532}"/>
               </a:ext>
             </a:extLst>
           </p:cNvPr>
@@ -12617,10 +13710,10 @@
       </p:sp>
       <p:sp>
         <p:nvSpPr>
-          <p:cNvPr id="11" name="footer">
-            <a:extLst xmlns:a="http://schemas.openxmlformats.org/drawingml/2006/main">
-              <a:ext uri="{FF2B5EF4-FFF2-40B4-BE49-F238E27FC236}">
-                <a16:creationId xmlns:a16="http://schemas.microsoft.com/office/drawing/2014/main" id="{A5724807-D7F8-4C48-8325-FF63FB1BE9AE}"/>
+          <p:cNvPr id="13" name="footer">
+            <a:extLst xmlns:a="http://schemas.openxmlformats.org/drawingml/2006/main">
+              <a:ext uri="{FF2B5EF4-FFF2-40B4-BE49-F238E27FC236}">
+                <a16:creationId xmlns:a16="http://schemas.microsoft.com/office/drawing/2014/main" id="{E6968047-01E3-419B-9274-9500874D84C9}"/>
               </a:ext>
             </a:extLst>
           </p:cNvPr>
@@ -12672,10 +13765,10 @@
       </p:sp>
       <p:sp>
         <p:nvSpPr>
-          <p:cNvPr id="12" name="page-number">
-            <a:extLst xmlns:a="http://schemas.openxmlformats.org/drawingml/2006/main">
-              <a:ext uri="{FF2B5EF4-FFF2-40B4-BE49-F238E27FC236}">
-                <a16:creationId xmlns:a16="http://schemas.microsoft.com/office/drawing/2014/main" id="{35B010CD-F4E0-44A3-9A4D-999F37F9D416}"/>
+          <p:cNvPr id="14" name="page-number">
+            <a:extLst xmlns:a="http://schemas.openxmlformats.org/drawingml/2006/main">
+              <a:ext uri="{FF2B5EF4-FFF2-40B4-BE49-F238E27FC236}">
+                <a16:creationId xmlns:a16="http://schemas.microsoft.com/office/drawing/2014/main" id="{E02DC831-8818-4423-8F98-501BDAA6D744}"/>
               </a:ext>
             </a:extLst>
           </p:cNvPr>
@@ -12728,7 +13821,7 @@
     </p:spTree>
     <p:extLst>
       <p:ext uri="{BB962C8B-B14F-4D97-AF65-F5344CB8AC3E}">
-        <p14:creationId xmlns:p14="http://schemas.microsoft.com/office/powerpoint/2010/main" val="1482625972"/>
+        <p14:creationId xmlns:p14="http://schemas.microsoft.com/office/powerpoint/2010/main" val="1318761799"/>
       </p:ext>
     </p:extLst>
   </p:cSld>
@@ -12756,10 +13849,10 @@
       </p:grpSpPr>
       <p:sp>
         <p:nvSpPr>
-          <p:cNvPr id="11" name="slide-title">
-            <a:extLst xmlns:a="http://schemas.openxmlformats.org/drawingml/2006/main">
-              <a:ext uri="{FF2B5EF4-FFF2-40B4-BE49-F238E27FC236}">
-                <a16:creationId xmlns:a16="http://schemas.microsoft.com/office/drawing/2014/main" id="{FCA8E634-B5A2-4F05-A1AA-E50ED0A63613}"/>
+          <p:cNvPr id="13" name="slide-title">
+            <a:extLst xmlns:a="http://schemas.openxmlformats.org/drawingml/2006/main">
+              <a:ext uri="{FF2B5EF4-FFF2-40B4-BE49-F238E27FC236}">
+                <a16:creationId xmlns:a16="http://schemas.microsoft.com/office/drawing/2014/main" id="{09C70920-D5F7-418C-83D4-470C5977DA59}"/>
               </a:ext>
             </a:extLst>
           </p:cNvPr>
@@ -12810,7 +13903,7 @@
           <p:cNvPr id="2" name="slide-subtitle">
             <a:extLst xmlns:a="http://schemas.openxmlformats.org/drawingml/2006/main">
               <a:ext uri="{FF2B5EF4-FFF2-40B4-BE49-F238E27FC236}">
-                <a16:creationId xmlns:a16="http://schemas.microsoft.com/office/drawing/2014/main" id="{8F11D381-E790-417A-B482-E27896D2D206}"/>
+                <a16:creationId xmlns:a16="http://schemas.microsoft.com/office/drawing/2014/main" id="{14C2A6B9-E077-44FD-AEA1-D0838666B4F7}"/>
               </a:ext>
             </a:extLst>
           </p:cNvPr>
@@ -12861,7 +13954,7 @@
           <p:cNvPr id="3" name="bullets">
             <a:extLst xmlns:a="http://schemas.openxmlformats.org/drawingml/2006/main">
               <a:ext uri="{FF2B5EF4-FFF2-40B4-BE49-F238E27FC236}">
-                <a16:creationId xmlns:a16="http://schemas.microsoft.com/office/drawing/2014/main" id="{D370E8CD-46DD-464B-B932-E7397539217A}"/>
+                <a16:creationId xmlns:a16="http://schemas.microsoft.com/office/drawing/2014/main" id="{9F864E7E-9DB1-498A-AC82-E66ADE52236F}"/>
               </a:ext>
             </a:extLst>
           </p:cNvPr>
@@ -12948,7 +14041,7 @@
           <p:cNvPr id="4" name="ambient-glow">
             <a:extLst xmlns:a="http://schemas.openxmlformats.org/drawingml/2006/main">
               <a:ext uri="{FF2B5EF4-FFF2-40B4-BE49-F238E27FC236}">
-                <a16:creationId xmlns:a16="http://schemas.microsoft.com/office/drawing/2014/main" id="{0DC34789-125C-441F-BC25-3437780BB848}"/>
+                <a16:creationId xmlns:a16="http://schemas.microsoft.com/office/drawing/2014/main" id="{B5E5A722-315D-4B69-BCE7-2E5F0BAC8180}"/>
               </a:ext>
             </a:extLst>
           </p:cNvPr>
@@ -12985,7 +14078,7 @@
           <p:cNvPr id="5" name="ambient-core">
             <a:extLst xmlns:a="http://schemas.openxmlformats.org/drawingml/2006/main">
               <a:ext uri="{FF2B5EF4-FFF2-40B4-BE49-F238E27FC236}">
-                <a16:creationId xmlns:a16="http://schemas.microsoft.com/office/drawing/2014/main" id="{ABFB524B-630A-4F31-9009-C522130D75CE}"/>
+                <a16:creationId xmlns:a16="http://schemas.microsoft.com/office/drawing/2014/main" id="{55263C4E-7FF2-408E-BAB1-B09B561883CC}"/>
               </a:ext>
             </a:extLst>
           </p:cNvPr>
@@ -13022,7 +14115,7 @@
           <p:cNvPr id="6" name="section-number">
             <a:extLst xmlns:a="http://schemas.openxmlformats.org/drawingml/2006/main">
               <a:ext uri="{FF2B5EF4-FFF2-40B4-BE49-F238E27FC236}">
-                <a16:creationId xmlns:a16="http://schemas.microsoft.com/office/drawing/2014/main" id="{89E8BFAD-2E46-4BAA-88B1-0A9C454FD626}"/>
+                <a16:creationId xmlns:a16="http://schemas.microsoft.com/office/drawing/2014/main" id="{EA8AA2F9-5F95-4ACC-8CB7-13CDE7F3F50C}"/>
               </a:ext>
             </a:extLst>
           </p:cNvPr>
@@ -13073,7 +14166,7 @@
           <p:cNvPr id="7" name="eyebrow">
             <a:extLst xmlns:a="http://schemas.openxmlformats.org/drawingml/2006/main">
               <a:ext uri="{FF2B5EF4-FFF2-40B4-BE49-F238E27FC236}">
-                <a16:creationId xmlns:a16="http://schemas.microsoft.com/office/drawing/2014/main" id="{95AE73A9-117F-4B81-9366-2125E1BEF586}"/>
+                <a16:creationId xmlns:a16="http://schemas.microsoft.com/office/drawing/2014/main" id="{A66F9F4D-BC26-476D-9B33-A762823B230B}"/>
               </a:ext>
             </a:extLst>
           </p:cNvPr>
@@ -13121,10 +14214,69 @@
       </p:sp>
       <p:sp>
         <p:nvSpPr>
-          <p:cNvPr id="8" name="footer-rule">
-            <a:extLst xmlns:a="http://schemas.openxmlformats.org/drawingml/2006/main">
-              <a:ext uri="{FF2B5EF4-FFF2-40B4-BE49-F238E27FC236}">
-                <a16:creationId xmlns:a16="http://schemas.microsoft.com/office/drawing/2014/main" id="{823725ED-4C6C-4545-B8B0-FAA69E516C6E}"/>
+          <p:cNvPr id="8" name="rescue-point-logo-background">
+            <a:extLst xmlns:a="http://schemas.openxmlformats.org/drawingml/2006/main">
+              <a:ext uri="{FF2B5EF4-FFF2-40B4-BE49-F238E27FC236}">
+                <a16:creationId xmlns:a16="http://schemas.microsoft.com/office/drawing/2014/main" id="{F6F32600-C7D6-424F-B0D0-AC25EE32ED02}"/>
+              </a:ext>
+            </a:extLst>
+          </p:cNvPr>
+          <p:cNvSpPr>
+            <a:spLocks xmlns:a="http://schemas.openxmlformats.org/drawingml/2006/main" noGrp="1"/>
+          </p:cNvSpPr>
+          <p:nvPr/>
+        </p:nvSpPr>
+        <p:spPr>
+          <a:xfrm xmlns:a="http://schemas.openxmlformats.org/drawingml/2006/main">
+            <a:off x="9772650" y="133350"/>
+            <a:ext cx="1733550" cy="457200"/>
+          </a:xfrm>
+          <a:prstGeom xmlns:a="http://schemas.openxmlformats.org/drawingml/2006/main" prst="roundRect">
+            <a:avLst>
+              <a:gd name="adj" fmla="val 16667"/>
+            </a:avLst>
+          </a:prstGeom>
+          <a:solidFill xmlns:a="http://schemas.openxmlformats.org/drawingml/2006/main">
+            <a:srgbClr val="06142E"/>
+          </a:solidFill>
+          <a:ln xmlns:a="http://schemas.openxmlformats.org/drawingml/2006/main" w="9525">
+            <a:solidFill>
+              <a:srgbClr val="1EC5FF">
+                <a:alpha val="33333"/>
+              </a:srgbClr>
+            </a:solidFill>
+            <a:prstDash val="solid"/>
+          </a:ln>
+        </p:spPr>
+      </p:sp>
+      <p:pic>
+        <p:nvPicPr>
+          <p:cNvPr id="23" name="" descr="Figura oficial da documentação dbt usada para explicar: Artifacts respondem perguntas diferentes — Manifest descreve o projeto; run_results registra a execução.."/>
+          <p:cNvPicPr>
+            <a:picLocks xmlns:a="http://schemas.openxmlformats.org/drawingml/2006/main" noChangeAspect="1"/>
+          </p:cNvPicPr>
+          <p:nvPr/>
+        </p:nvPicPr>
+        <p:blipFill>
+          <a:blip xmlns:r="http://schemas.openxmlformats.org/officeDocument/2006/relationships" xmlns:a="http://schemas.openxmlformats.org/drawingml/2006/main" r:embed="R343b71698f43435d"/>
+          <a:stretch xmlns:a="http://schemas.openxmlformats.org/drawingml/2006/main"/>
+        </p:blipFill>
+        <p:spPr>
+          <a:xfrm xmlns:a="http://schemas.openxmlformats.org/drawingml/2006/main">
+            <a:off x="9893718" y="209550"/>
+            <a:ext cx="1491414" cy="323850"/>
+          </a:xfrm>
+          <a:prstGeom xmlns:a="http://schemas.openxmlformats.org/drawingml/2006/main" prst="rect">
+            <a:avLst/>
+          </a:prstGeom>
+        </p:spPr>
+      </p:pic>
+      <p:sp>
+        <p:nvSpPr>
+          <p:cNvPr id="10" name="footer-rule">
+            <a:extLst xmlns:a="http://schemas.openxmlformats.org/drawingml/2006/main">
+              <a:ext uri="{FF2B5EF4-FFF2-40B4-BE49-F238E27FC236}">
+                <a16:creationId xmlns:a16="http://schemas.microsoft.com/office/drawing/2014/main" id="{089ED4EC-A2AA-40BC-9A65-682FE4902801}"/>
               </a:ext>
             </a:extLst>
           </p:cNvPr>
@@ -13154,10 +14306,10 @@
       </p:sp>
       <p:sp>
         <p:nvSpPr>
-          <p:cNvPr id="9" name="footer">
-            <a:extLst xmlns:a="http://schemas.openxmlformats.org/drawingml/2006/main">
-              <a:ext uri="{FF2B5EF4-FFF2-40B4-BE49-F238E27FC236}">
-                <a16:creationId xmlns:a16="http://schemas.microsoft.com/office/drawing/2014/main" id="{BF81C619-6A1A-4AF1-8037-7D8F4C91AD65}"/>
+          <p:cNvPr id="11" name="footer">
+            <a:extLst xmlns:a="http://schemas.openxmlformats.org/drawingml/2006/main">
+              <a:ext uri="{FF2B5EF4-FFF2-40B4-BE49-F238E27FC236}">
+                <a16:creationId xmlns:a16="http://schemas.microsoft.com/office/drawing/2014/main" id="{318513B1-344E-4E3F-B77E-7E6C918E69A2}"/>
               </a:ext>
             </a:extLst>
           </p:cNvPr>
@@ -13209,10 +14361,10 @@
       </p:sp>
       <p:sp>
         <p:nvSpPr>
-          <p:cNvPr id="10" name="page-number">
-            <a:extLst xmlns:a="http://schemas.openxmlformats.org/drawingml/2006/main">
-              <a:ext uri="{FF2B5EF4-FFF2-40B4-BE49-F238E27FC236}">
-                <a16:creationId xmlns:a16="http://schemas.microsoft.com/office/drawing/2014/main" id="{0FFA0034-9AD2-4C80-9137-78FC0339188D}"/>
+          <p:cNvPr id="12" name="page-number">
+            <a:extLst xmlns:a="http://schemas.openxmlformats.org/drawingml/2006/main">
+              <a:ext uri="{FF2B5EF4-FFF2-40B4-BE49-F238E27FC236}">
+                <a16:creationId xmlns:a16="http://schemas.microsoft.com/office/drawing/2014/main" id="{F1B541EE-01D4-481D-A66A-743CAC64C7A2}"/>
               </a:ext>
             </a:extLst>
           </p:cNvPr>
@@ -13265,7 +14417,7 @@
     </p:spTree>
     <p:extLst>
       <p:ext uri="{BB962C8B-B14F-4D97-AF65-F5344CB8AC3E}">
-        <p14:creationId xmlns:p14="http://schemas.microsoft.com/office/powerpoint/2010/main" val="4784591"/>
+        <p14:creationId xmlns:p14="http://schemas.microsoft.com/office/powerpoint/2010/main" val="1984702900"/>
       </p:ext>
     </p:extLst>
   </p:cSld>
